--- a/05_percolation/fig/fig.pptx
+++ b/05_percolation/fig/fig.pptx
@@ -6,6 +6,7 @@
   </p:sldMasterIdLst>
   <p:sldIdLst>
     <p:sldId id="256" r:id="rId2"/>
+    <p:sldId id="257" r:id="rId3"/>
   </p:sldIdLst>
   <p:sldSz cx="9144000" cy="6858000" type="screen4x3"/>
   <p:notesSz cx="6858000" cy="9144000"/>
@@ -939,6 +940,3718 @@
 </p:sld>
 </file>
 
+<file path=ppt/slides/slide2.xml><?xml version="1.0" encoding="utf-8"?>
+<p:sld xmlns:a="http://schemas.openxmlformats.org/drawingml/2006/main" xmlns:r="http://schemas.openxmlformats.org/officeDocument/2006/relationships" xmlns:p="http://schemas.openxmlformats.org/presentationml/2006/main">
+  <p:cSld>
+    <p:spTree>
+      <p:nvGrpSpPr>
+        <p:cNvPr id="1" name=""/>
+        <p:cNvGrpSpPr/>
+        <p:nvPr/>
+      </p:nvGrpSpPr>
+      <p:grpSpPr>
+        <a:xfrm>
+          <a:off x="0" y="0"/>
+          <a:ext cx="0" cy="0"/>
+          <a:chOff x="0" y="0"/>
+          <a:chExt cx="0" cy="0"/>
+        </a:xfrm>
+      </p:grpSpPr>
+      <p:pic>
+        <p:nvPicPr>
+          <p:cNvPr id="7" name="図 6" descr="上から見た交差点のイラスト（信号あり）">
+            <a:extLst>
+              <a:ext uri="{FF2B5EF4-FFF2-40B4-BE49-F238E27FC236}">
+                <a16:creationId xmlns:a16="http://schemas.microsoft.com/office/drawing/2014/main" id="{89A0EA8F-2F67-44BE-6D16-3A49103E14D4}"/>
+              </a:ext>
+            </a:extLst>
+          </p:cNvPr>
+          <p:cNvPicPr>
+            <a:picLocks noChangeAspect="1"/>
+          </p:cNvPicPr>
+          <p:nvPr/>
+        </p:nvPicPr>
+        <p:blipFill>
+          <a:blip r:embed="rId2"/>
+          <a:stretch>
+            <a:fillRect/>
+          </a:stretch>
+        </p:blipFill>
+        <p:spPr>
+          <a:xfrm>
+            <a:off x="-2916943" y="1412776"/>
+            <a:ext cx="3492500" cy="3492500"/>
+          </a:xfrm>
+          <a:prstGeom prst="rect">
+            <a:avLst/>
+          </a:prstGeom>
+        </p:spPr>
+      </p:pic>
+      <p:sp>
+        <p:nvSpPr>
+          <p:cNvPr id="17" name="正方形/長方形 16">
+            <a:extLst>
+              <a:ext uri="{FF2B5EF4-FFF2-40B4-BE49-F238E27FC236}">
+                <a16:creationId xmlns:a16="http://schemas.microsoft.com/office/drawing/2014/main" id="{D2110A12-D436-C232-DD01-EB73810D5245}"/>
+              </a:ext>
+            </a:extLst>
+          </p:cNvPr>
+          <p:cNvSpPr/>
+          <p:nvPr/>
+        </p:nvSpPr>
+        <p:spPr>
+          <a:xfrm>
+            <a:off x="2627784" y="1268760"/>
+            <a:ext cx="287981" cy="4320479"/>
+          </a:xfrm>
+          <a:prstGeom prst="rect">
+            <a:avLst/>
+          </a:prstGeom>
+          <a:solidFill>
+            <a:schemeClr val="bg2">
+              <a:lumMod val="90000"/>
+            </a:schemeClr>
+          </a:solidFill>
+          <a:ln>
+            <a:noFill/>
+          </a:ln>
+        </p:spPr>
+        <p:style>
+          <a:lnRef idx="2">
+            <a:schemeClr val="accent1">
+              <a:shade val="15000"/>
+            </a:schemeClr>
+          </a:lnRef>
+          <a:fillRef idx="1">
+            <a:schemeClr val="accent1"/>
+          </a:fillRef>
+          <a:effectRef idx="0">
+            <a:schemeClr val="accent1"/>
+          </a:effectRef>
+          <a:fontRef idx="minor">
+            <a:schemeClr val="lt1"/>
+          </a:fontRef>
+        </p:style>
+        <p:txBody>
+          <a:bodyPr rtlCol="0" anchor="ctr"/>
+          <a:lstStyle/>
+          <a:p>
+            <a:pPr algn="ctr"/>
+            <a:endParaRPr kumimoji="1" lang="ja-JP" altLang="en-US"/>
+          </a:p>
+        </p:txBody>
+      </p:sp>
+      <p:sp>
+        <p:nvSpPr>
+          <p:cNvPr id="19" name="正方形/長方形 18">
+            <a:extLst>
+              <a:ext uri="{FF2B5EF4-FFF2-40B4-BE49-F238E27FC236}">
+                <a16:creationId xmlns:a16="http://schemas.microsoft.com/office/drawing/2014/main" id="{42A2AB8E-81D8-59EB-C797-09BC8C3CD258}"/>
+              </a:ext>
+            </a:extLst>
+          </p:cNvPr>
+          <p:cNvSpPr/>
+          <p:nvPr/>
+        </p:nvSpPr>
+        <p:spPr>
+          <a:xfrm>
+            <a:off x="3347875" y="1268760"/>
+            <a:ext cx="287981" cy="4320479"/>
+          </a:xfrm>
+          <a:prstGeom prst="rect">
+            <a:avLst/>
+          </a:prstGeom>
+          <a:solidFill>
+            <a:schemeClr val="bg2">
+              <a:lumMod val="90000"/>
+            </a:schemeClr>
+          </a:solidFill>
+          <a:ln>
+            <a:noFill/>
+          </a:ln>
+        </p:spPr>
+        <p:style>
+          <a:lnRef idx="2">
+            <a:schemeClr val="accent1">
+              <a:shade val="15000"/>
+            </a:schemeClr>
+          </a:lnRef>
+          <a:fillRef idx="1">
+            <a:schemeClr val="accent1"/>
+          </a:fillRef>
+          <a:effectRef idx="0">
+            <a:schemeClr val="accent1"/>
+          </a:effectRef>
+          <a:fontRef idx="minor">
+            <a:schemeClr val="lt1"/>
+          </a:fontRef>
+        </p:style>
+        <p:txBody>
+          <a:bodyPr rtlCol="0" anchor="ctr"/>
+          <a:lstStyle/>
+          <a:p>
+            <a:pPr algn="ctr"/>
+            <a:endParaRPr kumimoji="1" lang="ja-JP" altLang="en-US"/>
+          </a:p>
+        </p:txBody>
+      </p:sp>
+      <p:sp>
+        <p:nvSpPr>
+          <p:cNvPr id="20" name="正方形/長方形 19">
+            <a:extLst>
+              <a:ext uri="{FF2B5EF4-FFF2-40B4-BE49-F238E27FC236}">
+                <a16:creationId xmlns:a16="http://schemas.microsoft.com/office/drawing/2014/main" id="{9D08F98F-98E6-F692-DD30-5BABFB7590C5}"/>
+              </a:ext>
+            </a:extLst>
+          </p:cNvPr>
+          <p:cNvSpPr/>
+          <p:nvPr/>
+        </p:nvSpPr>
+        <p:spPr>
+          <a:xfrm>
+            <a:off x="4067966" y="1268760"/>
+            <a:ext cx="287981" cy="4320479"/>
+          </a:xfrm>
+          <a:prstGeom prst="rect">
+            <a:avLst/>
+          </a:prstGeom>
+          <a:solidFill>
+            <a:schemeClr val="bg2">
+              <a:lumMod val="90000"/>
+            </a:schemeClr>
+          </a:solidFill>
+          <a:ln>
+            <a:noFill/>
+          </a:ln>
+        </p:spPr>
+        <p:style>
+          <a:lnRef idx="2">
+            <a:schemeClr val="accent1">
+              <a:shade val="15000"/>
+            </a:schemeClr>
+          </a:lnRef>
+          <a:fillRef idx="1">
+            <a:schemeClr val="accent1"/>
+          </a:fillRef>
+          <a:effectRef idx="0">
+            <a:schemeClr val="accent1"/>
+          </a:effectRef>
+          <a:fontRef idx="minor">
+            <a:schemeClr val="lt1"/>
+          </a:fontRef>
+        </p:style>
+        <p:txBody>
+          <a:bodyPr rtlCol="0" anchor="ctr"/>
+          <a:lstStyle/>
+          <a:p>
+            <a:pPr algn="ctr"/>
+            <a:endParaRPr kumimoji="1" lang="ja-JP" altLang="en-US"/>
+          </a:p>
+        </p:txBody>
+      </p:sp>
+      <p:sp>
+        <p:nvSpPr>
+          <p:cNvPr id="21" name="正方形/長方形 20">
+            <a:extLst>
+              <a:ext uri="{FF2B5EF4-FFF2-40B4-BE49-F238E27FC236}">
+                <a16:creationId xmlns:a16="http://schemas.microsoft.com/office/drawing/2014/main" id="{D4B80107-EA22-28EA-EB13-0412D1379D4E}"/>
+              </a:ext>
+            </a:extLst>
+          </p:cNvPr>
+          <p:cNvSpPr/>
+          <p:nvPr/>
+        </p:nvSpPr>
+        <p:spPr>
+          <a:xfrm>
+            <a:off x="4788057" y="1268760"/>
+            <a:ext cx="287981" cy="4320479"/>
+          </a:xfrm>
+          <a:prstGeom prst="rect">
+            <a:avLst/>
+          </a:prstGeom>
+          <a:solidFill>
+            <a:schemeClr val="bg2">
+              <a:lumMod val="90000"/>
+            </a:schemeClr>
+          </a:solidFill>
+          <a:ln>
+            <a:noFill/>
+          </a:ln>
+        </p:spPr>
+        <p:style>
+          <a:lnRef idx="2">
+            <a:schemeClr val="accent1">
+              <a:shade val="15000"/>
+            </a:schemeClr>
+          </a:lnRef>
+          <a:fillRef idx="1">
+            <a:schemeClr val="accent1"/>
+          </a:fillRef>
+          <a:effectRef idx="0">
+            <a:schemeClr val="accent1"/>
+          </a:effectRef>
+          <a:fontRef idx="minor">
+            <a:schemeClr val="lt1"/>
+          </a:fontRef>
+        </p:style>
+        <p:txBody>
+          <a:bodyPr rtlCol="0" anchor="ctr"/>
+          <a:lstStyle/>
+          <a:p>
+            <a:pPr algn="ctr"/>
+            <a:endParaRPr kumimoji="1" lang="ja-JP" altLang="en-US"/>
+          </a:p>
+        </p:txBody>
+      </p:sp>
+      <p:sp>
+        <p:nvSpPr>
+          <p:cNvPr id="22" name="正方形/長方形 21">
+            <a:extLst>
+              <a:ext uri="{FF2B5EF4-FFF2-40B4-BE49-F238E27FC236}">
+                <a16:creationId xmlns:a16="http://schemas.microsoft.com/office/drawing/2014/main" id="{3D194C60-376C-E80D-DFF7-5D4223F47646}"/>
+              </a:ext>
+            </a:extLst>
+          </p:cNvPr>
+          <p:cNvSpPr/>
+          <p:nvPr/>
+        </p:nvSpPr>
+        <p:spPr>
+          <a:xfrm>
+            <a:off x="5508148" y="1268760"/>
+            <a:ext cx="287981" cy="4320479"/>
+          </a:xfrm>
+          <a:prstGeom prst="rect">
+            <a:avLst/>
+          </a:prstGeom>
+          <a:solidFill>
+            <a:schemeClr val="bg2">
+              <a:lumMod val="90000"/>
+            </a:schemeClr>
+          </a:solidFill>
+          <a:ln>
+            <a:noFill/>
+          </a:ln>
+        </p:spPr>
+        <p:style>
+          <a:lnRef idx="2">
+            <a:schemeClr val="accent1">
+              <a:shade val="15000"/>
+            </a:schemeClr>
+          </a:lnRef>
+          <a:fillRef idx="1">
+            <a:schemeClr val="accent1"/>
+          </a:fillRef>
+          <a:effectRef idx="0">
+            <a:schemeClr val="accent1"/>
+          </a:effectRef>
+          <a:fontRef idx="minor">
+            <a:schemeClr val="lt1"/>
+          </a:fontRef>
+        </p:style>
+        <p:txBody>
+          <a:bodyPr rtlCol="0" anchor="ctr"/>
+          <a:lstStyle/>
+          <a:p>
+            <a:pPr algn="ctr"/>
+            <a:endParaRPr kumimoji="1" lang="ja-JP" altLang="en-US"/>
+          </a:p>
+        </p:txBody>
+      </p:sp>
+      <p:sp>
+        <p:nvSpPr>
+          <p:cNvPr id="23" name="正方形/長方形 22">
+            <a:extLst>
+              <a:ext uri="{FF2B5EF4-FFF2-40B4-BE49-F238E27FC236}">
+                <a16:creationId xmlns:a16="http://schemas.microsoft.com/office/drawing/2014/main" id="{0154FBAC-A6CF-F47C-D416-A896770F0950}"/>
+              </a:ext>
+            </a:extLst>
+          </p:cNvPr>
+          <p:cNvSpPr/>
+          <p:nvPr/>
+        </p:nvSpPr>
+        <p:spPr>
+          <a:xfrm>
+            <a:off x="6228237" y="1268760"/>
+            <a:ext cx="287981" cy="4320479"/>
+          </a:xfrm>
+          <a:prstGeom prst="rect">
+            <a:avLst/>
+          </a:prstGeom>
+          <a:solidFill>
+            <a:schemeClr val="bg2">
+              <a:lumMod val="90000"/>
+            </a:schemeClr>
+          </a:solidFill>
+          <a:ln>
+            <a:noFill/>
+          </a:ln>
+        </p:spPr>
+        <p:style>
+          <a:lnRef idx="2">
+            <a:schemeClr val="accent1">
+              <a:shade val="15000"/>
+            </a:schemeClr>
+          </a:lnRef>
+          <a:fillRef idx="1">
+            <a:schemeClr val="accent1"/>
+          </a:fillRef>
+          <a:effectRef idx="0">
+            <a:schemeClr val="accent1"/>
+          </a:effectRef>
+          <a:fontRef idx="minor">
+            <a:schemeClr val="lt1"/>
+          </a:fontRef>
+        </p:style>
+        <p:txBody>
+          <a:bodyPr rtlCol="0" anchor="ctr"/>
+          <a:lstStyle/>
+          <a:p>
+            <a:pPr algn="ctr"/>
+            <a:endParaRPr kumimoji="1" lang="ja-JP" altLang="en-US"/>
+          </a:p>
+        </p:txBody>
+      </p:sp>
+      <p:sp>
+        <p:nvSpPr>
+          <p:cNvPr id="24" name="正方形/長方形 23">
+            <a:extLst>
+              <a:ext uri="{FF2B5EF4-FFF2-40B4-BE49-F238E27FC236}">
+                <a16:creationId xmlns:a16="http://schemas.microsoft.com/office/drawing/2014/main" id="{0777135A-6B87-4FF0-D6C5-B7E21843CC09}"/>
+              </a:ext>
+            </a:extLst>
+          </p:cNvPr>
+          <p:cNvSpPr/>
+          <p:nvPr/>
+        </p:nvSpPr>
+        <p:spPr>
+          <a:xfrm rot="16200000">
+            <a:off x="4428009" y="-531465"/>
+            <a:ext cx="287981" cy="4320479"/>
+          </a:xfrm>
+          <a:prstGeom prst="rect">
+            <a:avLst/>
+          </a:prstGeom>
+          <a:solidFill>
+            <a:schemeClr val="bg2">
+              <a:lumMod val="90000"/>
+            </a:schemeClr>
+          </a:solidFill>
+          <a:ln>
+            <a:noFill/>
+          </a:ln>
+        </p:spPr>
+        <p:style>
+          <a:lnRef idx="2">
+            <a:schemeClr val="accent1">
+              <a:shade val="15000"/>
+            </a:schemeClr>
+          </a:lnRef>
+          <a:fillRef idx="1">
+            <a:schemeClr val="accent1"/>
+          </a:fillRef>
+          <a:effectRef idx="0">
+            <a:schemeClr val="accent1"/>
+          </a:effectRef>
+          <a:fontRef idx="minor">
+            <a:schemeClr val="lt1"/>
+          </a:fontRef>
+        </p:style>
+        <p:txBody>
+          <a:bodyPr rtlCol="0" anchor="ctr"/>
+          <a:lstStyle/>
+          <a:p>
+            <a:pPr algn="ctr"/>
+            <a:endParaRPr kumimoji="1" lang="ja-JP" altLang="en-US"/>
+          </a:p>
+        </p:txBody>
+      </p:sp>
+      <p:sp>
+        <p:nvSpPr>
+          <p:cNvPr id="25" name="正方形/長方形 24">
+            <a:extLst>
+              <a:ext uri="{FF2B5EF4-FFF2-40B4-BE49-F238E27FC236}">
+                <a16:creationId xmlns:a16="http://schemas.microsoft.com/office/drawing/2014/main" id="{0FB0AAE5-29D9-955D-72DE-F1DBA29A10A4}"/>
+              </a:ext>
+            </a:extLst>
+          </p:cNvPr>
+          <p:cNvSpPr/>
+          <p:nvPr/>
+        </p:nvSpPr>
+        <p:spPr>
+          <a:xfrm rot="16200000">
+            <a:off x="4428008" y="188625"/>
+            <a:ext cx="287981" cy="4320479"/>
+          </a:xfrm>
+          <a:prstGeom prst="rect">
+            <a:avLst/>
+          </a:prstGeom>
+          <a:solidFill>
+            <a:schemeClr val="bg2">
+              <a:lumMod val="90000"/>
+            </a:schemeClr>
+          </a:solidFill>
+          <a:ln>
+            <a:noFill/>
+          </a:ln>
+        </p:spPr>
+        <p:style>
+          <a:lnRef idx="2">
+            <a:schemeClr val="accent1">
+              <a:shade val="15000"/>
+            </a:schemeClr>
+          </a:lnRef>
+          <a:fillRef idx="1">
+            <a:schemeClr val="accent1"/>
+          </a:fillRef>
+          <a:effectRef idx="0">
+            <a:schemeClr val="accent1"/>
+          </a:effectRef>
+          <a:fontRef idx="minor">
+            <a:schemeClr val="lt1"/>
+          </a:fontRef>
+        </p:style>
+        <p:txBody>
+          <a:bodyPr rtlCol="0" anchor="ctr"/>
+          <a:lstStyle/>
+          <a:p>
+            <a:pPr algn="ctr"/>
+            <a:endParaRPr kumimoji="1" lang="ja-JP" altLang="en-US"/>
+          </a:p>
+        </p:txBody>
+      </p:sp>
+      <p:sp>
+        <p:nvSpPr>
+          <p:cNvPr id="26" name="正方形/長方形 25">
+            <a:extLst>
+              <a:ext uri="{FF2B5EF4-FFF2-40B4-BE49-F238E27FC236}">
+                <a16:creationId xmlns:a16="http://schemas.microsoft.com/office/drawing/2014/main" id="{511168FF-2885-F957-57E7-E28D513859D3}"/>
+              </a:ext>
+            </a:extLst>
+          </p:cNvPr>
+          <p:cNvSpPr/>
+          <p:nvPr/>
+        </p:nvSpPr>
+        <p:spPr>
+          <a:xfrm rot="16200000">
+            <a:off x="4428008" y="908715"/>
+            <a:ext cx="287981" cy="4320479"/>
+          </a:xfrm>
+          <a:prstGeom prst="rect">
+            <a:avLst/>
+          </a:prstGeom>
+          <a:solidFill>
+            <a:schemeClr val="bg2">
+              <a:lumMod val="90000"/>
+            </a:schemeClr>
+          </a:solidFill>
+          <a:ln>
+            <a:noFill/>
+          </a:ln>
+        </p:spPr>
+        <p:style>
+          <a:lnRef idx="2">
+            <a:schemeClr val="accent1">
+              <a:shade val="15000"/>
+            </a:schemeClr>
+          </a:lnRef>
+          <a:fillRef idx="1">
+            <a:schemeClr val="accent1"/>
+          </a:fillRef>
+          <a:effectRef idx="0">
+            <a:schemeClr val="accent1"/>
+          </a:effectRef>
+          <a:fontRef idx="minor">
+            <a:schemeClr val="lt1"/>
+          </a:fontRef>
+        </p:style>
+        <p:txBody>
+          <a:bodyPr rtlCol="0" anchor="ctr"/>
+          <a:lstStyle/>
+          <a:p>
+            <a:pPr algn="ctr"/>
+            <a:endParaRPr kumimoji="1" lang="ja-JP" altLang="en-US"/>
+          </a:p>
+        </p:txBody>
+      </p:sp>
+      <p:sp>
+        <p:nvSpPr>
+          <p:cNvPr id="27" name="正方形/長方形 26">
+            <a:extLst>
+              <a:ext uri="{FF2B5EF4-FFF2-40B4-BE49-F238E27FC236}">
+                <a16:creationId xmlns:a16="http://schemas.microsoft.com/office/drawing/2014/main" id="{BE607D3B-7732-AF2A-E549-D43A3D1DE18B}"/>
+              </a:ext>
+            </a:extLst>
+          </p:cNvPr>
+          <p:cNvSpPr/>
+          <p:nvPr/>
+        </p:nvSpPr>
+        <p:spPr>
+          <a:xfrm rot="16200000">
+            <a:off x="4428010" y="1628805"/>
+            <a:ext cx="287981" cy="4320479"/>
+          </a:xfrm>
+          <a:prstGeom prst="rect">
+            <a:avLst/>
+          </a:prstGeom>
+          <a:solidFill>
+            <a:schemeClr val="bg2">
+              <a:lumMod val="90000"/>
+            </a:schemeClr>
+          </a:solidFill>
+          <a:ln>
+            <a:noFill/>
+          </a:ln>
+        </p:spPr>
+        <p:style>
+          <a:lnRef idx="2">
+            <a:schemeClr val="accent1">
+              <a:shade val="15000"/>
+            </a:schemeClr>
+          </a:lnRef>
+          <a:fillRef idx="1">
+            <a:schemeClr val="accent1"/>
+          </a:fillRef>
+          <a:effectRef idx="0">
+            <a:schemeClr val="accent1"/>
+          </a:effectRef>
+          <a:fontRef idx="minor">
+            <a:schemeClr val="lt1"/>
+          </a:fontRef>
+        </p:style>
+        <p:txBody>
+          <a:bodyPr rtlCol="0" anchor="ctr"/>
+          <a:lstStyle/>
+          <a:p>
+            <a:pPr algn="ctr"/>
+            <a:endParaRPr kumimoji="1" lang="ja-JP" altLang="en-US"/>
+          </a:p>
+        </p:txBody>
+      </p:sp>
+      <p:sp>
+        <p:nvSpPr>
+          <p:cNvPr id="28" name="正方形/長方形 27">
+            <a:extLst>
+              <a:ext uri="{FF2B5EF4-FFF2-40B4-BE49-F238E27FC236}">
+                <a16:creationId xmlns:a16="http://schemas.microsoft.com/office/drawing/2014/main" id="{08DACA2A-4C9B-DB92-BEBC-72DB86722F0F}"/>
+              </a:ext>
+            </a:extLst>
+          </p:cNvPr>
+          <p:cNvSpPr/>
+          <p:nvPr/>
+        </p:nvSpPr>
+        <p:spPr>
+          <a:xfrm rot="16200000">
+            <a:off x="4428009" y="2348895"/>
+            <a:ext cx="287981" cy="4320479"/>
+          </a:xfrm>
+          <a:prstGeom prst="rect">
+            <a:avLst/>
+          </a:prstGeom>
+          <a:solidFill>
+            <a:schemeClr val="bg2">
+              <a:lumMod val="90000"/>
+            </a:schemeClr>
+          </a:solidFill>
+          <a:ln>
+            <a:noFill/>
+          </a:ln>
+        </p:spPr>
+        <p:style>
+          <a:lnRef idx="2">
+            <a:schemeClr val="accent1">
+              <a:shade val="15000"/>
+            </a:schemeClr>
+          </a:lnRef>
+          <a:fillRef idx="1">
+            <a:schemeClr val="accent1"/>
+          </a:fillRef>
+          <a:effectRef idx="0">
+            <a:schemeClr val="accent1"/>
+          </a:effectRef>
+          <a:fontRef idx="minor">
+            <a:schemeClr val="lt1"/>
+          </a:fontRef>
+        </p:style>
+        <p:txBody>
+          <a:bodyPr rtlCol="0" anchor="ctr"/>
+          <a:lstStyle/>
+          <a:p>
+            <a:pPr algn="ctr"/>
+            <a:endParaRPr kumimoji="1" lang="ja-JP" altLang="en-US"/>
+          </a:p>
+        </p:txBody>
+      </p:sp>
+      <p:sp>
+        <p:nvSpPr>
+          <p:cNvPr id="29" name="正方形/長方形 28">
+            <a:extLst>
+              <a:ext uri="{FF2B5EF4-FFF2-40B4-BE49-F238E27FC236}">
+                <a16:creationId xmlns:a16="http://schemas.microsoft.com/office/drawing/2014/main" id="{81F7F883-5E83-9C40-741B-4D4420F9E6FA}"/>
+              </a:ext>
+            </a:extLst>
+          </p:cNvPr>
+          <p:cNvSpPr/>
+          <p:nvPr/>
+        </p:nvSpPr>
+        <p:spPr>
+          <a:xfrm rot="16200000">
+            <a:off x="4428009" y="3068987"/>
+            <a:ext cx="287981" cy="4320479"/>
+          </a:xfrm>
+          <a:prstGeom prst="rect">
+            <a:avLst/>
+          </a:prstGeom>
+          <a:solidFill>
+            <a:schemeClr val="bg2">
+              <a:lumMod val="90000"/>
+            </a:schemeClr>
+          </a:solidFill>
+          <a:ln>
+            <a:noFill/>
+          </a:ln>
+        </p:spPr>
+        <p:style>
+          <a:lnRef idx="2">
+            <a:schemeClr val="accent1">
+              <a:shade val="15000"/>
+            </a:schemeClr>
+          </a:lnRef>
+          <a:fillRef idx="1">
+            <a:schemeClr val="accent1"/>
+          </a:fillRef>
+          <a:effectRef idx="0">
+            <a:schemeClr val="accent1"/>
+          </a:effectRef>
+          <a:fontRef idx="minor">
+            <a:schemeClr val="lt1"/>
+          </a:fontRef>
+        </p:style>
+        <p:txBody>
+          <a:bodyPr rtlCol="0" anchor="ctr"/>
+          <a:lstStyle/>
+          <a:p>
+            <a:pPr algn="ctr"/>
+            <a:endParaRPr kumimoji="1" lang="ja-JP" altLang="en-US"/>
+          </a:p>
+        </p:txBody>
+      </p:sp>
+      <p:cxnSp>
+        <p:nvCxnSpPr>
+          <p:cNvPr id="31" name="直線コネクタ 30">
+            <a:extLst>
+              <a:ext uri="{FF2B5EF4-FFF2-40B4-BE49-F238E27FC236}">
+                <a16:creationId xmlns:a16="http://schemas.microsoft.com/office/drawing/2014/main" id="{106F3C36-2BB3-FC93-D8F8-E860198252AF}"/>
+              </a:ext>
+            </a:extLst>
+          </p:cNvPr>
+          <p:cNvCxnSpPr>
+            <a:stCxn id="17" idx="0"/>
+          </p:cNvCxnSpPr>
+          <p:nvPr/>
+        </p:nvCxnSpPr>
+        <p:spPr>
+          <a:xfrm flipH="1">
+            <a:off x="2771774" y="1268760"/>
+            <a:ext cx="1" cy="4320479"/>
+          </a:xfrm>
+          <a:prstGeom prst="line">
+            <a:avLst/>
+          </a:prstGeom>
+          <a:ln w="19050">
+            <a:solidFill>
+              <a:schemeClr val="bg1"/>
+            </a:solidFill>
+            <a:prstDash val="dash"/>
+          </a:ln>
+        </p:spPr>
+        <p:style>
+          <a:lnRef idx="2">
+            <a:schemeClr val="accent1"/>
+          </a:lnRef>
+          <a:fillRef idx="0">
+            <a:schemeClr val="accent1"/>
+          </a:fillRef>
+          <a:effectRef idx="1">
+            <a:schemeClr val="accent1"/>
+          </a:effectRef>
+          <a:fontRef idx="minor">
+            <a:schemeClr val="tx1"/>
+          </a:fontRef>
+        </p:style>
+      </p:cxnSp>
+      <p:cxnSp>
+        <p:nvCxnSpPr>
+          <p:cNvPr id="32" name="直線コネクタ 31">
+            <a:extLst>
+              <a:ext uri="{FF2B5EF4-FFF2-40B4-BE49-F238E27FC236}">
+                <a16:creationId xmlns:a16="http://schemas.microsoft.com/office/drawing/2014/main" id="{78AA80CD-FBF5-750B-CFB2-019CBD7CA65A}"/>
+              </a:ext>
+            </a:extLst>
+          </p:cNvPr>
+          <p:cNvCxnSpPr/>
+          <p:nvPr/>
+        </p:nvCxnSpPr>
+        <p:spPr>
+          <a:xfrm flipH="1">
+            <a:off x="3494309" y="1277762"/>
+            <a:ext cx="1" cy="4320479"/>
+          </a:xfrm>
+          <a:prstGeom prst="line">
+            <a:avLst/>
+          </a:prstGeom>
+          <a:ln w="19050">
+            <a:solidFill>
+              <a:schemeClr val="bg1"/>
+            </a:solidFill>
+            <a:prstDash val="dash"/>
+          </a:ln>
+        </p:spPr>
+        <p:style>
+          <a:lnRef idx="2">
+            <a:schemeClr val="accent1"/>
+          </a:lnRef>
+          <a:fillRef idx="0">
+            <a:schemeClr val="accent1"/>
+          </a:fillRef>
+          <a:effectRef idx="1">
+            <a:schemeClr val="accent1"/>
+          </a:effectRef>
+          <a:fontRef idx="minor">
+            <a:schemeClr val="tx1"/>
+          </a:fontRef>
+        </p:style>
+      </p:cxnSp>
+      <p:cxnSp>
+        <p:nvCxnSpPr>
+          <p:cNvPr id="33" name="直線コネクタ 32">
+            <a:extLst>
+              <a:ext uri="{FF2B5EF4-FFF2-40B4-BE49-F238E27FC236}">
+                <a16:creationId xmlns:a16="http://schemas.microsoft.com/office/drawing/2014/main" id="{44D0DA42-4D4F-EA21-2947-A687A5C57989}"/>
+              </a:ext>
+            </a:extLst>
+          </p:cNvPr>
+          <p:cNvCxnSpPr/>
+          <p:nvPr/>
+        </p:nvCxnSpPr>
+        <p:spPr>
+          <a:xfrm flipH="1">
+            <a:off x="4218565" y="1277761"/>
+            <a:ext cx="1" cy="4320479"/>
+          </a:xfrm>
+          <a:prstGeom prst="line">
+            <a:avLst/>
+          </a:prstGeom>
+          <a:ln w="19050">
+            <a:solidFill>
+              <a:schemeClr val="bg1"/>
+            </a:solidFill>
+            <a:prstDash val="dash"/>
+          </a:ln>
+        </p:spPr>
+        <p:style>
+          <a:lnRef idx="2">
+            <a:schemeClr val="accent1"/>
+          </a:lnRef>
+          <a:fillRef idx="0">
+            <a:schemeClr val="accent1"/>
+          </a:fillRef>
+          <a:effectRef idx="1">
+            <a:schemeClr val="accent1"/>
+          </a:effectRef>
+          <a:fontRef idx="minor">
+            <a:schemeClr val="tx1"/>
+          </a:fontRef>
+        </p:style>
+      </p:cxnSp>
+      <p:cxnSp>
+        <p:nvCxnSpPr>
+          <p:cNvPr id="34" name="直線コネクタ 33">
+            <a:extLst>
+              <a:ext uri="{FF2B5EF4-FFF2-40B4-BE49-F238E27FC236}">
+                <a16:creationId xmlns:a16="http://schemas.microsoft.com/office/drawing/2014/main" id="{B018C9E4-273B-D816-268F-CA572886E459}"/>
+              </a:ext>
+            </a:extLst>
+          </p:cNvPr>
+          <p:cNvCxnSpPr/>
+          <p:nvPr/>
+        </p:nvCxnSpPr>
+        <p:spPr>
+          <a:xfrm flipH="1">
+            <a:off x="4922033" y="1277761"/>
+            <a:ext cx="1" cy="4320479"/>
+          </a:xfrm>
+          <a:prstGeom prst="line">
+            <a:avLst/>
+          </a:prstGeom>
+          <a:ln w="19050">
+            <a:solidFill>
+              <a:schemeClr val="bg1"/>
+            </a:solidFill>
+            <a:prstDash val="dash"/>
+          </a:ln>
+        </p:spPr>
+        <p:style>
+          <a:lnRef idx="2">
+            <a:schemeClr val="accent1"/>
+          </a:lnRef>
+          <a:fillRef idx="0">
+            <a:schemeClr val="accent1"/>
+          </a:fillRef>
+          <a:effectRef idx="1">
+            <a:schemeClr val="accent1"/>
+          </a:effectRef>
+          <a:fontRef idx="minor">
+            <a:schemeClr val="tx1"/>
+          </a:fontRef>
+        </p:style>
+      </p:cxnSp>
+      <p:cxnSp>
+        <p:nvCxnSpPr>
+          <p:cNvPr id="35" name="直線コネクタ 34">
+            <a:extLst>
+              <a:ext uri="{FF2B5EF4-FFF2-40B4-BE49-F238E27FC236}">
+                <a16:creationId xmlns:a16="http://schemas.microsoft.com/office/drawing/2014/main" id="{6494950C-7C1F-A5F2-FC51-F8F68ACB5DBE}"/>
+              </a:ext>
+            </a:extLst>
+          </p:cNvPr>
+          <p:cNvCxnSpPr/>
+          <p:nvPr/>
+        </p:nvCxnSpPr>
+        <p:spPr>
+          <a:xfrm flipH="1">
+            <a:off x="5652137" y="1277761"/>
+            <a:ext cx="1" cy="4320479"/>
+          </a:xfrm>
+          <a:prstGeom prst="line">
+            <a:avLst/>
+          </a:prstGeom>
+          <a:ln w="19050">
+            <a:solidFill>
+              <a:schemeClr val="bg1"/>
+            </a:solidFill>
+            <a:prstDash val="dash"/>
+          </a:ln>
+        </p:spPr>
+        <p:style>
+          <a:lnRef idx="2">
+            <a:schemeClr val="accent1"/>
+          </a:lnRef>
+          <a:fillRef idx="0">
+            <a:schemeClr val="accent1"/>
+          </a:fillRef>
+          <a:effectRef idx="1">
+            <a:schemeClr val="accent1"/>
+          </a:effectRef>
+          <a:fontRef idx="minor">
+            <a:schemeClr val="tx1"/>
+          </a:fontRef>
+        </p:style>
+      </p:cxnSp>
+      <p:cxnSp>
+        <p:nvCxnSpPr>
+          <p:cNvPr id="36" name="直線コネクタ 35">
+            <a:extLst>
+              <a:ext uri="{FF2B5EF4-FFF2-40B4-BE49-F238E27FC236}">
+                <a16:creationId xmlns:a16="http://schemas.microsoft.com/office/drawing/2014/main" id="{13D2F7E4-B06F-4494-1066-A2D7BE9B5B39}"/>
+              </a:ext>
+            </a:extLst>
+          </p:cNvPr>
+          <p:cNvCxnSpPr/>
+          <p:nvPr/>
+        </p:nvCxnSpPr>
+        <p:spPr>
+          <a:xfrm flipH="1">
+            <a:off x="6372226" y="1277761"/>
+            <a:ext cx="1" cy="4320479"/>
+          </a:xfrm>
+          <a:prstGeom prst="line">
+            <a:avLst/>
+          </a:prstGeom>
+          <a:ln w="19050">
+            <a:solidFill>
+              <a:schemeClr val="bg1"/>
+            </a:solidFill>
+            <a:prstDash val="dash"/>
+          </a:ln>
+        </p:spPr>
+        <p:style>
+          <a:lnRef idx="2">
+            <a:schemeClr val="accent1"/>
+          </a:lnRef>
+          <a:fillRef idx="0">
+            <a:schemeClr val="accent1"/>
+          </a:fillRef>
+          <a:effectRef idx="1">
+            <a:schemeClr val="accent1"/>
+          </a:effectRef>
+          <a:fontRef idx="minor">
+            <a:schemeClr val="tx1"/>
+          </a:fontRef>
+        </p:style>
+      </p:cxnSp>
+      <p:cxnSp>
+        <p:nvCxnSpPr>
+          <p:cNvPr id="37" name="直線コネクタ 36">
+            <a:extLst>
+              <a:ext uri="{FF2B5EF4-FFF2-40B4-BE49-F238E27FC236}">
+                <a16:creationId xmlns:a16="http://schemas.microsoft.com/office/drawing/2014/main" id="{3D1608A7-8E3F-03B7-E608-A9787D2C44B4}"/>
+              </a:ext>
+            </a:extLst>
+          </p:cNvPr>
+          <p:cNvCxnSpPr>
+            <a:cxnSpLocks/>
+            <a:stCxn id="24" idx="0"/>
+            <a:endCxn id="24" idx="2"/>
+          </p:cNvCxnSpPr>
+          <p:nvPr/>
+        </p:nvCxnSpPr>
+        <p:spPr>
+          <a:xfrm>
+            <a:off x="2411760" y="1628774"/>
+            <a:ext cx="4320479" cy="0"/>
+          </a:xfrm>
+          <a:prstGeom prst="line">
+            <a:avLst/>
+          </a:prstGeom>
+          <a:ln w="19050">
+            <a:solidFill>
+              <a:schemeClr val="bg1"/>
+            </a:solidFill>
+            <a:prstDash val="dash"/>
+          </a:ln>
+        </p:spPr>
+        <p:style>
+          <a:lnRef idx="2">
+            <a:schemeClr val="accent1"/>
+          </a:lnRef>
+          <a:fillRef idx="0">
+            <a:schemeClr val="accent1"/>
+          </a:fillRef>
+          <a:effectRef idx="1">
+            <a:schemeClr val="accent1"/>
+          </a:effectRef>
+          <a:fontRef idx="minor">
+            <a:schemeClr val="tx1"/>
+          </a:fontRef>
+        </p:style>
+      </p:cxnSp>
+      <p:cxnSp>
+        <p:nvCxnSpPr>
+          <p:cNvPr id="40" name="直線コネクタ 39">
+            <a:extLst>
+              <a:ext uri="{FF2B5EF4-FFF2-40B4-BE49-F238E27FC236}">
+                <a16:creationId xmlns:a16="http://schemas.microsoft.com/office/drawing/2014/main" id="{B97775E6-A5D1-AC81-2B19-E432225D4CC4}"/>
+              </a:ext>
+            </a:extLst>
+          </p:cNvPr>
+          <p:cNvCxnSpPr>
+            <a:cxnSpLocks/>
+          </p:cNvCxnSpPr>
+          <p:nvPr/>
+        </p:nvCxnSpPr>
+        <p:spPr>
+          <a:xfrm>
+            <a:off x="2411759" y="2348864"/>
+            <a:ext cx="4320479" cy="0"/>
+          </a:xfrm>
+          <a:prstGeom prst="line">
+            <a:avLst/>
+          </a:prstGeom>
+          <a:ln w="19050">
+            <a:solidFill>
+              <a:schemeClr val="bg1"/>
+            </a:solidFill>
+            <a:prstDash val="dash"/>
+          </a:ln>
+        </p:spPr>
+        <p:style>
+          <a:lnRef idx="2">
+            <a:schemeClr val="accent1"/>
+          </a:lnRef>
+          <a:fillRef idx="0">
+            <a:schemeClr val="accent1"/>
+          </a:fillRef>
+          <a:effectRef idx="1">
+            <a:schemeClr val="accent1"/>
+          </a:effectRef>
+          <a:fontRef idx="minor">
+            <a:schemeClr val="tx1"/>
+          </a:fontRef>
+        </p:style>
+      </p:cxnSp>
+      <p:cxnSp>
+        <p:nvCxnSpPr>
+          <p:cNvPr id="41" name="直線コネクタ 40">
+            <a:extLst>
+              <a:ext uri="{FF2B5EF4-FFF2-40B4-BE49-F238E27FC236}">
+                <a16:creationId xmlns:a16="http://schemas.microsoft.com/office/drawing/2014/main" id="{6146C9A2-AD49-0B08-8636-5A2A1E5FF2EF}"/>
+              </a:ext>
+            </a:extLst>
+          </p:cNvPr>
+          <p:cNvCxnSpPr>
+            <a:cxnSpLocks/>
+          </p:cNvCxnSpPr>
+          <p:nvPr/>
+        </p:nvCxnSpPr>
+        <p:spPr>
+          <a:xfrm>
+            <a:off x="2411759" y="3789045"/>
+            <a:ext cx="4320479" cy="0"/>
+          </a:xfrm>
+          <a:prstGeom prst="line">
+            <a:avLst/>
+          </a:prstGeom>
+          <a:ln w="19050">
+            <a:solidFill>
+              <a:schemeClr val="bg1"/>
+            </a:solidFill>
+            <a:prstDash val="dash"/>
+          </a:ln>
+        </p:spPr>
+        <p:style>
+          <a:lnRef idx="2">
+            <a:schemeClr val="accent1"/>
+          </a:lnRef>
+          <a:fillRef idx="0">
+            <a:schemeClr val="accent1"/>
+          </a:fillRef>
+          <a:effectRef idx="1">
+            <a:schemeClr val="accent1"/>
+          </a:effectRef>
+          <a:fontRef idx="minor">
+            <a:schemeClr val="tx1"/>
+          </a:fontRef>
+        </p:style>
+      </p:cxnSp>
+      <p:cxnSp>
+        <p:nvCxnSpPr>
+          <p:cNvPr id="42" name="直線コネクタ 41">
+            <a:extLst>
+              <a:ext uri="{FF2B5EF4-FFF2-40B4-BE49-F238E27FC236}">
+                <a16:creationId xmlns:a16="http://schemas.microsoft.com/office/drawing/2014/main" id="{345A3169-7D35-9EAC-AA93-4440D3814AF7}"/>
+              </a:ext>
+            </a:extLst>
+          </p:cNvPr>
+          <p:cNvCxnSpPr>
+            <a:cxnSpLocks/>
+          </p:cNvCxnSpPr>
+          <p:nvPr/>
+        </p:nvCxnSpPr>
+        <p:spPr>
+          <a:xfrm>
+            <a:off x="2411759" y="4509134"/>
+            <a:ext cx="4320479" cy="0"/>
+          </a:xfrm>
+          <a:prstGeom prst="line">
+            <a:avLst/>
+          </a:prstGeom>
+          <a:ln w="19050">
+            <a:solidFill>
+              <a:schemeClr val="bg1"/>
+            </a:solidFill>
+            <a:prstDash val="dash"/>
+          </a:ln>
+        </p:spPr>
+        <p:style>
+          <a:lnRef idx="2">
+            <a:schemeClr val="accent1"/>
+          </a:lnRef>
+          <a:fillRef idx="0">
+            <a:schemeClr val="accent1"/>
+          </a:fillRef>
+          <a:effectRef idx="1">
+            <a:schemeClr val="accent1"/>
+          </a:effectRef>
+          <a:fontRef idx="minor">
+            <a:schemeClr val="tx1"/>
+          </a:fontRef>
+        </p:style>
+      </p:cxnSp>
+      <p:cxnSp>
+        <p:nvCxnSpPr>
+          <p:cNvPr id="43" name="直線コネクタ 42">
+            <a:extLst>
+              <a:ext uri="{FF2B5EF4-FFF2-40B4-BE49-F238E27FC236}">
+                <a16:creationId xmlns:a16="http://schemas.microsoft.com/office/drawing/2014/main" id="{1C59D29D-D069-B5B8-C010-C6738421BC7E}"/>
+              </a:ext>
+            </a:extLst>
+          </p:cNvPr>
+          <p:cNvCxnSpPr>
+            <a:cxnSpLocks/>
+          </p:cNvCxnSpPr>
+          <p:nvPr/>
+        </p:nvCxnSpPr>
+        <p:spPr>
+          <a:xfrm>
+            <a:off x="2411759" y="5229226"/>
+            <a:ext cx="4320479" cy="0"/>
+          </a:xfrm>
+          <a:prstGeom prst="line">
+            <a:avLst/>
+          </a:prstGeom>
+          <a:ln w="19050">
+            <a:solidFill>
+              <a:schemeClr val="bg1"/>
+            </a:solidFill>
+            <a:prstDash val="dash"/>
+          </a:ln>
+        </p:spPr>
+        <p:style>
+          <a:lnRef idx="2">
+            <a:schemeClr val="accent1"/>
+          </a:lnRef>
+          <a:fillRef idx="0">
+            <a:schemeClr val="accent1"/>
+          </a:fillRef>
+          <a:effectRef idx="1">
+            <a:schemeClr val="accent1"/>
+          </a:effectRef>
+          <a:fontRef idx="minor">
+            <a:schemeClr val="tx1"/>
+          </a:fontRef>
+        </p:style>
+      </p:cxnSp>
+      <p:cxnSp>
+        <p:nvCxnSpPr>
+          <p:cNvPr id="44" name="直線コネクタ 43">
+            <a:extLst>
+              <a:ext uri="{FF2B5EF4-FFF2-40B4-BE49-F238E27FC236}">
+                <a16:creationId xmlns:a16="http://schemas.microsoft.com/office/drawing/2014/main" id="{2A53A524-25E2-A9B5-7DB2-F58CF71D342E}"/>
+              </a:ext>
+            </a:extLst>
+          </p:cNvPr>
+          <p:cNvCxnSpPr>
+            <a:cxnSpLocks/>
+          </p:cNvCxnSpPr>
+          <p:nvPr/>
+        </p:nvCxnSpPr>
+        <p:spPr>
+          <a:xfrm>
+            <a:off x="2411759" y="3068955"/>
+            <a:ext cx="4320479" cy="0"/>
+          </a:xfrm>
+          <a:prstGeom prst="line">
+            <a:avLst/>
+          </a:prstGeom>
+          <a:ln w="19050">
+            <a:solidFill>
+              <a:schemeClr val="bg1"/>
+            </a:solidFill>
+            <a:prstDash val="dash"/>
+          </a:ln>
+        </p:spPr>
+        <p:style>
+          <a:lnRef idx="2">
+            <a:schemeClr val="accent1"/>
+          </a:lnRef>
+          <a:fillRef idx="0">
+            <a:schemeClr val="accent1"/>
+          </a:fillRef>
+          <a:effectRef idx="1">
+            <a:schemeClr val="accent1"/>
+          </a:effectRef>
+          <a:fontRef idx="minor">
+            <a:schemeClr val="tx1"/>
+          </a:fontRef>
+        </p:style>
+      </p:cxnSp>
+      <p:sp>
+        <p:nvSpPr>
+          <p:cNvPr id="45" name="正方形/長方形 44">
+            <a:extLst>
+              <a:ext uri="{FF2B5EF4-FFF2-40B4-BE49-F238E27FC236}">
+                <a16:creationId xmlns:a16="http://schemas.microsoft.com/office/drawing/2014/main" id="{2E6B7384-121F-5436-5E89-BCD94C1965D2}"/>
+              </a:ext>
+            </a:extLst>
+          </p:cNvPr>
+          <p:cNvSpPr/>
+          <p:nvPr/>
+        </p:nvSpPr>
+        <p:spPr>
+          <a:xfrm>
+            <a:off x="2627784" y="1484779"/>
+            <a:ext cx="280404" cy="287983"/>
+          </a:xfrm>
+          <a:prstGeom prst="rect">
+            <a:avLst/>
+          </a:prstGeom>
+          <a:solidFill>
+            <a:schemeClr val="bg2">
+              <a:lumMod val="90000"/>
+            </a:schemeClr>
+          </a:solidFill>
+          <a:ln>
+            <a:noFill/>
+          </a:ln>
+        </p:spPr>
+        <p:style>
+          <a:lnRef idx="2">
+            <a:schemeClr val="accent1">
+              <a:shade val="15000"/>
+            </a:schemeClr>
+          </a:lnRef>
+          <a:fillRef idx="1">
+            <a:schemeClr val="accent1"/>
+          </a:fillRef>
+          <a:effectRef idx="0">
+            <a:schemeClr val="accent1"/>
+          </a:effectRef>
+          <a:fontRef idx="minor">
+            <a:schemeClr val="lt1"/>
+          </a:fontRef>
+        </p:style>
+        <p:txBody>
+          <a:bodyPr rtlCol="0" anchor="ctr"/>
+          <a:lstStyle/>
+          <a:p>
+            <a:pPr algn="ctr"/>
+            <a:endParaRPr kumimoji="1" lang="ja-JP" altLang="en-US"/>
+          </a:p>
+        </p:txBody>
+      </p:sp>
+      <p:sp>
+        <p:nvSpPr>
+          <p:cNvPr id="46" name="正方形/長方形 45">
+            <a:extLst>
+              <a:ext uri="{FF2B5EF4-FFF2-40B4-BE49-F238E27FC236}">
+                <a16:creationId xmlns:a16="http://schemas.microsoft.com/office/drawing/2014/main" id="{A6A4DCD2-1EFF-9ECD-F348-0ACF1C70F0C0}"/>
+              </a:ext>
+            </a:extLst>
+          </p:cNvPr>
+          <p:cNvSpPr/>
+          <p:nvPr/>
+        </p:nvSpPr>
+        <p:spPr>
+          <a:xfrm>
+            <a:off x="3347872" y="1484779"/>
+            <a:ext cx="280404" cy="287983"/>
+          </a:xfrm>
+          <a:prstGeom prst="rect">
+            <a:avLst/>
+          </a:prstGeom>
+          <a:solidFill>
+            <a:schemeClr val="bg2">
+              <a:lumMod val="90000"/>
+            </a:schemeClr>
+          </a:solidFill>
+          <a:ln>
+            <a:noFill/>
+          </a:ln>
+        </p:spPr>
+        <p:style>
+          <a:lnRef idx="2">
+            <a:schemeClr val="accent1">
+              <a:shade val="15000"/>
+            </a:schemeClr>
+          </a:lnRef>
+          <a:fillRef idx="1">
+            <a:schemeClr val="accent1"/>
+          </a:fillRef>
+          <a:effectRef idx="0">
+            <a:schemeClr val="accent1"/>
+          </a:effectRef>
+          <a:fontRef idx="minor">
+            <a:schemeClr val="lt1"/>
+          </a:fontRef>
+        </p:style>
+        <p:txBody>
+          <a:bodyPr rtlCol="0" anchor="ctr"/>
+          <a:lstStyle/>
+          <a:p>
+            <a:pPr algn="ctr"/>
+            <a:endParaRPr kumimoji="1" lang="ja-JP" altLang="en-US"/>
+          </a:p>
+        </p:txBody>
+      </p:sp>
+      <p:sp>
+        <p:nvSpPr>
+          <p:cNvPr id="47" name="正方形/長方形 46">
+            <a:extLst>
+              <a:ext uri="{FF2B5EF4-FFF2-40B4-BE49-F238E27FC236}">
+                <a16:creationId xmlns:a16="http://schemas.microsoft.com/office/drawing/2014/main" id="{35608B40-78CC-E023-69BC-F82DAD6940D9}"/>
+              </a:ext>
+            </a:extLst>
+          </p:cNvPr>
+          <p:cNvSpPr/>
+          <p:nvPr/>
+        </p:nvSpPr>
+        <p:spPr>
+          <a:xfrm>
+            <a:off x="4071759" y="1484779"/>
+            <a:ext cx="280404" cy="287983"/>
+          </a:xfrm>
+          <a:prstGeom prst="rect">
+            <a:avLst/>
+          </a:prstGeom>
+          <a:solidFill>
+            <a:schemeClr val="bg2">
+              <a:lumMod val="90000"/>
+            </a:schemeClr>
+          </a:solidFill>
+          <a:ln>
+            <a:noFill/>
+          </a:ln>
+        </p:spPr>
+        <p:style>
+          <a:lnRef idx="2">
+            <a:schemeClr val="accent1">
+              <a:shade val="15000"/>
+            </a:schemeClr>
+          </a:lnRef>
+          <a:fillRef idx="1">
+            <a:schemeClr val="accent1"/>
+          </a:fillRef>
+          <a:effectRef idx="0">
+            <a:schemeClr val="accent1"/>
+          </a:effectRef>
+          <a:fontRef idx="minor">
+            <a:schemeClr val="lt1"/>
+          </a:fontRef>
+        </p:style>
+        <p:txBody>
+          <a:bodyPr rtlCol="0" anchor="ctr"/>
+          <a:lstStyle/>
+          <a:p>
+            <a:pPr algn="ctr"/>
+            <a:endParaRPr kumimoji="1" lang="ja-JP" altLang="en-US"/>
+          </a:p>
+        </p:txBody>
+      </p:sp>
+      <p:sp>
+        <p:nvSpPr>
+          <p:cNvPr id="48" name="正方形/長方形 47">
+            <a:extLst>
+              <a:ext uri="{FF2B5EF4-FFF2-40B4-BE49-F238E27FC236}">
+                <a16:creationId xmlns:a16="http://schemas.microsoft.com/office/drawing/2014/main" id="{0A104197-6EA2-D4CA-778E-EF4C4AF2B3D4}"/>
+              </a:ext>
+            </a:extLst>
+          </p:cNvPr>
+          <p:cNvSpPr/>
+          <p:nvPr/>
+        </p:nvSpPr>
+        <p:spPr>
+          <a:xfrm>
+            <a:off x="4791847" y="1484779"/>
+            <a:ext cx="280404" cy="287983"/>
+          </a:xfrm>
+          <a:prstGeom prst="rect">
+            <a:avLst/>
+          </a:prstGeom>
+          <a:solidFill>
+            <a:schemeClr val="bg2">
+              <a:lumMod val="90000"/>
+            </a:schemeClr>
+          </a:solidFill>
+          <a:ln>
+            <a:noFill/>
+          </a:ln>
+        </p:spPr>
+        <p:style>
+          <a:lnRef idx="2">
+            <a:schemeClr val="accent1">
+              <a:shade val="15000"/>
+            </a:schemeClr>
+          </a:lnRef>
+          <a:fillRef idx="1">
+            <a:schemeClr val="accent1"/>
+          </a:fillRef>
+          <a:effectRef idx="0">
+            <a:schemeClr val="accent1"/>
+          </a:effectRef>
+          <a:fontRef idx="minor">
+            <a:schemeClr val="lt1"/>
+          </a:fontRef>
+        </p:style>
+        <p:txBody>
+          <a:bodyPr rtlCol="0" anchor="ctr"/>
+          <a:lstStyle/>
+          <a:p>
+            <a:pPr algn="ctr"/>
+            <a:endParaRPr kumimoji="1" lang="ja-JP" altLang="en-US"/>
+          </a:p>
+        </p:txBody>
+      </p:sp>
+      <p:sp>
+        <p:nvSpPr>
+          <p:cNvPr id="49" name="正方形/長方形 48">
+            <a:extLst>
+              <a:ext uri="{FF2B5EF4-FFF2-40B4-BE49-F238E27FC236}">
+                <a16:creationId xmlns:a16="http://schemas.microsoft.com/office/drawing/2014/main" id="{4F0FE250-064D-5EA4-C80A-94D94659DABD}"/>
+              </a:ext>
+            </a:extLst>
+          </p:cNvPr>
+          <p:cNvSpPr/>
+          <p:nvPr/>
+        </p:nvSpPr>
+        <p:spPr>
+          <a:xfrm>
+            <a:off x="5508149" y="1484725"/>
+            <a:ext cx="280404" cy="287983"/>
+          </a:xfrm>
+          <a:prstGeom prst="rect">
+            <a:avLst/>
+          </a:prstGeom>
+          <a:solidFill>
+            <a:schemeClr val="bg2">
+              <a:lumMod val="90000"/>
+            </a:schemeClr>
+          </a:solidFill>
+          <a:ln>
+            <a:noFill/>
+          </a:ln>
+        </p:spPr>
+        <p:style>
+          <a:lnRef idx="2">
+            <a:schemeClr val="accent1">
+              <a:shade val="15000"/>
+            </a:schemeClr>
+          </a:lnRef>
+          <a:fillRef idx="1">
+            <a:schemeClr val="accent1"/>
+          </a:fillRef>
+          <a:effectRef idx="0">
+            <a:schemeClr val="accent1"/>
+          </a:effectRef>
+          <a:fontRef idx="minor">
+            <a:schemeClr val="lt1"/>
+          </a:fontRef>
+        </p:style>
+        <p:txBody>
+          <a:bodyPr rtlCol="0" anchor="ctr"/>
+          <a:lstStyle/>
+          <a:p>
+            <a:pPr algn="ctr"/>
+            <a:endParaRPr kumimoji="1" lang="ja-JP" altLang="en-US"/>
+          </a:p>
+        </p:txBody>
+      </p:sp>
+      <p:sp>
+        <p:nvSpPr>
+          <p:cNvPr id="50" name="正方形/長方形 49">
+            <a:extLst>
+              <a:ext uri="{FF2B5EF4-FFF2-40B4-BE49-F238E27FC236}">
+                <a16:creationId xmlns:a16="http://schemas.microsoft.com/office/drawing/2014/main" id="{77DE563C-4C34-B9A9-21D5-8CF69B73064B}"/>
+              </a:ext>
+            </a:extLst>
+          </p:cNvPr>
+          <p:cNvSpPr/>
+          <p:nvPr/>
+        </p:nvSpPr>
+        <p:spPr>
+          <a:xfrm>
+            <a:off x="6228237" y="1484725"/>
+            <a:ext cx="280404" cy="287983"/>
+          </a:xfrm>
+          <a:prstGeom prst="rect">
+            <a:avLst/>
+          </a:prstGeom>
+          <a:solidFill>
+            <a:schemeClr val="bg2">
+              <a:lumMod val="90000"/>
+            </a:schemeClr>
+          </a:solidFill>
+          <a:ln>
+            <a:noFill/>
+          </a:ln>
+        </p:spPr>
+        <p:style>
+          <a:lnRef idx="2">
+            <a:schemeClr val="accent1">
+              <a:shade val="15000"/>
+            </a:schemeClr>
+          </a:lnRef>
+          <a:fillRef idx="1">
+            <a:schemeClr val="accent1"/>
+          </a:fillRef>
+          <a:effectRef idx="0">
+            <a:schemeClr val="accent1"/>
+          </a:effectRef>
+          <a:fontRef idx="minor">
+            <a:schemeClr val="lt1"/>
+          </a:fontRef>
+        </p:style>
+        <p:txBody>
+          <a:bodyPr rtlCol="0" anchor="ctr"/>
+          <a:lstStyle/>
+          <a:p>
+            <a:pPr algn="ctr"/>
+            <a:endParaRPr kumimoji="1" lang="ja-JP" altLang="en-US"/>
+          </a:p>
+        </p:txBody>
+      </p:sp>
+      <p:sp>
+        <p:nvSpPr>
+          <p:cNvPr id="51" name="正方形/長方形 50">
+            <a:extLst>
+              <a:ext uri="{FF2B5EF4-FFF2-40B4-BE49-F238E27FC236}">
+                <a16:creationId xmlns:a16="http://schemas.microsoft.com/office/drawing/2014/main" id="{95CBE973-246E-682B-5A9C-EBC9AF39FDBB}"/>
+              </a:ext>
+            </a:extLst>
+          </p:cNvPr>
+          <p:cNvSpPr/>
+          <p:nvPr/>
+        </p:nvSpPr>
+        <p:spPr>
+          <a:xfrm>
+            <a:off x="2627784" y="2195925"/>
+            <a:ext cx="280404" cy="287983"/>
+          </a:xfrm>
+          <a:prstGeom prst="rect">
+            <a:avLst/>
+          </a:prstGeom>
+          <a:solidFill>
+            <a:schemeClr val="bg2">
+              <a:lumMod val="90000"/>
+            </a:schemeClr>
+          </a:solidFill>
+          <a:ln>
+            <a:noFill/>
+          </a:ln>
+        </p:spPr>
+        <p:style>
+          <a:lnRef idx="2">
+            <a:schemeClr val="accent1">
+              <a:shade val="15000"/>
+            </a:schemeClr>
+          </a:lnRef>
+          <a:fillRef idx="1">
+            <a:schemeClr val="accent1"/>
+          </a:fillRef>
+          <a:effectRef idx="0">
+            <a:schemeClr val="accent1"/>
+          </a:effectRef>
+          <a:fontRef idx="minor">
+            <a:schemeClr val="lt1"/>
+          </a:fontRef>
+        </p:style>
+        <p:txBody>
+          <a:bodyPr rtlCol="0" anchor="ctr"/>
+          <a:lstStyle/>
+          <a:p>
+            <a:pPr algn="ctr"/>
+            <a:endParaRPr kumimoji="1" lang="ja-JP" altLang="en-US"/>
+          </a:p>
+        </p:txBody>
+      </p:sp>
+      <p:sp>
+        <p:nvSpPr>
+          <p:cNvPr id="52" name="正方形/長方形 51">
+            <a:extLst>
+              <a:ext uri="{FF2B5EF4-FFF2-40B4-BE49-F238E27FC236}">
+                <a16:creationId xmlns:a16="http://schemas.microsoft.com/office/drawing/2014/main" id="{332EA87C-388A-011D-7826-4E970D711985}"/>
+              </a:ext>
+            </a:extLst>
+          </p:cNvPr>
+          <p:cNvSpPr/>
+          <p:nvPr/>
+        </p:nvSpPr>
+        <p:spPr>
+          <a:xfrm>
+            <a:off x="3347872" y="2195925"/>
+            <a:ext cx="280404" cy="287983"/>
+          </a:xfrm>
+          <a:prstGeom prst="rect">
+            <a:avLst/>
+          </a:prstGeom>
+          <a:solidFill>
+            <a:schemeClr val="bg2">
+              <a:lumMod val="90000"/>
+            </a:schemeClr>
+          </a:solidFill>
+          <a:ln>
+            <a:noFill/>
+          </a:ln>
+        </p:spPr>
+        <p:style>
+          <a:lnRef idx="2">
+            <a:schemeClr val="accent1">
+              <a:shade val="15000"/>
+            </a:schemeClr>
+          </a:lnRef>
+          <a:fillRef idx="1">
+            <a:schemeClr val="accent1"/>
+          </a:fillRef>
+          <a:effectRef idx="0">
+            <a:schemeClr val="accent1"/>
+          </a:effectRef>
+          <a:fontRef idx="minor">
+            <a:schemeClr val="lt1"/>
+          </a:fontRef>
+        </p:style>
+        <p:txBody>
+          <a:bodyPr rtlCol="0" anchor="ctr"/>
+          <a:lstStyle/>
+          <a:p>
+            <a:pPr algn="ctr"/>
+            <a:endParaRPr kumimoji="1" lang="ja-JP" altLang="en-US"/>
+          </a:p>
+        </p:txBody>
+      </p:sp>
+      <p:sp>
+        <p:nvSpPr>
+          <p:cNvPr id="53" name="正方形/長方形 52">
+            <a:extLst>
+              <a:ext uri="{FF2B5EF4-FFF2-40B4-BE49-F238E27FC236}">
+                <a16:creationId xmlns:a16="http://schemas.microsoft.com/office/drawing/2014/main" id="{AABAABDB-514F-FCEF-FD99-4590228D1258}"/>
+              </a:ext>
+            </a:extLst>
+          </p:cNvPr>
+          <p:cNvSpPr/>
+          <p:nvPr/>
+        </p:nvSpPr>
+        <p:spPr>
+          <a:xfrm>
+            <a:off x="4071759" y="2195925"/>
+            <a:ext cx="280404" cy="287983"/>
+          </a:xfrm>
+          <a:prstGeom prst="rect">
+            <a:avLst/>
+          </a:prstGeom>
+          <a:solidFill>
+            <a:schemeClr val="bg2">
+              <a:lumMod val="90000"/>
+            </a:schemeClr>
+          </a:solidFill>
+          <a:ln>
+            <a:noFill/>
+          </a:ln>
+        </p:spPr>
+        <p:style>
+          <a:lnRef idx="2">
+            <a:schemeClr val="accent1">
+              <a:shade val="15000"/>
+            </a:schemeClr>
+          </a:lnRef>
+          <a:fillRef idx="1">
+            <a:schemeClr val="accent1"/>
+          </a:fillRef>
+          <a:effectRef idx="0">
+            <a:schemeClr val="accent1"/>
+          </a:effectRef>
+          <a:fontRef idx="minor">
+            <a:schemeClr val="lt1"/>
+          </a:fontRef>
+        </p:style>
+        <p:txBody>
+          <a:bodyPr rtlCol="0" anchor="ctr"/>
+          <a:lstStyle/>
+          <a:p>
+            <a:pPr algn="ctr"/>
+            <a:endParaRPr kumimoji="1" lang="ja-JP" altLang="en-US"/>
+          </a:p>
+        </p:txBody>
+      </p:sp>
+      <p:sp>
+        <p:nvSpPr>
+          <p:cNvPr id="54" name="正方形/長方形 53">
+            <a:extLst>
+              <a:ext uri="{FF2B5EF4-FFF2-40B4-BE49-F238E27FC236}">
+                <a16:creationId xmlns:a16="http://schemas.microsoft.com/office/drawing/2014/main" id="{28436B67-B7C9-14EB-1C49-C0E43A440D58}"/>
+              </a:ext>
+            </a:extLst>
+          </p:cNvPr>
+          <p:cNvSpPr/>
+          <p:nvPr/>
+        </p:nvSpPr>
+        <p:spPr>
+          <a:xfrm>
+            <a:off x="4791847" y="2195925"/>
+            <a:ext cx="280404" cy="287983"/>
+          </a:xfrm>
+          <a:prstGeom prst="rect">
+            <a:avLst/>
+          </a:prstGeom>
+          <a:solidFill>
+            <a:schemeClr val="bg2">
+              <a:lumMod val="90000"/>
+            </a:schemeClr>
+          </a:solidFill>
+          <a:ln>
+            <a:noFill/>
+          </a:ln>
+        </p:spPr>
+        <p:style>
+          <a:lnRef idx="2">
+            <a:schemeClr val="accent1">
+              <a:shade val="15000"/>
+            </a:schemeClr>
+          </a:lnRef>
+          <a:fillRef idx="1">
+            <a:schemeClr val="accent1"/>
+          </a:fillRef>
+          <a:effectRef idx="0">
+            <a:schemeClr val="accent1"/>
+          </a:effectRef>
+          <a:fontRef idx="minor">
+            <a:schemeClr val="lt1"/>
+          </a:fontRef>
+        </p:style>
+        <p:txBody>
+          <a:bodyPr rtlCol="0" anchor="ctr"/>
+          <a:lstStyle/>
+          <a:p>
+            <a:pPr algn="ctr"/>
+            <a:endParaRPr kumimoji="1" lang="ja-JP" altLang="en-US"/>
+          </a:p>
+        </p:txBody>
+      </p:sp>
+      <p:sp>
+        <p:nvSpPr>
+          <p:cNvPr id="55" name="正方形/長方形 54">
+            <a:extLst>
+              <a:ext uri="{FF2B5EF4-FFF2-40B4-BE49-F238E27FC236}">
+                <a16:creationId xmlns:a16="http://schemas.microsoft.com/office/drawing/2014/main" id="{F6173D77-ADE3-D698-8AAF-5C715574BEFB}"/>
+              </a:ext>
+            </a:extLst>
+          </p:cNvPr>
+          <p:cNvSpPr/>
+          <p:nvPr/>
+        </p:nvSpPr>
+        <p:spPr>
+          <a:xfrm>
+            <a:off x="5508149" y="2195871"/>
+            <a:ext cx="280404" cy="287983"/>
+          </a:xfrm>
+          <a:prstGeom prst="rect">
+            <a:avLst/>
+          </a:prstGeom>
+          <a:solidFill>
+            <a:schemeClr val="bg2">
+              <a:lumMod val="90000"/>
+            </a:schemeClr>
+          </a:solidFill>
+          <a:ln>
+            <a:noFill/>
+          </a:ln>
+        </p:spPr>
+        <p:style>
+          <a:lnRef idx="2">
+            <a:schemeClr val="accent1">
+              <a:shade val="15000"/>
+            </a:schemeClr>
+          </a:lnRef>
+          <a:fillRef idx="1">
+            <a:schemeClr val="accent1"/>
+          </a:fillRef>
+          <a:effectRef idx="0">
+            <a:schemeClr val="accent1"/>
+          </a:effectRef>
+          <a:fontRef idx="minor">
+            <a:schemeClr val="lt1"/>
+          </a:fontRef>
+        </p:style>
+        <p:txBody>
+          <a:bodyPr rtlCol="0" anchor="ctr"/>
+          <a:lstStyle/>
+          <a:p>
+            <a:pPr algn="ctr"/>
+            <a:endParaRPr kumimoji="1" lang="ja-JP" altLang="en-US"/>
+          </a:p>
+        </p:txBody>
+      </p:sp>
+      <p:sp>
+        <p:nvSpPr>
+          <p:cNvPr id="56" name="正方形/長方形 55">
+            <a:extLst>
+              <a:ext uri="{FF2B5EF4-FFF2-40B4-BE49-F238E27FC236}">
+                <a16:creationId xmlns:a16="http://schemas.microsoft.com/office/drawing/2014/main" id="{450D2ED3-3C9A-F739-9510-DCFBBD3E8350}"/>
+              </a:ext>
+            </a:extLst>
+          </p:cNvPr>
+          <p:cNvSpPr/>
+          <p:nvPr/>
+        </p:nvSpPr>
+        <p:spPr>
+          <a:xfrm>
+            <a:off x="6228237" y="2195871"/>
+            <a:ext cx="280404" cy="287983"/>
+          </a:xfrm>
+          <a:prstGeom prst="rect">
+            <a:avLst/>
+          </a:prstGeom>
+          <a:solidFill>
+            <a:schemeClr val="bg2">
+              <a:lumMod val="90000"/>
+            </a:schemeClr>
+          </a:solidFill>
+          <a:ln>
+            <a:noFill/>
+          </a:ln>
+        </p:spPr>
+        <p:style>
+          <a:lnRef idx="2">
+            <a:schemeClr val="accent1">
+              <a:shade val="15000"/>
+            </a:schemeClr>
+          </a:lnRef>
+          <a:fillRef idx="1">
+            <a:schemeClr val="accent1"/>
+          </a:fillRef>
+          <a:effectRef idx="0">
+            <a:schemeClr val="accent1"/>
+          </a:effectRef>
+          <a:fontRef idx="minor">
+            <a:schemeClr val="lt1"/>
+          </a:fontRef>
+        </p:style>
+        <p:txBody>
+          <a:bodyPr rtlCol="0" anchor="ctr"/>
+          <a:lstStyle/>
+          <a:p>
+            <a:pPr algn="ctr"/>
+            <a:endParaRPr kumimoji="1" lang="ja-JP" altLang="en-US"/>
+          </a:p>
+        </p:txBody>
+      </p:sp>
+      <p:sp>
+        <p:nvSpPr>
+          <p:cNvPr id="57" name="正方形/長方形 56">
+            <a:extLst>
+              <a:ext uri="{FF2B5EF4-FFF2-40B4-BE49-F238E27FC236}">
+                <a16:creationId xmlns:a16="http://schemas.microsoft.com/office/drawing/2014/main" id="{7E6910D5-7A58-DFB9-41AD-8BBDD7E061F6}"/>
+              </a:ext>
+            </a:extLst>
+          </p:cNvPr>
+          <p:cNvSpPr/>
+          <p:nvPr/>
+        </p:nvSpPr>
+        <p:spPr>
+          <a:xfrm>
+            <a:off x="2627784" y="2915989"/>
+            <a:ext cx="280404" cy="287983"/>
+          </a:xfrm>
+          <a:prstGeom prst="rect">
+            <a:avLst/>
+          </a:prstGeom>
+          <a:solidFill>
+            <a:schemeClr val="bg2">
+              <a:lumMod val="90000"/>
+            </a:schemeClr>
+          </a:solidFill>
+          <a:ln>
+            <a:noFill/>
+          </a:ln>
+        </p:spPr>
+        <p:style>
+          <a:lnRef idx="2">
+            <a:schemeClr val="accent1">
+              <a:shade val="15000"/>
+            </a:schemeClr>
+          </a:lnRef>
+          <a:fillRef idx="1">
+            <a:schemeClr val="accent1"/>
+          </a:fillRef>
+          <a:effectRef idx="0">
+            <a:schemeClr val="accent1"/>
+          </a:effectRef>
+          <a:fontRef idx="minor">
+            <a:schemeClr val="lt1"/>
+          </a:fontRef>
+        </p:style>
+        <p:txBody>
+          <a:bodyPr rtlCol="0" anchor="ctr"/>
+          <a:lstStyle/>
+          <a:p>
+            <a:pPr algn="ctr"/>
+            <a:endParaRPr kumimoji="1" lang="ja-JP" altLang="en-US"/>
+          </a:p>
+        </p:txBody>
+      </p:sp>
+      <p:sp>
+        <p:nvSpPr>
+          <p:cNvPr id="58" name="正方形/長方形 57">
+            <a:extLst>
+              <a:ext uri="{FF2B5EF4-FFF2-40B4-BE49-F238E27FC236}">
+                <a16:creationId xmlns:a16="http://schemas.microsoft.com/office/drawing/2014/main" id="{2DB674F8-EF0D-18BE-45FC-F8DB9121A1E9}"/>
+              </a:ext>
+            </a:extLst>
+          </p:cNvPr>
+          <p:cNvSpPr/>
+          <p:nvPr/>
+        </p:nvSpPr>
+        <p:spPr>
+          <a:xfrm>
+            <a:off x="3347872" y="2915989"/>
+            <a:ext cx="280404" cy="287983"/>
+          </a:xfrm>
+          <a:prstGeom prst="rect">
+            <a:avLst/>
+          </a:prstGeom>
+          <a:solidFill>
+            <a:schemeClr val="bg2">
+              <a:lumMod val="90000"/>
+            </a:schemeClr>
+          </a:solidFill>
+          <a:ln>
+            <a:noFill/>
+          </a:ln>
+        </p:spPr>
+        <p:style>
+          <a:lnRef idx="2">
+            <a:schemeClr val="accent1">
+              <a:shade val="15000"/>
+            </a:schemeClr>
+          </a:lnRef>
+          <a:fillRef idx="1">
+            <a:schemeClr val="accent1"/>
+          </a:fillRef>
+          <a:effectRef idx="0">
+            <a:schemeClr val="accent1"/>
+          </a:effectRef>
+          <a:fontRef idx="minor">
+            <a:schemeClr val="lt1"/>
+          </a:fontRef>
+        </p:style>
+        <p:txBody>
+          <a:bodyPr rtlCol="0" anchor="ctr"/>
+          <a:lstStyle/>
+          <a:p>
+            <a:pPr algn="ctr"/>
+            <a:endParaRPr kumimoji="1" lang="ja-JP" altLang="en-US"/>
+          </a:p>
+        </p:txBody>
+      </p:sp>
+      <p:sp>
+        <p:nvSpPr>
+          <p:cNvPr id="59" name="正方形/長方形 58">
+            <a:extLst>
+              <a:ext uri="{FF2B5EF4-FFF2-40B4-BE49-F238E27FC236}">
+                <a16:creationId xmlns:a16="http://schemas.microsoft.com/office/drawing/2014/main" id="{6D93F492-5EA9-29DD-55D2-99EDDE5F1095}"/>
+              </a:ext>
+            </a:extLst>
+          </p:cNvPr>
+          <p:cNvSpPr/>
+          <p:nvPr/>
+        </p:nvSpPr>
+        <p:spPr>
+          <a:xfrm>
+            <a:off x="4071759" y="2915989"/>
+            <a:ext cx="280404" cy="287983"/>
+          </a:xfrm>
+          <a:prstGeom prst="rect">
+            <a:avLst/>
+          </a:prstGeom>
+          <a:solidFill>
+            <a:schemeClr val="bg2">
+              <a:lumMod val="90000"/>
+            </a:schemeClr>
+          </a:solidFill>
+          <a:ln>
+            <a:noFill/>
+          </a:ln>
+        </p:spPr>
+        <p:style>
+          <a:lnRef idx="2">
+            <a:schemeClr val="accent1">
+              <a:shade val="15000"/>
+            </a:schemeClr>
+          </a:lnRef>
+          <a:fillRef idx="1">
+            <a:schemeClr val="accent1"/>
+          </a:fillRef>
+          <a:effectRef idx="0">
+            <a:schemeClr val="accent1"/>
+          </a:effectRef>
+          <a:fontRef idx="minor">
+            <a:schemeClr val="lt1"/>
+          </a:fontRef>
+        </p:style>
+        <p:txBody>
+          <a:bodyPr rtlCol="0" anchor="ctr"/>
+          <a:lstStyle/>
+          <a:p>
+            <a:pPr algn="ctr"/>
+            <a:endParaRPr kumimoji="1" lang="ja-JP" altLang="en-US"/>
+          </a:p>
+        </p:txBody>
+      </p:sp>
+      <p:sp>
+        <p:nvSpPr>
+          <p:cNvPr id="60" name="正方形/長方形 59">
+            <a:extLst>
+              <a:ext uri="{FF2B5EF4-FFF2-40B4-BE49-F238E27FC236}">
+                <a16:creationId xmlns:a16="http://schemas.microsoft.com/office/drawing/2014/main" id="{935A6A31-1527-5CF0-258B-FDCB266E70B4}"/>
+              </a:ext>
+            </a:extLst>
+          </p:cNvPr>
+          <p:cNvSpPr/>
+          <p:nvPr/>
+        </p:nvSpPr>
+        <p:spPr>
+          <a:xfrm>
+            <a:off x="4791847" y="2915989"/>
+            <a:ext cx="280404" cy="287983"/>
+          </a:xfrm>
+          <a:prstGeom prst="rect">
+            <a:avLst/>
+          </a:prstGeom>
+          <a:solidFill>
+            <a:schemeClr val="bg2">
+              <a:lumMod val="90000"/>
+            </a:schemeClr>
+          </a:solidFill>
+          <a:ln>
+            <a:noFill/>
+          </a:ln>
+        </p:spPr>
+        <p:style>
+          <a:lnRef idx="2">
+            <a:schemeClr val="accent1">
+              <a:shade val="15000"/>
+            </a:schemeClr>
+          </a:lnRef>
+          <a:fillRef idx="1">
+            <a:schemeClr val="accent1"/>
+          </a:fillRef>
+          <a:effectRef idx="0">
+            <a:schemeClr val="accent1"/>
+          </a:effectRef>
+          <a:fontRef idx="minor">
+            <a:schemeClr val="lt1"/>
+          </a:fontRef>
+        </p:style>
+        <p:txBody>
+          <a:bodyPr rtlCol="0" anchor="ctr"/>
+          <a:lstStyle/>
+          <a:p>
+            <a:pPr algn="ctr"/>
+            <a:endParaRPr kumimoji="1" lang="ja-JP" altLang="en-US"/>
+          </a:p>
+        </p:txBody>
+      </p:sp>
+      <p:sp>
+        <p:nvSpPr>
+          <p:cNvPr id="61" name="正方形/長方形 60">
+            <a:extLst>
+              <a:ext uri="{FF2B5EF4-FFF2-40B4-BE49-F238E27FC236}">
+                <a16:creationId xmlns:a16="http://schemas.microsoft.com/office/drawing/2014/main" id="{2699C32F-B46D-3535-CF5B-CA1AF8C5759F}"/>
+              </a:ext>
+            </a:extLst>
+          </p:cNvPr>
+          <p:cNvSpPr/>
+          <p:nvPr/>
+        </p:nvSpPr>
+        <p:spPr>
+          <a:xfrm>
+            <a:off x="5508149" y="2915935"/>
+            <a:ext cx="280404" cy="287983"/>
+          </a:xfrm>
+          <a:prstGeom prst="rect">
+            <a:avLst/>
+          </a:prstGeom>
+          <a:solidFill>
+            <a:schemeClr val="bg2">
+              <a:lumMod val="90000"/>
+            </a:schemeClr>
+          </a:solidFill>
+          <a:ln>
+            <a:noFill/>
+          </a:ln>
+        </p:spPr>
+        <p:style>
+          <a:lnRef idx="2">
+            <a:schemeClr val="accent1">
+              <a:shade val="15000"/>
+            </a:schemeClr>
+          </a:lnRef>
+          <a:fillRef idx="1">
+            <a:schemeClr val="accent1"/>
+          </a:fillRef>
+          <a:effectRef idx="0">
+            <a:schemeClr val="accent1"/>
+          </a:effectRef>
+          <a:fontRef idx="minor">
+            <a:schemeClr val="lt1"/>
+          </a:fontRef>
+        </p:style>
+        <p:txBody>
+          <a:bodyPr rtlCol="0" anchor="ctr"/>
+          <a:lstStyle/>
+          <a:p>
+            <a:pPr algn="ctr"/>
+            <a:endParaRPr kumimoji="1" lang="ja-JP" altLang="en-US"/>
+          </a:p>
+        </p:txBody>
+      </p:sp>
+      <p:sp>
+        <p:nvSpPr>
+          <p:cNvPr id="62" name="正方形/長方形 61">
+            <a:extLst>
+              <a:ext uri="{FF2B5EF4-FFF2-40B4-BE49-F238E27FC236}">
+                <a16:creationId xmlns:a16="http://schemas.microsoft.com/office/drawing/2014/main" id="{4F4D2B3D-55C3-F1FA-5F41-5C2CE54FB3A1}"/>
+              </a:ext>
+            </a:extLst>
+          </p:cNvPr>
+          <p:cNvSpPr/>
+          <p:nvPr/>
+        </p:nvSpPr>
+        <p:spPr>
+          <a:xfrm>
+            <a:off x="6228237" y="2915935"/>
+            <a:ext cx="280404" cy="287983"/>
+          </a:xfrm>
+          <a:prstGeom prst="rect">
+            <a:avLst/>
+          </a:prstGeom>
+          <a:solidFill>
+            <a:schemeClr val="bg2">
+              <a:lumMod val="90000"/>
+            </a:schemeClr>
+          </a:solidFill>
+          <a:ln>
+            <a:noFill/>
+          </a:ln>
+        </p:spPr>
+        <p:style>
+          <a:lnRef idx="2">
+            <a:schemeClr val="accent1">
+              <a:shade val="15000"/>
+            </a:schemeClr>
+          </a:lnRef>
+          <a:fillRef idx="1">
+            <a:schemeClr val="accent1"/>
+          </a:fillRef>
+          <a:effectRef idx="0">
+            <a:schemeClr val="accent1"/>
+          </a:effectRef>
+          <a:fontRef idx="minor">
+            <a:schemeClr val="lt1"/>
+          </a:fontRef>
+        </p:style>
+        <p:txBody>
+          <a:bodyPr rtlCol="0" anchor="ctr"/>
+          <a:lstStyle/>
+          <a:p>
+            <a:pPr algn="ctr"/>
+            <a:endParaRPr kumimoji="1" lang="ja-JP" altLang="en-US"/>
+          </a:p>
+        </p:txBody>
+      </p:sp>
+      <p:sp>
+        <p:nvSpPr>
+          <p:cNvPr id="63" name="正方形/長方形 62">
+            <a:extLst>
+              <a:ext uri="{FF2B5EF4-FFF2-40B4-BE49-F238E27FC236}">
+                <a16:creationId xmlns:a16="http://schemas.microsoft.com/office/drawing/2014/main" id="{24BDB8F4-08D4-D5CD-D92A-6BF980FD229A}"/>
+              </a:ext>
+            </a:extLst>
+          </p:cNvPr>
+          <p:cNvSpPr/>
+          <p:nvPr/>
+        </p:nvSpPr>
+        <p:spPr>
+          <a:xfrm>
+            <a:off x="2627782" y="3648347"/>
+            <a:ext cx="280404" cy="287983"/>
+          </a:xfrm>
+          <a:prstGeom prst="rect">
+            <a:avLst/>
+          </a:prstGeom>
+          <a:solidFill>
+            <a:schemeClr val="bg2">
+              <a:lumMod val="90000"/>
+            </a:schemeClr>
+          </a:solidFill>
+          <a:ln>
+            <a:noFill/>
+          </a:ln>
+        </p:spPr>
+        <p:style>
+          <a:lnRef idx="2">
+            <a:schemeClr val="accent1">
+              <a:shade val="15000"/>
+            </a:schemeClr>
+          </a:lnRef>
+          <a:fillRef idx="1">
+            <a:schemeClr val="accent1"/>
+          </a:fillRef>
+          <a:effectRef idx="0">
+            <a:schemeClr val="accent1"/>
+          </a:effectRef>
+          <a:fontRef idx="minor">
+            <a:schemeClr val="lt1"/>
+          </a:fontRef>
+        </p:style>
+        <p:txBody>
+          <a:bodyPr rtlCol="0" anchor="ctr"/>
+          <a:lstStyle/>
+          <a:p>
+            <a:pPr algn="ctr"/>
+            <a:endParaRPr kumimoji="1" lang="ja-JP" altLang="en-US"/>
+          </a:p>
+        </p:txBody>
+      </p:sp>
+      <p:sp>
+        <p:nvSpPr>
+          <p:cNvPr id="64" name="正方形/長方形 63">
+            <a:extLst>
+              <a:ext uri="{FF2B5EF4-FFF2-40B4-BE49-F238E27FC236}">
+                <a16:creationId xmlns:a16="http://schemas.microsoft.com/office/drawing/2014/main" id="{A58A631C-1CD2-C5DA-EC80-943200B7952D}"/>
+              </a:ext>
+            </a:extLst>
+          </p:cNvPr>
+          <p:cNvSpPr/>
+          <p:nvPr/>
+        </p:nvSpPr>
+        <p:spPr>
+          <a:xfrm>
+            <a:off x="3347870" y="3648347"/>
+            <a:ext cx="280404" cy="287983"/>
+          </a:xfrm>
+          <a:prstGeom prst="rect">
+            <a:avLst/>
+          </a:prstGeom>
+          <a:solidFill>
+            <a:schemeClr val="bg2">
+              <a:lumMod val="90000"/>
+            </a:schemeClr>
+          </a:solidFill>
+          <a:ln>
+            <a:noFill/>
+          </a:ln>
+        </p:spPr>
+        <p:style>
+          <a:lnRef idx="2">
+            <a:schemeClr val="accent1">
+              <a:shade val="15000"/>
+            </a:schemeClr>
+          </a:lnRef>
+          <a:fillRef idx="1">
+            <a:schemeClr val="accent1"/>
+          </a:fillRef>
+          <a:effectRef idx="0">
+            <a:schemeClr val="accent1"/>
+          </a:effectRef>
+          <a:fontRef idx="minor">
+            <a:schemeClr val="lt1"/>
+          </a:fontRef>
+        </p:style>
+        <p:txBody>
+          <a:bodyPr rtlCol="0" anchor="ctr"/>
+          <a:lstStyle/>
+          <a:p>
+            <a:pPr algn="ctr"/>
+            <a:endParaRPr kumimoji="1" lang="ja-JP" altLang="en-US"/>
+          </a:p>
+        </p:txBody>
+      </p:sp>
+      <p:sp>
+        <p:nvSpPr>
+          <p:cNvPr id="65" name="正方形/長方形 64">
+            <a:extLst>
+              <a:ext uri="{FF2B5EF4-FFF2-40B4-BE49-F238E27FC236}">
+                <a16:creationId xmlns:a16="http://schemas.microsoft.com/office/drawing/2014/main" id="{8CBB55CF-7893-3FF5-6C27-36B7D505EDAE}"/>
+              </a:ext>
+            </a:extLst>
+          </p:cNvPr>
+          <p:cNvSpPr/>
+          <p:nvPr/>
+        </p:nvSpPr>
+        <p:spPr>
+          <a:xfrm>
+            <a:off x="4071757" y="3648347"/>
+            <a:ext cx="280404" cy="287983"/>
+          </a:xfrm>
+          <a:prstGeom prst="rect">
+            <a:avLst/>
+          </a:prstGeom>
+          <a:solidFill>
+            <a:schemeClr val="bg2">
+              <a:lumMod val="90000"/>
+            </a:schemeClr>
+          </a:solidFill>
+          <a:ln>
+            <a:noFill/>
+          </a:ln>
+        </p:spPr>
+        <p:style>
+          <a:lnRef idx="2">
+            <a:schemeClr val="accent1">
+              <a:shade val="15000"/>
+            </a:schemeClr>
+          </a:lnRef>
+          <a:fillRef idx="1">
+            <a:schemeClr val="accent1"/>
+          </a:fillRef>
+          <a:effectRef idx="0">
+            <a:schemeClr val="accent1"/>
+          </a:effectRef>
+          <a:fontRef idx="minor">
+            <a:schemeClr val="lt1"/>
+          </a:fontRef>
+        </p:style>
+        <p:txBody>
+          <a:bodyPr rtlCol="0" anchor="ctr"/>
+          <a:lstStyle/>
+          <a:p>
+            <a:pPr algn="ctr"/>
+            <a:endParaRPr kumimoji="1" lang="ja-JP" altLang="en-US"/>
+          </a:p>
+        </p:txBody>
+      </p:sp>
+      <p:sp>
+        <p:nvSpPr>
+          <p:cNvPr id="66" name="正方形/長方形 65">
+            <a:extLst>
+              <a:ext uri="{FF2B5EF4-FFF2-40B4-BE49-F238E27FC236}">
+                <a16:creationId xmlns:a16="http://schemas.microsoft.com/office/drawing/2014/main" id="{6B1E53BD-C74C-0251-2700-9542BE4EA4E3}"/>
+              </a:ext>
+            </a:extLst>
+          </p:cNvPr>
+          <p:cNvSpPr/>
+          <p:nvPr/>
+        </p:nvSpPr>
+        <p:spPr>
+          <a:xfrm>
+            <a:off x="4791845" y="3648347"/>
+            <a:ext cx="280404" cy="287983"/>
+          </a:xfrm>
+          <a:prstGeom prst="rect">
+            <a:avLst/>
+          </a:prstGeom>
+          <a:solidFill>
+            <a:schemeClr val="bg2">
+              <a:lumMod val="90000"/>
+            </a:schemeClr>
+          </a:solidFill>
+          <a:ln>
+            <a:noFill/>
+          </a:ln>
+        </p:spPr>
+        <p:style>
+          <a:lnRef idx="2">
+            <a:schemeClr val="accent1">
+              <a:shade val="15000"/>
+            </a:schemeClr>
+          </a:lnRef>
+          <a:fillRef idx="1">
+            <a:schemeClr val="accent1"/>
+          </a:fillRef>
+          <a:effectRef idx="0">
+            <a:schemeClr val="accent1"/>
+          </a:effectRef>
+          <a:fontRef idx="minor">
+            <a:schemeClr val="lt1"/>
+          </a:fontRef>
+        </p:style>
+        <p:txBody>
+          <a:bodyPr rtlCol="0" anchor="ctr"/>
+          <a:lstStyle/>
+          <a:p>
+            <a:pPr algn="ctr"/>
+            <a:endParaRPr kumimoji="1" lang="ja-JP" altLang="en-US"/>
+          </a:p>
+        </p:txBody>
+      </p:sp>
+      <p:sp>
+        <p:nvSpPr>
+          <p:cNvPr id="67" name="正方形/長方形 66">
+            <a:extLst>
+              <a:ext uri="{FF2B5EF4-FFF2-40B4-BE49-F238E27FC236}">
+                <a16:creationId xmlns:a16="http://schemas.microsoft.com/office/drawing/2014/main" id="{C6124297-0926-2C1C-B694-98078C7DB635}"/>
+              </a:ext>
+            </a:extLst>
+          </p:cNvPr>
+          <p:cNvSpPr/>
+          <p:nvPr/>
+        </p:nvSpPr>
+        <p:spPr>
+          <a:xfrm>
+            <a:off x="5508147" y="3648293"/>
+            <a:ext cx="280404" cy="287983"/>
+          </a:xfrm>
+          <a:prstGeom prst="rect">
+            <a:avLst/>
+          </a:prstGeom>
+          <a:solidFill>
+            <a:schemeClr val="bg2">
+              <a:lumMod val="90000"/>
+            </a:schemeClr>
+          </a:solidFill>
+          <a:ln>
+            <a:noFill/>
+          </a:ln>
+        </p:spPr>
+        <p:style>
+          <a:lnRef idx="2">
+            <a:schemeClr val="accent1">
+              <a:shade val="15000"/>
+            </a:schemeClr>
+          </a:lnRef>
+          <a:fillRef idx="1">
+            <a:schemeClr val="accent1"/>
+          </a:fillRef>
+          <a:effectRef idx="0">
+            <a:schemeClr val="accent1"/>
+          </a:effectRef>
+          <a:fontRef idx="minor">
+            <a:schemeClr val="lt1"/>
+          </a:fontRef>
+        </p:style>
+        <p:txBody>
+          <a:bodyPr rtlCol="0" anchor="ctr"/>
+          <a:lstStyle/>
+          <a:p>
+            <a:pPr algn="ctr"/>
+            <a:endParaRPr kumimoji="1" lang="ja-JP" altLang="en-US"/>
+          </a:p>
+        </p:txBody>
+      </p:sp>
+      <p:sp>
+        <p:nvSpPr>
+          <p:cNvPr id="68" name="正方形/長方形 67">
+            <a:extLst>
+              <a:ext uri="{FF2B5EF4-FFF2-40B4-BE49-F238E27FC236}">
+                <a16:creationId xmlns:a16="http://schemas.microsoft.com/office/drawing/2014/main" id="{8D525717-BE5B-2A6D-97BF-94A09A47E35E}"/>
+              </a:ext>
+            </a:extLst>
+          </p:cNvPr>
+          <p:cNvSpPr/>
+          <p:nvPr/>
+        </p:nvSpPr>
+        <p:spPr>
+          <a:xfrm>
+            <a:off x="6228235" y="3648293"/>
+            <a:ext cx="280404" cy="287983"/>
+          </a:xfrm>
+          <a:prstGeom prst="rect">
+            <a:avLst/>
+          </a:prstGeom>
+          <a:solidFill>
+            <a:schemeClr val="bg2">
+              <a:lumMod val="90000"/>
+            </a:schemeClr>
+          </a:solidFill>
+          <a:ln>
+            <a:noFill/>
+          </a:ln>
+        </p:spPr>
+        <p:style>
+          <a:lnRef idx="2">
+            <a:schemeClr val="accent1">
+              <a:shade val="15000"/>
+            </a:schemeClr>
+          </a:lnRef>
+          <a:fillRef idx="1">
+            <a:schemeClr val="accent1"/>
+          </a:fillRef>
+          <a:effectRef idx="0">
+            <a:schemeClr val="accent1"/>
+          </a:effectRef>
+          <a:fontRef idx="minor">
+            <a:schemeClr val="lt1"/>
+          </a:fontRef>
+        </p:style>
+        <p:txBody>
+          <a:bodyPr rtlCol="0" anchor="ctr"/>
+          <a:lstStyle/>
+          <a:p>
+            <a:pPr algn="ctr"/>
+            <a:endParaRPr kumimoji="1" lang="ja-JP" altLang="en-US"/>
+          </a:p>
+        </p:txBody>
+      </p:sp>
+      <p:sp>
+        <p:nvSpPr>
+          <p:cNvPr id="69" name="正方形/長方形 68">
+            <a:extLst>
+              <a:ext uri="{FF2B5EF4-FFF2-40B4-BE49-F238E27FC236}">
+                <a16:creationId xmlns:a16="http://schemas.microsoft.com/office/drawing/2014/main" id="{F37FB623-839B-EC4C-436A-B5CB36FCD6CA}"/>
+              </a:ext>
+            </a:extLst>
+          </p:cNvPr>
+          <p:cNvSpPr/>
+          <p:nvPr/>
+        </p:nvSpPr>
+        <p:spPr>
+          <a:xfrm>
+            <a:off x="2627782" y="4356169"/>
+            <a:ext cx="280404" cy="287983"/>
+          </a:xfrm>
+          <a:prstGeom prst="rect">
+            <a:avLst/>
+          </a:prstGeom>
+          <a:solidFill>
+            <a:schemeClr val="bg2">
+              <a:lumMod val="90000"/>
+            </a:schemeClr>
+          </a:solidFill>
+          <a:ln>
+            <a:noFill/>
+          </a:ln>
+        </p:spPr>
+        <p:style>
+          <a:lnRef idx="2">
+            <a:schemeClr val="accent1">
+              <a:shade val="15000"/>
+            </a:schemeClr>
+          </a:lnRef>
+          <a:fillRef idx="1">
+            <a:schemeClr val="accent1"/>
+          </a:fillRef>
+          <a:effectRef idx="0">
+            <a:schemeClr val="accent1"/>
+          </a:effectRef>
+          <a:fontRef idx="minor">
+            <a:schemeClr val="lt1"/>
+          </a:fontRef>
+        </p:style>
+        <p:txBody>
+          <a:bodyPr rtlCol="0" anchor="ctr"/>
+          <a:lstStyle/>
+          <a:p>
+            <a:pPr algn="ctr"/>
+            <a:endParaRPr kumimoji="1" lang="ja-JP" altLang="en-US"/>
+          </a:p>
+        </p:txBody>
+      </p:sp>
+      <p:sp>
+        <p:nvSpPr>
+          <p:cNvPr id="70" name="正方形/長方形 69">
+            <a:extLst>
+              <a:ext uri="{FF2B5EF4-FFF2-40B4-BE49-F238E27FC236}">
+                <a16:creationId xmlns:a16="http://schemas.microsoft.com/office/drawing/2014/main" id="{D65499C0-3313-FF36-EA8C-4DA772368D40}"/>
+              </a:ext>
+            </a:extLst>
+          </p:cNvPr>
+          <p:cNvSpPr/>
+          <p:nvPr/>
+        </p:nvSpPr>
+        <p:spPr>
+          <a:xfrm>
+            <a:off x="3347870" y="4356169"/>
+            <a:ext cx="280404" cy="287983"/>
+          </a:xfrm>
+          <a:prstGeom prst="rect">
+            <a:avLst/>
+          </a:prstGeom>
+          <a:solidFill>
+            <a:schemeClr val="bg2">
+              <a:lumMod val="90000"/>
+            </a:schemeClr>
+          </a:solidFill>
+          <a:ln>
+            <a:noFill/>
+          </a:ln>
+        </p:spPr>
+        <p:style>
+          <a:lnRef idx="2">
+            <a:schemeClr val="accent1">
+              <a:shade val="15000"/>
+            </a:schemeClr>
+          </a:lnRef>
+          <a:fillRef idx="1">
+            <a:schemeClr val="accent1"/>
+          </a:fillRef>
+          <a:effectRef idx="0">
+            <a:schemeClr val="accent1"/>
+          </a:effectRef>
+          <a:fontRef idx="minor">
+            <a:schemeClr val="lt1"/>
+          </a:fontRef>
+        </p:style>
+        <p:txBody>
+          <a:bodyPr rtlCol="0" anchor="ctr"/>
+          <a:lstStyle/>
+          <a:p>
+            <a:pPr algn="ctr"/>
+            <a:endParaRPr kumimoji="1" lang="ja-JP" altLang="en-US"/>
+          </a:p>
+        </p:txBody>
+      </p:sp>
+      <p:sp>
+        <p:nvSpPr>
+          <p:cNvPr id="71" name="正方形/長方形 70">
+            <a:extLst>
+              <a:ext uri="{FF2B5EF4-FFF2-40B4-BE49-F238E27FC236}">
+                <a16:creationId xmlns:a16="http://schemas.microsoft.com/office/drawing/2014/main" id="{A885720F-D4C5-611F-B3C7-DD08AEF4F5F7}"/>
+              </a:ext>
+            </a:extLst>
+          </p:cNvPr>
+          <p:cNvSpPr/>
+          <p:nvPr/>
+        </p:nvSpPr>
+        <p:spPr>
+          <a:xfrm>
+            <a:off x="4071757" y="4356169"/>
+            <a:ext cx="280404" cy="287983"/>
+          </a:xfrm>
+          <a:prstGeom prst="rect">
+            <a:avLst/>
+          </a:prstGeom>
+          <a:solidFill>
+            <a:schemeClr val="bg2">
+              <a:lumMod val="90000"/>
+            </a:schemeClr>
+          </a:solidFill>
+          <a:ln>
+            <a:noFill/>
+          </a:ln>
+        </p:spPr>
+        <p:style>
+          <a:lnRef idx="2">
+            <a:schemeClr val="accent1">
+              <a:shade val="15000"/>
+            </a:schemeClr>
+          </a:lnRef>
+          <a:fillRef idx="1">
+            <a:schemeClr val="accent1"/>
+          </a:fillRef>
+          <a:effectRef idx="0">
+            <a:schemeClr val="accent1"/>
+          </a:effectRef>
+          <a:fontRef idx="minor">
+            <a:schemeClr val="lt1"/>
+          </a:fontRef>
+        </p:style>
+        <p:txBody>
+          <a:bodyPr rtlCol="0" anchor="ctr"/>
+          <a:lstStyle/>
+          <a:p>
+            <a:pPr algn="ctr"/>
+            <a:endParaRPr kumimoji="1" lang="ja-JP" altLang="en-US"/>
+          </a:p>
+        </p:txBody>
+      </p:sp>
+      <p:sp>
+        <p:nvSpPr>
+          <p:cNvPr id="72" name="正方形/長方形 71">
+            <a:extLst>
+              <a:ext uri="{FF2B5EF4-FFF2-40B4-BE49-F238E27FC236}">
+                <a16:creationId xmlns:a16="http://schemas.microsoft.com/office/drawing/2014/main" id="{6E3CAB67-3941-C15B-7C0F-06A0D907FD11}"/>
+              </a:ext>
+            </a:extLst>
+          </p:cNvPr>
+          <p:cNvSpPr/>
+          <p:nvPr/>
+        </p:nvSpPr>
+        <p:spPr>
+          <a:xfrm>
+            <a:off x="4791845" y="4356169"/>
+            <a:ext cx="280404" cy="287983"/>
+          </a:xfrm>
+          <a:prstGeom prst="rect">
+            <a:avLst/>
+          </a:prstGeom>
+          <a:solidFill>
+            <a:schemeClr val="bg2">
+              <a:lumMod val="90000"/>
+            </a:schemeClr>
+          </a:solidFill>
+          <a:ln>
+            <a:noFill/>
+          </a:ln>
+        </p:spPr>
+        <p:style>
+          <a:lnRef idx="2">
+            <a:schemeClr val="accent1">
+              <a:shade val="15000"/>
+            </a:schemeClr>
+          </a:lnRef>
+          <a:fillRef idx="1">
+            <a:schemeClr val="accent1"/>
+          </a:fillRef>
+          <a:effectRef idx="0">
+            <a:schemeClr val="accent1"/>
+          </a:effectRef>
+          <a:fontRef idx="minor">
+            <a:schemeClr val="lt1"/>
+          </a:fontRef>
+        </p:style>
+        <p:txBody>
+          <a:bodyPr rtlCol="0" anchor="ctr"/>
+          <a:lstStyle/>
+          <a:p>
+            <a:pPr algn="ctr"/>
+            <a:endParaRPr kumimoji="1" lang="ja-JP" altLang="en-US"/>
+          </a:p>
+        </p:txBody>
+      </p:sp>
+      <p:sp>
+        <p:nvSpPr>
+          <p:cNvPr id="73" name="正方形/長方形 72">
+            <a:extLst>
+              <a:ext uri="{FF2B5EF4-FFF2-40B4-BE49-F238E27FC236}">
+                <a16:creationId xmlns:a16="http://schemas.microsoft.com/office/drawing/2014/main" id="{2A6B2995-D466-BE1D-0AC6-23F865D0121E}"/>
+              </a:ext>
+            </a:extLst>
+          </p:cNvPr>
+          <p:cNvSpPr/>
+          <p:nvPr/>
+        </p:nvSpPr>
+        <p:spPr>
+          <a:xfrm>
+            <a:off x="5508147" y="4356115"/>
+            <a:ext cx="280404" cy="287983"/>
+          </a:xfrm>
+          <a:prstGeom prst="rect">
+            <a:avLst/>
+          </a:prstGeom>
+          <a:solidFill>
+            <a:schemeClr val="bg2">
+              <a:lumMod val="90000"/>
+            </a:schemeClr>
+          </a:solidFill>
+          <a:ln>
+            <a:noFill/>
+          </a:ln>
+        </p:spPr>
+        <p:style>
+          <a:lnRef idx="2">
+            <a:schemeClr val="accent1">
+              <a:shade val="15000"/>
+            </a:schemeClr>
+          </a:lnRef>
+          <a:fillRef idx="1">
+            <a:schemeClr val="accent1"/>
+          </a:fillRef>
+          <a:effectRef idx="0">
+            <a:schemeClr val="accent1"/>
+          </a:effectRef>
+          <a:fontRef idx="minor">
+            <a:schemeClr val="lt1"/>
+          </a:fontRef>
+        </p:style>
+        <p:txBody>
+          <a:bodyPr rtlCol="0" anchor="ctr"/>
+          <a:lstStyle/>
+          <a:p>
+            <a:pPr algn="ctr"/>
+            <a:endParaRPr kumimoji="1" lang="ja-JP" altLang="en-US"/>
+          </a:p>
+        </p:txBody>
+      </p:sp>
+      <p:sp>
+        <p:nvSpPr>
+          <p:cNvPr id="74" name="正方形/長方形 73">
+            <a:extLst>
+              <a:ext uri="{FF2B5EF4-FFF2-40B4-BE49-F238E27FC236}">
+                <a16:creationId xmlns:a16="http://schemas.microsoft.com/office/drawing/2014/main" id="{A426E33F-1814-837F-13C4-2E8175E7598A}"/>
+              </a:ext>
+            </a:extLst>
+          </p:cNvPr>
+          <p:cNvSpPr/>
+          <p:nvPr/>
+        </p:nvSpPr>
+        <p:spPr>
+          <a:xfrm>
+            <a:off x="6228235" y="4356115"/>
+            <a:ext cx="280404" cy="287983"/>
+          </a:xfrm>
+          <a:prstGeom prst="rect">
+            <a:avLst/>
+          </a:prstGeom>
+          <a:solidFill>
+            <a:schemeClr val="bg2">
+              <a:lumMod val="90000"/>
+            </a:schemeClr>
+          </a:solidFill>
+          <a:ln>
+            <a:noFill/>
+          </a:ln>
+        </p:spPr>
+        <p:style>
+          <a:lnRef idx="2">
+            <a:schemeClr val="accent1">
+              <a:shade val="15000"/>
+            </a:schemeClr>
+          </a:lnRef>
+          <a:fillRef idx="1">
+            <a:schemeClr val="accent1"/>
+          </a:fillRef>
+          <a:effectRef idx="0">
+            <a:schemeClr val="accent1"/>
+          </a:effectRef>
+          <a:fontRef idx="minor">
+            <a:schemeClr val="lt1"/>
+          </a:fontRef>
+        </p:style>
+        <p:txBody>
+          <a:bodyPr rtlCol="0" anchor="ctr"/>
+          <a:lstStyle/>
+          <a:p>
+            <a:pPr algn="ctr"/>
+            <a:endParaRPr kumimoji="1" lang="ja-JP" altLang="en-US"/>
+          </a:p>
+        </p:txBody>
+      </p:sp>
+      <p:sp>
+        <p:nvSpPr>
+          <p:cNvPr id="75" name="正方形/長方形 74">
+            <a:extLst>
+              <a:ext uri="{FF2B5EF4-FFF2-40B4-BE49-F238E27FC236}">
+                <a16:creationId xmlns:a16="http://schemas.microsoft.com/office/drawing/2014/main" id="{C64E92AE-D7EF-0A63-9C68-045F1A8D1718}"/>
+              </a:ext>
+            </a:extLst>
+          </p:cNvPr>
+          <p:cNvSpPr/>
+          <p:nvPr/>
+        </p:nvSpPr>
+        <p:spPr>
+          <a:xfrm>
+            <a:off x="2635361" y="5085284"/>
+            <a:ext cx="280404" cy="287983"/>
+          </a:xfrm>
+          <a:prstGeom prst="rect">
+            <a:avLst/>
+          </a:prstGeom>
+          <a:solidFill>
+            <a:schemeClr val="bg2">
+              <a:lumMod val="90000"/>
+            </a:schemeClr>
+          </a:solidFill>
+          <a:ln>
+            <a:noFill/>
+          </a:ln>
+        </p:spPr>
+        <p:style>
+          <a:lnRef idx="2">
+            <a:schemeClr val="accent1">
+              <a:shade val="15000"/>
+            </a:schemeClr>
+          </a:lnRef>
+          <a:fillRef idx="1">
+            <a:schemeClr val="accent1"/>
+          </a:fillRef>
+          <a:effectRef idx="0">
+            <a:schemeClr val="accent1"/>
+          </a:effectRef>
+          <a:fontRef idx="minor">
+            <a:schemeClr val="lt1"/>
+          </a:fontRef>
+        </p:style>
+        <p:txBody>
+          <a:bodyPr rtlCol="0" anchor="ctr"/>
+          <a:lstStyle/>
+          <a:p>
+            <a:pPr algn="ctr"/>
+            <a:endParaRPr kumimoji="1" lang="ja-JP" altLang="en-US"/>
+          </a:p>
+        </p:txBody>
+      </p:sp>
+      <p:sp>
+        <p:nvSpPr>
+          <p:cNvPr id="76" name="正方形/長方形 75">
+            <a:extLst>
+              <a:ext uri="{FF2B5EF4-FFF2-40B4-BE49-F238E27FC236}">
+                <a16:creationId xmlns:a16="http://schemas.microsoft.com/office/drawing/2014/main" id="{497AB67B-20CC-1C05-F2EF-42153B778E69}"/>
+              </a:ext>
+            </a:extLst>
+          </p:cNvPr>
+          <p:cNvSpPr/>
+          <p:nvPr/>
+        </p:nvSpPr>
+        <p:spPr>
+          <a:xfrm>
+            <a:off x="3355449" y="5085284"/>
+            <a:ext cx="280404" cy="287983"/>
+          </a:xfrm>
+          <a:prstGeom prst="rect">
+            <a:avLst/>
+          </a:prstGeom>
+          <a:solidFill>
+            <a:schemeClr val="bg2">
+              <a:lumMod val="90000"/>
+            </a:schemeClr>
+          </a:solidFill>
+          <a:ln>
+            <a:noFill/>
+          </a:ln>
+        </p:spPr>
+        <p:style>
+          <a:lnRef idx="2">
+            <a:schemeClr val="accent1">
+              <a:shade val="15000"/>
+            </a:schemeClr>
+          </a:lnRef>
+          <a:fillRef idx="1">
+            <a:schemeClr val="accent1"/>
+          </a:fillRef>
+          <a:effectRef idx="0">
+            <a:schemeClr val="accent1"/>
+          </a:effectRef>
+          <a:fontRef idx="minor">
+            <a:schemeClr val="lt1"/>
+          </a:fontRef>
+        </p:style>
+        <p:txBody>
+          <a:bodyPr rtlCol="0" anchor="ctr"/>
+          <a:lstStyle/>
+          <a:p>
+            <a:pPr algn="ctr"/>
+            <a:endParaRPr kumimoji="1" lang="ja-JP" altLang="en-US"/>
+          </a:p>
+        </p:txBody>
+      </p:sp>
+      <p:sp>
+        <p:nvSpPr>
+          <p:cNvPr id="77" name="正方形/長方形 76">
+            <a:extLst>
+              <a:ext uri="{FF2B5EF4-FFF2-40B4-BE49-F238E27FC236}">
+                <a16:creationId xmlns:a16="http://schemas.microsoft.com/office/drawing/2014/main" id="{E59D9A93-F66D-14AA-7278-6AAC0448FBA7}"/>
+              </a:ext>
+            </a:extLst>
+          </p:cNvPr>
+          <p:cNvSpPr/>
+          <p:nvPr/>
+        </p:nvSpPr>
+        <p:spPr>
+          <a:xfrm>
+            <a:off x="4079336" y="5085284"/>
+            <a:ext cx="280404" cy="287983"/>
+          </a:xfrm>
+          <a:prstGeom prst="rect">
+            <a:avLst/>
+          </a:prstGeom>
+          <a:solidFill>
+            <a:schemeClr val="bg2">
+              <a:lumMod val="90000"/>
+            </a:schemeClr>
+          </a:solidFill>
+          <a:ln>
+            <a:noFill/>
+          </a:ln>
+        </p:spPr>
+        <p:style>
+          <a:lnRef idx="2">
+            <a:schemeClr val="accent1">
+              <a:shade val="15000"/>
+            </a:schemeClr>
+          </a:lnRef>
+          <a:fillRef idx="1">
+            <a:schemeClr val="accent1"/>
+          </a:fillRef>
+          <a:effectRef idx="0">
+            <a:schemeClr val="accent1"/>
+          </a:effectRef>
+          <a:fontRef idx="minor">
+            <a:schemeClr val="lt1"/>
+          </a:fontRef>
+        </p:style>
+        <p:txBody>
+          <a:bodyPr rtlCol="0" anchor="ctr"/>
+          <a:lstStyle/>
+          <a:p>
+            <a:pPr algn="ctr"/>
+            <a:endParaRPr kumimoji="1" lang="ja-JP" altLang="en-US"/>
+          </a:p>
+        </p:txBody>
+      </p:sp>
+      <p:sp>
+        <p:nvSpPr>
+          <p:cNvPr id="78" name="正方形/長方形 77">
+            <a:extLst>
+              <a:ext uri="{FF2B5EF4-FFF2-40B4-BE49-F238E27FC236}">
+                <a16:creationId xmlns:a16="http://schemas.microsoft.com/office/drawing/2014/main" id="{1797E108-1416-D81C-0858-7B0B59850B18}"/>
+              </a:ext>
+            </a:extLst>
+          </p:cNvPr>
+          <p:cNvSpPr/>
+          <p:nvPr/>
+        </p:nvSpPr>
+        <p:spPr>
+          <a:xfrm>
+            <a:off x="4799424" y="5085284"/>
+            <a:ext cx="280404" cy="287983"/>
+          </a:xfrm>
+          <a:prstGeom prst="rect">
+            <a:avLst/>
+          </a:prstGeom>
+          <a:solidFill>
+            <a:schemeClr val="bg2">
+              <a:lumMod val="90000"/>
+            </a:schemeClr>
+          </a:solidFill>
+          <a:ln>
+            <a:noFill/>
+          </a:ln>
+        </p:spPr>
+        <p:style>
+          <a:lnRef idx="2">
+            <a:schemeClr val="accent1">
+              <a:shade val="15000"/>
+            </a:schemeClr>
+          </a:lnRef>
+          <a:fillRef idx="1">
+            <a:schemeClr val="accent1"/>
+          </a:fillRef>
+          <a:effectRef idx="0">
+            <a:schemeClr val="accent1"/>
+          </a:effectRef>
+          <a:fontRef idx="minor">
+            <a:schemeClr val="lt1"/>
+          </a:fontRef>
+        </p:style>
+        <p:txBody>
+          <a:bodyPr rtlCol="0" anchor="ctr"/>
+          <a:lstStyle/>
+          <a:p>
+            <a:pPr algn="ctr"/>
+            <a:endParaRPr kumimoji="1" lang="ja-JP" altLang="en-US"/>
+          </a:p>
+        </p:txBody>
+      </p:sp>
+      <p:sp>
+        <p:nvSpPr>
+          <p:cNvPr id="79" name="正方形/長方形 78">
+            <a:extLst>
+              <a:ext uri="{FF2B5EF4-FFF2-40B4-BE49-F238E27FC236}">
+                <a16:creationId xmlns:a16="http://schemas.microsoft.com/office/drawing/2014/main" id="{8638857E-1755-F4A6-07CF-62F280B3CFDF}"/>
+              </a:ext>
+            </a:extLst>
+          </p:cNvPr>
+          <p:cNvSpPr/>
+          <p:nvPr/>
+        </p:nvSpPr>
+        <p:spPr>
+          <a:xfrm>
+            <a:off x="5515726" y="5085230"/>
+            <a:ext cx="280404" cy="287983"/>
+          </a:xfrm>
+          <a:prstGeom prst="rect">
+            <a:avLst/>
+          </a:prstGeom>
+          <a:solidFill>
+            <a:schemeClr val="bg2">
+              <a:lumMod val="90000"/>
+            </a:schemeClr>
+          </a:solidFill>
+          <a:ln>
+            <a:noFill/>
+          </a:ln>
+        </p:spPr>
+        <p:style>
+          <a:lnRef idx="2">
+            <a:schemeClr val="accent1">
+              <a:shade val="15000"/>
+            </a:schemeClr>
+          </a:lnRef>
+          <a:fillRef idx="1">
+            <a:schemeClr val="accent1"/>
+          </a:fillRef>
+          <a:effectRef idx="0">
+            <a:schemeClr val="accent1"/>
+          </a:effectRef>
+          <a:fontRef idx="minor">
+            <a:schemeClr val="lt1"/>
+          </a:fontRef>
+        </p:style>
+        <p:txBody>
+          <a:bodyPr rtlCol="0" anchor="ctr"/>
+          <a:lstStyle/>
+          <a:p>
+            <a:pPr algn="ctr"/>
+            <a:endParaRPr kumimoji="1" lang="ja-JP" altLang="en-US"/>
+          </a:p>
+        </p:txBody>
+      </p:sp>
+      <p:sp>
+        <p:nvSpPr>
+          <p:cNvPr id="80" name="正方形/長方形 79">
+            <a:extLst>
+              <a:ext uri="{FF2B5EF4-FFF2-40B4-BE49-F238E27FC236}">
+                <a16:creationId xmlns:a16="http://schemas.microsoft.com/office/drawing/2014/main" id="{99F80E55-D92C-270A-182C-CA3E357DBFDE}"/>
+              </a:ext>
+            </a:extLst>
+          </p:cNvPr>
+          <p:cNvSpPr/>
+          <p:nvPr/>
+        </p:nvSpPr>
+        <p:spPr>
+          <a:xfrm>
+            <a:off x="6235814" y="5085230"/>
+            <a:ext cx="280404" cy="287983"/>
+          </a:xfrm>
+          <a:prstGeom prst="rect">
+            <a:avLst/>
+          </a:prstGeom>
+          <a:solidFill>
+            <a:schemeClr val="bg2">
+              <a:lumMod val="90000"/>
+            </a:schemeClr>
+          </a:solidFill>
+          <a:ln>
+            <a:noFill/>
+          </a:ln>
+        </p:spPr>
+        <p:style>
+          <a:lnRef idx="2">
+            <a:schemeClr val="accent1">
+              <a:shade val="15000"/>
+            </a:schemeClr>
+          </a:lnRef>
+          <a:fillRef idx="1">
+            <a:schemeClr val="accent1"/>
+          </a:fillRef>
+          <a:effectRef idx="0">
+            <a:schemeClr val="accent1"/>
+          </a:effectRef>
+          <a:fontRef idx="minor">
+            <a:schemeClr val="lt1"/>
+          </a:fontRef>
+        </p:style>
+        <p:txBody>
+          <a:bodyPr rtlCol="0" anchor="ctr"/>
+          <a:lstStyle/>
+          <a:p>
+            <a:pPr algn="ctr"/>
+            <a:endParaRPr kumimoji="1" lang="ja-JP" altLang="en-US"/>
+          </a:p>
+        </p:txBody>
+      </p:sp>
+      <p:pic>
+        <p:nvPicPr>
+          <p:cNvPr id="81" name="図 80" descr="カラーコーン・ロードコーンのイラスト">
+            <a:extLst>
+              <a:ext uri="{FF2B5EF4-FFF2-40B4-BE49-F238E27FC236}">
+                <a16:creationId xmlns:a16="http://schemas.microsoft.com/office/drawing/2014/main" id="{5996BBFD-25CD-6CB5-8CD9-D088901549EA}"/>
+              </a:ext>
+            </a:extLst>
+          </p:cNvPr>
+          <p:cNvPicPr>
+            <a:picLocks noChangeAspect="1"/>
+          </p:cNvPicPr>
+          <p:nvPr/>
+        </p:nvPicPr>
+        <p:blipFill>
+          <a:blip r:embed="rId3"/>
+          <a:stretch>
+            <a:fillRect/>
+          </a:stretch>
+        </p:blipFill>
+        <p:spPr>
+          <a:xfrm>
+            <a:off x="2617769" y="1781847"/>
+            <a:ext cx="287983" cy="287983"/>
+          </a:xfrm>
+          <a:prstGeom prst="rect">
+            <a:avLst/>
+          </a:prstGeom>
+        </p:spPr>
+      </p:pic>
+      <p:pic>
+        <p:nvPicPr>
+          <p:cNvPr id="82" name="図 81" descr="カラーコーン・ロードコーンのイラスト">
+            <a:extLst>
+              <a:ext uri="{FF2B5EF4-FFF2-40B4-BE49-F238E27FC236}">
+                <a16:creationId xmlns:a16="http://schemas.microsoft.com/office/drawing/2014/main" id="{2311335C-4851-76D1-4C6B-EFCF2E4FDE70}"/>
+              </a:ext>
+            </a:extLst>
+          </p:cNvPr>
+          <p:cNvPicPr>
+            <a:picLocks noChangeAspect="1"/>
+          </p:cNvPicPr>
+          <p:nvPr/>
+        </p:nvPicPr>
+        <p:blipFill>
+          <a:blip r:embed="rId3"/>
+          <a:stretch>
+            <a:fillRect/>
+          </a:stretch>
+        </p:blipFill>
+        <p:spPr>
+          <a:xfrm>
+            <a:off x="3723760" y="1475701"/>
+            <a:ext cx="287983" cy="287983"/>
+          </a:xfrm>
+          <a:prstGeom prst="rect">
+            <a:avLst/>
+          </a:prstGeom>
+        </p:spPr>
+      </p:pic>
+      <p:pic>
+        <p:nvPicPr>
+          <p:cNvPr id="83" name="図 82" descr="カラーコーン・ロードコーンのイラスト">
+            <a:extLst>
+              <a:ext uri="{FF2B5EF4-FFF2-40B4-BE49-F238E27FC236}">
+                <a16:creationId xmlns:a16="http://schemas.microsoft.com/office/drawing/2014/main" id="{BC9C7963-915D-5A86-EE26-6E931C567618}"/>
+              </a:ext>
+            </a:extLst>
+          </p:cNvPr>
+          <p:cNvPicPr>
+            <a:picLocks noChangeAspect="1"/>
+          </p:cNvPicPr>
+          <p:nvPr/>
+        </p:nvPicPr>
+        <p:blipFill>
+          <a:blip r:embed="rId3"/>
+          <a:stretch>
+            <a:fillRect/>
+          </a:stretch>
+        </p:blipFill>
+        <p:spPr>
+          <a:xfrm>
+            <a:off x="3331319" y="2549836"/>
+            <a:ext cx="287983" cy="287983"/>
+          </a:xfrm>
+          <a:prstGeom prst="rect">
+            <a:avLst/>
+          </a:prstGeom>
+        </p:spPr>
+      </p:pic>
+      <p:pic>
+        <p:nvPicPr>
+          <p:cNvPr id="84" name="図 83" descr="カラーコーン・ロードコーンのイラスト">
+            <a:extLst>
+              <a:ext uri="{FF2B5EF4-FFF2-40B4-BE49-F238E27FC236}">
+                <a16:creationId xmlns:a16="http://schemas.microsoft.com/office/drawing/2014/main" id="{C6C59764-9B3B-13B0-CAB2-5D94452A48BC}"/>
+              </a:ext>
+            </a:extLst>
+          </p:cNvPr>
+          <p:cNvPicPr>
+            <a:picLocks noChangeAspect="1"/>
+          </p:cNvPicPr>
+          <p:nvPr/>
+        </p:nvPicPr>
+        <p:blipFill>
+          <a:blip r:embed="rId3"/>
+          <a:stretch>
+            <a:fillRect/>
+          </a:stretch>
+        </p:blipFill>
+        <p:spPr>
+          <a:xfrm>
+            <a:off x="3331319" y="3265152"/>
+            <a:ext cx="287983" cy="287983"/>
+          </a:xfrm>
+          <a:prstGeom prst="rect">
+            <a:avLst/>
+          </a:prstGeom>
+        </p:spPr>
+      </p:pic>
+      <p:pic>
+        <p:nvPicPr>
+          <p:cNvPr id="85" name="図 84" descr="カラーコーン・ロードコーンのイラスト">
+            <a:extLst>
+              <a:ext uri="{FF2B5EF4-FFF2-40B4-BE49-F238E27FC236}">
+                <a16:creationId xmlns:a16="http://schemas.microsoft.com/office/drawing/2014/main" id="{A950ADC4-EB35-4F0C-20E4-D672070AC8D6}"/>
+              </a:ext>
+            </a:extLst>
+          </p:cNvPr>
+          <p:cNvPicPr>
+            <a:picLocks noChangeAspect="1"/>
+          </p:cNvPicPr>
+          <p:nvPr/>
+        </p:nvPicPr>
+        <p:blipFill>
+          <a:blip r:embed="rId3"/>
+          <a:stretch>
+            <a:fillRect/>
+          </a:stretch>
+        </p:blipFill>
+        <p:spPr>
+          <a:xfrm>
+            <a:off x="4784264" y="3956101"/>
+            <a:ext cx="287983" cy="287983"/>
+          </a:xfrm>
+          <a:prstGeom prst="rect">
+            <a:avLst/>
+          </a:prstGeom>
+        </p:spPr>
+      </p:pic>
+      <p:pic>
+        <p:nvPicPr>
+          <p:cNvPr id="86" name="図 85" descr="カラーコーン・ロードコーンのイラスト">
+            <a:extLst>
+              <a:ext uri="{FF2B5EF4-FFF2-40B4-BE49-F238E27FC236}">
+                <a16:creationId xmlns:a16="http://schemas.microsoft.com/office/drawing/2014/main" id="{30D52B45-68C6-2FCC-68B3-A74D5CFEE165}"/>
+              </a:ext>
+            </a:extLst>
+          </p:cNvPr>
+          <p:cNvPicPr>
+            <a:picLocks noChangeAspect="1"/>
+          </p:cNvPicPr>
+          <p:nvPr/>
+        </p:nvPicPr>
+        <p:blipFill>
+          <a:blip r:embed="rId3"/>
+          <a:stretch>
+            <a:fillRect/>
+          </a:stretch>
+        </p:blipFill>
+        <p:spPr>
+          <a:xfrm>
+            <a:off x="2624546" y="3984968"/>
+            <a:ext cx="287983" cy="287983"/>
+          </a:xfrm>
+          <a:prstGeom prst="rect">
+            <a:avLst/>
+          </a:prstGeom>
+        </p:spPr>
+      </p:pic>
+      <p:pic>
+        <p:nvPicPr>
+          <p:cNvPr id="87" name="図 86" descr="カラーコーン・ロードコーンのイラスト">
+            <a:extLst>
+              <a:ext uri="{FF2B5EF4-FFF2-40B4-BE49-F238E27FC236}">
+                <a16:creationId xmlns:a16="http://schemas.microsoft.com/office/drawing/2014/main" id="{043536ED-2792-80B0-15BD-C03546799ECB}"/>
+              </a:ext>
+            </a:extLst>
+          </p:cNvPr>
+          <p:cNvPicPr>
+            <a:picLocks noChangeAspect="1"/>
+          </p:cNvPicPr>
+          <p:nvPr/>
+        </p:nvPicPr>
+        <p:blipFill>
+          <a:blip r:embed="rId3"/>
+          <a:stretch>
+            <a:fillRect/>
+          </a:stretch>
+        </p:blipFill>
+        <p:spPr>
+          <a:xfrm>
+            <a:off x="4064162" y="3261656"/>
+            <a:ext cx="287983" cy="287983"/>
+          </a:xfrm>
+          <a:prstGeom prst="rect">
+            <a:avLst/>
+          </a:prstGeom>
+        </p:spPr>
+      </p:pic>
+      <p:pic>
+        <p:nvPicPr>
+          <p:cNvPr id="88" name="図 87" descr="カラーコーン・ロードコーンのイラスト">
+            <a:extLst>
+              <a:ext uri="{FF2B5EF4-FFF2-40B4-BE49-F238E27FC236}">
+                <a16:creationId xmlns:a16="http://schemas.microsoft.com/office/drawing/2014/main" id="{A4F791D0-FB30-2A7E-1DA2-CB3459FA4841}"/>
+              </a:ext>
+            </a:extLst>
+          </p:cNvPr>
+          <p:cNvPicPr>
+            <a:picLocks noChangeAspect="1"/>
+          </p:cNvPicPr>
+          <p:nvPr/>
+        </p:nvPicPr>
+        <p:blipFill>
+          <a:blip r:embed="rId3"/>
+          <a:stretch>
+            <a:fillRect/>
+          </a:stretch>
+        </p:blipFill>
+        <p:spPr>
+          <a:xfrm>
+            <a:off x="4067961" y="4716213"/>
+            <a:ext cx="287983" cy="287983"/>
+          </a:xfrm>
+          <a:prstGeom prst="rect">
+            <a:avLst/>
+          </a:prstGeom>
+        </p:spPr>
+      </p:pic>
+      <p:pic>
+        <p:nvPicPr>
+          <p:cNvPr id="89" name="図 88" descr="カラーコーン・ロードコーンのイラスト">
+            <a:extLst>
+              <a:ext uri="{FF2B5EF4-FFF2-40B4-BE49-F238E27FC236}">
+                <a16:creationId xmlns:a16="http://schemas.microsoft.com/office/drawing/2014/main" id="{B6C50B44-942D-A14E-40D2-1BBC515E3D4E}"/>
+              </a:ext>
+            </a:extLst>
+          </p:cNvPr>
+          <p:cNvPicPr>
+            <a:picLocks noChangeAspect="1"/>
+          </p:cNvPicPr>
+          <p:nvPr/>
+        </p:nvPicPr>
+        <p:blipFill>
+          <a:blip r:embed="rId3"/>
+          <a:stretch>
+            <a:fillRect/>
+          </a:stretch>
+        </p:blipFill>
+        <p:spPr>
+          <a:xfrm>
+            <a:off x="2987035" y="5081938"/>
+            <a:ext cx="287983" cy="287983"/>
+          </a:xfrm>
+          <a:prstGeom prst="rect">
+            <a:avLst/>
+          </a:prstGeom>
+        </p:spPr>
+      </p:pic>
+      <p:pic>
+        <p:nvPicPr>
+          <p:cNvPr id="90" name="図 89" descr="カラーコーン・ロードコーンのイラスト">
+            <a:extLst>
+              <a:ext uri="{FF2B5EF4-FFF2-40B4-BE49-F238E27FC236}">
+                <a16:creationId xmlns:a16="http://schemas.microsoft.com/office/drawing/2014/main" id="{F15120C7-6702-4815-73EA-20566F4A3986}"/>
+              </a:ext>
+            </a:extLst>
+          </p:cNvPr>
+          <p:cNvPicPr>
+            <a:picLocks noChangeAspect="1"/>
+          </p:cNvPicPr>
+          <p:nvPr/>
+        </p:nvPicPr>
+        <p:blipFill>
+          <a:blip r:embed="rId3"/>
+          <a:stretch>
+            <a:fillRect/>
+          </a:stretch>
+        </p:blipFill>
+        <p:spPr>
+          <a:xfrm>
+            <a:off x="5148132" y="2901899"/>
+            <a:ext cx="287983" cy="287983"/>
+          </a:xfrm>
+          <a:prstGeom prst="rect">
+            <a:avLst/>
+          </a:prstGeom>
+        </p:spPr>
+      </p:pic>
+      <p:pic>
+        <p:nvPicPr>
+          <p:cNvPr id="91" name="図 90" descr="カラーコーン・ロードコーンのイラスト">
+            <a:extLst>
+              <a:ext uri="{FF2B5EF4-FFF2-40B4-BE49-F238E27FC236}">
+                <a16:creationId xmlns:a16="http://schemas.microsoft.com/office/drawing/2014/main" id="{30BD84CE-4869-39A5-0665-C8891D511E96}"/>
+              </a:ext>
+            </a:extLst>
+          </p:cNvPr>
+          <p:cNvPicPr>
+            <a:picLocks noChangeAspect="1"/>
+          </p:cNvPicPr>
+          <p:nvPr/>
+        </p:nvPicPr>
+        <p:blipFill>
+          <a:blip r:embed="rId3"/>
+          <a:stretch>
+            <a:fillRect/>
+          </a:stretch>
+        </p:blipFill>
+        <p:spPr>
+          <a:xfrm>
+            <a:off x="5165968" y="1448802"/>
+            <a:ext cx="287983" cy="287983"/>
+          </a:xfrm>
+          <a:prstGeom prst="rect">
+            <a:avLst/>
+          </a:prstGeom>
+        </p:spPr>
+      </p:pic>
+      <p:pic>
+        <p:nvPicPr>
+          <p:cNvPr id="92" name="図 91" descr="カラーコーン・ロードコーンのイラスト">
+            <a:extLst>
+              <a:ext uri="{FF2B5EF4-FFF2-40B4-BE49-F238E27FC236}">
+                <a16:creationId xmlns:a16="http://schemas.microsoft.com/office/drawing/2014/main" id="{266E6AF0-EECD-CC68-7AE5-F3D2E1128A7F}"/>
+              </a:ext>
+            </a:extLst>
+          </p:cNvPr>
+          <p:cNvPicPr>
+            <a:picLocks noChangeAspect="1"/>
+          </p:cNvPicPr>
+          <p:nvPr/>
+        </p:nvPicPr>
+        <p:blipFill>
+          <a:blip r:embed="rId3"/>
+          <a:stretch>
+            <a:fillRect/>
+          </a:stretch>
+        </p:blipFill>
+        <p:spPr>
+          <a:xfrm>
+            <a:off x="4418028" y="2168892"/>
+            <a:ext cx="287983" cy="287983"/>
+          </a:xfrm>
+          <a:prstGeom prst="rect">
+            <a:avLst/>
+          </a:prstGeom>
+        </p:spPr>
+      </p:pic>
+      <p:pic>
+        <p:nvPicPr>
+          <p:cNvPr id="93" name="図 92" descr="カラーコーン・ロードコーンのイラスト">
+            <a:extLst>
+              <a:ext uri="{FF2B5EF4-FFF2-40B4-BE49-F238E27FC236}">
+                <a16:creationId xmlns:a16="http://schemas.microsoft.com/office/drawing/2014/main" id="{BA6CA832-D81E-4386-0379-A55B6F3283DA}"/>
+              </a:ext>
+            </a:extLst>
+          </p:cNvPr>
+          <p:cNvPicPr>
+            <a:picLocks noChangeAspect="1"/>
+          </p:cNvPicPr>
+          <p:nvPr/>
+        </p:nvPicPr>
+        <p:blipFill>
+          <a:blip r:embed="rId3"/>
+          <a:stretch>
+            <a:fillRect/>
+          </a:stretch>
+        </p:blipFill>
+        <p:spPr>
+          <a:xfrm>
+            <a:off x="5860613" y="2208195"/>
+            <a:ext cx="287983" cy="287983"/>
+          </a:xfrm>
+          <a:prstGeom prst="rect">
+            <a:avLst/>
+          </a:prstGeom>
+        </p:spPr>
+      </p:pic>
+      <p:pic>
+        <p:nvPicPr>
+          <p:cNvPr id="94" name="図 93" descr="カラーコーン・ロードコーンのイラスト">
+            <a:extLst>
+              <a:ext uri="{FF2B5EF4-FFF2-40B4-BE49-F238E27FC236}">
+                <a16:creationId xmlns:a16="http://schemas.microsoft.com/office/drawing/2014/main" id="{ADC16C50-2FE8-A05A-60A0-625008291518}"/>
+              </a:ext>
+            </a:extLst>
+          </p:cNvPr>
+          <p:cNvPicPr>
+            <a:picLocks noChangeAspect="1"/>
+          </p:cNvPicPr>
+          <p:nvPr/>
+        </p:nvPicPr>
+        <p:blipFill>
+          <a:blip r:embed="rId3"/>
+          <a:stretch>
+            <a:fillRect/>
+          </a:stretch>
+        </p:blipFill>
+        <p:spPr>
+          <a:xfrm>
+            <a:off x="5860613" y="3621989"/>
+            <a:ext cx="287983" cy="287983"/>
+          </a:xfrm>
+          <a:prstGeom prst="rect">
+            <a:avLst/>
+          </a:prstGeom>
+        </p:spPr>
+      </p:pic>
+      <p:pic>
+        <p:nvPicPr>
+          <p:cNvPr id="95" name="図 94" descr="カラーコーン・ロードコーンのイラスト">
+            <a:extLst>
+              <a:ext uri="{FF2B5EF4-FFF2-40B4-BE49-F238E27FC236}">
+                <a16:creationId xmlns:a16="http://schemas.microsoft.com/office/drawing/2014/main" id="{F513D4E4-4633-367B-A39B-B2FEF9036261}"/>
+              </a:ext>
+            </a:extLst>
+          </p:cNvPr>
+          <p:cNvPicPr>
+            <a:picLocks noChangeAspect="1"/>
+          </p:cNvPicPr>
+          <p:nvPr/>
+        </p:nvPicPr>
+        <p:blipFill>
+          <a:blip r:embed="rId3"/>
+          <a:stretch>
+            <a:fillRect/>
+          </a:stretch>
+        </p:blipFill>
+        <p:spPr>
+          <a:xfrm>
+            <a:off x="5126446" y="4372046"/>
+            <a:ext cx="287983" cy="287983"/>
+          </a:xfrm>
+          <a:prstGeom prst="rect">
+            <a:avLst/>
+          </a:prstGeom>
+        </p:spPr>
+      </p:pic>
+      <p:pic>
+        <p:nvPicPr>
+          <p:cNvPr id="96" name="図 95" descr="カラーコーン・ロードコーンのイラスト">
+            <a:extLst>
+              <a:ext uri="{FF2B5EF4-FFF2-40B4-BE49-F238E27FC236}">
+                <a16:creationId xmlns:a16="http://schemas.microsoft.com/office/drawing/2014/main" id="{74211E33-419D-23D6-051F-5BC97B8BC8A8}"/>
+              </a:ext>
+            </a:extLst>
+          </p:cNvPr>
+          <p:cNvPicPr>
+            <a:picLocks noChangeAspect="1"/>
+          </p:cNvPicPr>
+          <p:nvPr/>
+        </p:nvPicPr>
+        <p:blipFill>
+          <a:blip r:embed="rId3"/>
+          <a:stretch>
+            <a:fillRect/>
+          </a:stretch>
+        </p:blipFill>
+        <p:spPr>
+          <a:xfrm>
+            <a:off x="5875770" y="5073595"/>
+            <a:ext cx="287983" cy="287983"/>
+          </a:xfrm>
+          <a:prstGeom prst="rect">
+            <a:avLst/>
+          </a:prstGeom>
+        </p:spPr>
+      </p:pic>
+      <p:pic>
+        <p:nvPicPr>
+          <p:cNvPr id="97" name="図 96">
+            <a:extLst>
+              <a:ext uri="{FF2B5EF4-FFF2-40B4-BE49-F238E27FC236}">
+                <a16:creationId xmlns:a16="http://schemas.microsoft.com/office/drawing/2014/main" id="{FD58163D-6BE5-E8DC-D052-DDC2C1981D19}"/>
+              </a:ext>
+            </a:extLst>
+          </p:cNvPr>
+          <p:cNvPicPr>
+            <a:picLocks noChangeAspect="1"/>
+          </p:cNvPicPr>
+          <p:nvPr/>
+        </p:nvPicPr>
+        <p:blipFill>
+          <a:blip r:embed="rId4"/>
+          <a:stretch>
+            <a:fillRect/>
+          </a:stretch>
+        </p:blipFill>
+        <p:spPr>
+          <a:xfrm flipH="1">
+            <a:off x="1423258" y="3197998"/>
+            <a:ext cx="818863" cy="549548"/>
+          </a:xfrm>
+          <a:prstGeom prst="rect">
+            <a:avLst/>
+          </a:prstGeom>
+        </p:spPr>
+      </p:pic>
+      <p:pic>
+        <p:nvPicPr>
+          <p:cNvPr id="98" name="図 97">
+            <a:extLst>
+              <a:ext uri="{FF2B5EF4-FFF2-40B4-BE49-F238E27FC236}">
+                <a16:creationId xmlns:a16="http://schemas.microsoft.com/office/drawing/2014/main" id="{4BBA31CC-AC7D-D87E-5E04-E982E1F688EB}"/>
+              </a:ext>
+            </a:extLst>
+          </p:cNvPr>
+          <p:cNvPicPr>
+            <a:picLocks noChangeAspect="1"/>
+          </p:cNvPicPr>
+          <p:nvPr/>
+        </p:nvPicPr>
+        <p:blipFill>
+          <a:blip r:embed="rId5"/>
+          <a:stretch>
+            <a:fillRect/>
+          </a:stretch>
+        </p:blipFill>
+        <p:spPr>
+          <a:xfrm>
+            <a:off x="6882899" y="3204624"/>
+            <a:ext cx="864096" cy="630790"/>
+          </a:xfrm>
+          <a:prstGeom prst="rect">
+            <a:avLst/>
+          </a:prstGeom>
+        </p:spPr>
+      </p:pic>
+    </p:spTree>
+    <p:extLst>
+      <p:ext uri="{BB962C8B-B14F-4D97-AF65-F5344CB8AC3E}">
+        <p14:creationId xmlns:p14="http://schemas.microsoft.com/office/powerpoint/2010/main" val="3224864589"/>
+      </p:ext>
+    </p:extLst>
+  </p:cSld>
+  <p:clrMapOvr>
+    <a:masterClrMapping/>
+  </p:clrMapOvr>
+</p:sld>
+</file>
+
 <file path=ppt/theme/theme1.xml><?xml version="1.0" encoding="utf-8"?>
 <a:theme xmlns:a="http://schemas.openxmlformats.org/drawingml/2006/main" name="Office テーマ">
   <a:themeElements>

--- a/05_percolation/fig/fig.pptx
+++ b/05_percolation/fig/fig.pptx
@@ -7,6 +7,7 @@
   <p:sldIdLst>
     <p:sldId id="256" r:id="rId2"/>
     <p:sldId id="257" r:id="rId3"/>
+    <p:sldId id="258" r:id="rId4"/>
   </p:sldIdLst>
   <p:sldSz cx="9144000" cy="6858000" type="screen4x3"/>
   <p:notesSz cx="6858000" cy="9144000"/>
@@ -957,36 +958,6 @@
           <a:chExt cx="0" cy="0"/>
         </a:xfrm>
       </p:grpSpPr>
-      <p:pic>
-        <p:nvPicPr>
-          <p:cNvPr id="7" name="図 6" descr="上から見た交差点のイラスト（信号あり）">
-            <a:extLst>
-              <a:ext uri="{FF2B5EF4-FFF2-40B4-BE49-F238E27FC236}">
-                <a16:creationId xmlns:a16="http://schemas.microsoft.com/office/drawing/2014/main" id="{89A0EA8F-2F67-44BE-6D16-3A49103E14D4}"/>
-              </a:ext>
-            </a:extLst>
-          </p:cNvPr>
-          <p:cNvPicPr>
-            <a:picLocks noChangeAspect="1"/>
-          </p:cNvPicPr>
-          <p:nvPr/>
-        </p:nvPicPr>
-        <p:blipFill>
-          <a:blip r:embed="rId2"/>
-          <a:stretch>
-            <a:fillRect/>
-          </a:stretch>
-        </p:blipFill>
-        <p:spPr>
-          <a:xfrm>
-            <a:off x="-2916943" y="1412776"/>
-            <a:ext cx="3492500" cy="3492500"/>
-          </a:xfrm>
-          <a:prstGeom prst="rect">
-            <a:avLst/>
-          </a:prstGeom>
-        </p:spPr>
-      </p:pic>
       <p:sp>
         <p:nvSpPr>
           <p:cNvPr id="17" name="正方形/長方形 16">
@@ -4114,7 +4085,7 @@
           <p:nvPr/>
         </p:nvPicPr>
         <p:blipFill>
-          <a:blip r:embed="rId3"/>
+          <a:blip r:embed="rId2"/>
           <a:stretch>
             <a:fillRect/>
           </a:stretch>
@@ -4135,6 +4106,456 @@
             <a:extLst>
               <a:ext uri="{FF2B5EF4-FFF2-40B4-BE49-F238E27FC236}">
                 <a16:creationId xmlns:a16="http://schemas.microsoft.com/office/drawing/2014/main" id="{2311335C-4851-76D1-4C6B-EFCF2E4FDE70}"/>
+              </a:ext>
+            </a:extLst>
+          </p:cNvPr>
+          <p:cNvPicPr>
+            <a:picLocks noChangeAspect="1"/>
+          </p:cNvPicPr>
+          <p:nvPr/>
+        </p:nvPicPr>
+        <p:blipFill>
+          <a:blip r:embed="rId2"/>
+          <a:stretch>
+            <a:fillRect/>
+          </a:stretch>
+        </p:blipFill>
+        <p:spPr>
+          <a:xfrm>
+            <a:off x="3723760" y="1475701"/>
+            <a:ext cx="287983" cy="287983"/>
+          </a:xfrm>
+          <a:prstGeom prst="rect">
+            <a:avLst/>
+          </a:prstGeom>
+        </p:spPr>
+      </p:pic>
+      <p:pic>
+        <p:nvPicPr>
+          <p:cNvPr id="83" name="図 82" descr="カラーコーン・ロードコーンのイラスト">
+            <a:extLst>
+              <a:ext uri="{FF2B5EF4-FFF2-40B4-BE49-F238E27FC236}">
+                <a16:creationId xmlns:a16="http://schemas.microsoft.com/office/drawing/2014/main" id="{BC9C7963-915D-5A86-EE26-6E931C567618}"/>
+              </a:ext>
+            </a:extLst>
+          </p:cNvPr>
+          <p:cNvPicPr>
+            <a:picLocks noChangeAspect="1"/>
+          </p:cNvPicPr>
+          <p:nvPr/>
+        </p:nvPicPr>
+        <p:blipFill>
+          <a:blip r:embed="rId2"/>
+          <a:stretch>
+            <a:fillRect/>
+          </a:stretch>
+        </p:blipFill>
+        <p:spPr>
+          <a:xfrm>
+            <a:off x="3331319" y="2549836"/>
+            <a:ext cx="287983" cy="287983"/>
+          </a:xfrm>
+          <a:prstGeom prst="rect">
+            <a:avLst/>
+          </a:prstGeom>
+        </p:spPr>
+      </p:pic>
+      <p:pic>
+        <p:nvPicPr>
+          <p:cNvPr id="84" name="図 83" descr="カラーコーン・ロードコーンのイラスト">
+            <a:extLst>
+              <a:ext uri="{FF2B5EF4-FFF2-40B4-BE49-F238E27FC236}">
+                <a16:creationId xmlns:a16="http://schemas.microsoft.com/office/drawing/2014/main" id="{C6C59764-9B3B-13B0-CAB2-5D94452A48BC}"/>
+              </a:ext>
+            </a:extLst>
+          </p:cNvPr>
+          <p:cNvPicPr>
+            <a:picLocks noChangeAspect="1"/>
+          </p:cNvPicPr>
+          <p:nvPr/>
+        </p:nvPicPr>
+        <p:blipFill>
+          <a:blip r:embed="rId2"/>
+          <a:stretch>
+            <a:fillRect/>
+          </a:stretch>
+        </p:blipFill>
+        <p:spPr>
+          <a:xfrm>
+            <a:off x="3331319" y="3265152"/>
+            <a:ext cx="287983" cy="287983"/>
+          </a:xfrm>
+          <a:prstGeom prst="rect">
+            <a:avLst/>
+          </a:prstGeom>
+        </p:spPr>
+      </p:pic>
+      <p:pic>
+        <p:nvPicPr>
+          <p:cNvPr id="85" name="図 84" descr="カラーコーン・ロードコーンのイラスト">
+            <a:extLst>
+              <a:ext uri="{FF2B5EF4-FFF2-40B4-BE49-F238E27FC236}">
+                <a16:creationId xmlns:a16="http://schemas.microsoft.com/office/drawing/2014/main" id="{A950ADC4-EB35-4F0C-20E4-D672070AC8D6}"/>
+              </a:ext>
+            </a:extLst>
+          </p:cNvPr>
+          <p:cNvPicPr>
+            <a:picLocks noChangeAspect="1"/>
+          </p:cNvPicPr>
+          <p:nvPr/>
+        </p:nvPicPr>
+        <p:blipFill>
+          <a:blip r:embed="rId2"/>
+          <a:stretch>
+            <a:fillRect/>
+          </a:stretch>
+        </p:blipFill>
+        <p:spPr>
+          <a:xfrm>
+            <a:off x="4784264" y="3956101"/>
+            <a:ext cx="287983" cy="287983"/>
+          </a:xfrm>
+          <a:prstGeom prst="rect">
+            <a:avLst/>
+          </a:prstGeom>
+        </p:spPr>
+      </p:pic>
+      <p:pic>
+        <p:nvPicPr>
+          <p:cNvPr id="86" name="図 85" descr="カラーコーン・ロードコーンのイラスト">
+            <a:extLst>
+              <a:ext uri="{FF2B5EF4-FFF2-40B4-BE49-F238E27FC236}">
+                <a16:creationId xmlns:a16="http://schemas.microsoft.com/office/drawing/2014/main" id="{30D52B45-68C6-2FCC-68B3-A74D5CFEE165}"/>
+              </a:ext>
+            </a:extLst>
+          </p:cNvPr>
+          <p:cNvPicPr>
+            <a:picLocks noChangeAspect="1"/>
+          </p:cNvPicPr>
+          <p:nvPr/>
+        </p:nvPicPr>
+        <p:blipFill>
+          <a:blip r:embed="rId2"/>
+          <a:stretch>
+            <a:fillRect/>
+          </a:stretch>
+        </p:blipFill>
+        <p:spPr>
+          <a:xfrm>
+            <a:off x="2624546" y="3984968"/>
+            <a:ext cx="287983" cy="287983"/>
+          </a:xfrm>
+          <a:prstGeom prst="rect">
+            <a:avLst/>
+          </a:prstGeom>
+        </p:spPr>
+      </p:pic>
+      <p:pic>
+        <p:nvPicPr>
+          <p:cNvPr id="87" name="図 86" descr="カラーコーン・ロードコーンのイラスト">
+            <a:extLst>
+              <a:ext uri="{FF2B5EF4-FFF2-40B4-BE49-F238E27FC236}">
+                <a16:creationId xmlns:a16="http://schemas.microsoft.com/office/drawing/2014/main" id="{043536ED-2792-80B0-15BD-C03546799ECB}"/>
+              </a:ext>
+            </a:extLst>
+          </p:cNvPr>
+          <p:cNvPicPr>
+            <a:picLocks noChangeAspect="1"/>
+          </p:cNvPicPr>
+          <p:nvPr/>
+        </p:nvPicPr>
+        <p:blipFill>
+          <a:blip r:embed="rId2"/>
+          <a:stretch>
+            <a:fillRect/>
+          </a:stretch>
+        </p:blipFill>
+        <p:spPr>
+          <a:xfrm>
+            <a:off x="4064162" y="3261656"/>
+            <a:ext cx="287983" cy="287983"/>
+          </a:xfrm>
+          <a:prstGeom prst="rect">
+            <a:avLst/>
+          </a:prstGeom>
+        </p:spPr>
+      </p:pic>
+      <p:pic>
+        <p:nvPicPr>
+          <p:cNvPr id="88" name="図 87" descr="カラーコーン・ロードコーンのイラスト">
+            <a:extLst>
+              <a:ext uri="{FF2B5EF4-FFF2-40B4-BE49-F238E27FC236}">
+                <a16:creationId xmlns:a16="http://schemas.microsoft.com/office/drawing/2014/main" id="{A4F791D0-FB30-2A7E-1DA2-CB3459FA4841}"/>
+              </a:ext>
+            </a:extLst>
+          </p:cNvPr>
+          <p:cNvPicPr>
+            <a:picLocks noChangeAspect="1"/>
+          </p:cNvPicPr>
+          <p:nvPr/>
+        </p:nvPicPr>
+        <p:blipFill>
+          <a:blip r:embed="rId2"/>
+          <a:stretch>
+            <a:fillRect/>
+          </a:stretch>
+        </p:blipFill>
+        <p:spPr>
+          <a:xfrm>
+            <a:off x="4067961" y="4716213"/>
+            <a:ext cx="287983" cy="287983"/>
+          </a:xfrm>
+          <a:prstGeom prst="rect">
+            <a:avLst/>
+          </a:prstGeom>
+        </p:spPr>
+      </p:pic>
+      <p:pic>
+        <p:nvPicPr>
+          <p:cNvPr id="89" name="図 88" descr="カラーコーン・ロードコーンのイラスト">
+            <a:extLst>
+              <a:ext uri="{FF2B5EF4-FFF2-40B4-BE49-F238E27FC236}">
+                <a16:creationId xmlns:a16="http://schemas.microsoft.com/office/drawing/2014/main" id="{B6C50B44-942D-A14E-40D2-1BBC515E3D4E}"/>
+              </a:ext>
+            </a:extLst>
+          </p:cNvPr>
+          <p:cNvPicPr>
+            <a:picLocks noChangeAspect="1"/>
+          </p:cNvPicPr>
+          <p:nvPr/>
+        </p:nvPicPr>
+        <p:blipFill>
+          <a:blip r:embed="rId2"/>
+          <a:stretch>
+            <a:fillRect/>
+          </a:stretch>
+        </p:blipFill>
+        <p:spPr>
+          <a:xfrm>
+            <a:off x="2987035" y="5081938"/>
+            <a:ext cx="287983" cy="287983"/>
+          </a:xfrm>
+          <a:prstGeom prst="rect">
+            <a:avLst/>
+          </a:prstGeom>
+        </p:spPr>
+      </p:pic>
+      <p:pic>
+        <p:nvPicPr>
+          <p:cNvPr id="90" name="図 89" descr="カラーコーン・ロードコーンのイラスト">
+            <a:extLst>
+              <a:ext uri="{FF2B5EF4-FFF2-40B4-BE49-F238E27FC236}">
+                <a16:creationId xmlns:a16="http://schemas.microsoft.com/office/drawing/2014/main" id="{F15120C7-6702-4815-73EA-20566F4A3986}"/>
+              </a:ext>
+            </a:extLst>
+          </p:cNvPr>
+          <p:cNvPicPr>
+            <a:picLocks noChangeAspect="1"/>
+          </p:cNvPicPr>
+          <p:nvPr/>
+        </p:nvPicPr>
+        <p:blipFill>
+          <a:blip r:embed="rId2"/>
+          <a:stretch>
+            <a:fillRect/>
+          </a:stretch>
+        </p:blipFill>
+        <p:spPr>
+          <a:xfrm>
+            <a:off x="5148132" y="2901899"/>
+            <a:ext cx="287983" cy="287983"/>
+          </a:xfrm>
+          <a:prstGeom prst="rect">
+            <a:avLst/>
+          </a:prstGeom>
+        </p:spPr>
+      </p:pic>
+      <p:pic>
+        <p:nvPicPr>
+          <p:cNvPr id="91" name="図 90" descr="カラーコーン・ロードコーンのイラスト">
+            <a:extLst>
+              <a:ext uri="{FF2B5EF4-FFF2-40B4-BE49-F238E27FC236}">
+                <a16:creationId xmlns:a16="http://schemas.microsoft.com/office/drawing/2014/main" id="{30BD84CE-4869-39A5-0665-C8891D511E96}"/>
+              </a:ext>
+            </a:extLst>
+          </p:cNvPr>
+          <p:cNvPicPr>
+            <a:picLocks noChangeAspect="1"/>
+          </p:cNvPicPr>
+          <p:nvPr/>
+        </p:nvPicPr>
+        <p:blipFill>
+          <a:blip r:embed="rId2"/>
+          <a:stretch>
+            <a:fillRect/>
+          </a:stretch>
+        </p:blipFill>
+        <p:spPr>
+          <a:xfrm>
+            <a:off x="5165968" y="1448802"/>
+            <a:ext cx="287983" cy="287983"/>
+          </a:xfrm>
+          <a:prstGeom prst="rect">
+            <a:avLst/>
+          </a:prstGeom>
+        </p:spPr>
+      </p:pic>
+      <p:pic>
+        <p:nvPicPr>
+          <p:cNvPr id="92" name="図 91" descr="カラーコーン・ロードコーンのイラスト">
+            <a:extLst>
+              <a:ext uri="{FF2B5EF4-FFF2-40B4-BE49-F238E27FC236}">
+                <a16:creationId xmlns:a16="http://schemas.microsoft.com/office/drawing/2014/main" id="{266E6AF0-EECD-CC68-7AE5-F3D2E1128A7F}"/>
+              </a:ext>
+            </a:extLst>
+          </p:cNvPr>
+          <p:cNvPicPr>
+            <a:picLocks noChangeAspect="1"/>
+          </p:cNvPicPr>
+          <p:nvPr/>
+        </p:nvPicPr>
+        <p:blipFill>
+          <a:blip r:embed="rId2"/>
+          <a:stretch>
+            <a:fillRect/>
+          </a:stretch>
+        </p:blipFill>
+        <p:spPr>
+          <a:xfrm>
+            <a:off x="4418028" y="2168892"/>
+            <a:ext cx="287983" cy="287983"/>
+          </a:xfrm>
+          <a:prstGeom prst="rect">
+            <a:avLst/>
+          </a:prstGeom>
+        </p:spPr>
+      </p:pic>
+      <p:pic>
+        <p:nvPicPr>
+          <p:cNvPr id="93" name="図 92" descr="カラーコーン・ロードコーンのイラスト">
+            <a:extLst>
+              <a:ext uri="{FF2B5EF4-FFF2-40B4-BE49-F238E27FC236}">
+                <a16:creationId xmlns:a16="http://schemas.microsoft.com/office/drawing/2014/main" id="{BA6CA832-D81E-4386-0379-A55B6F3283DA}"/>
+              </a:ext>
+            </a:extLst>
+          </p:cNvPr>
+          <p:cNvPicPr>
+            <a:picLocks noChangeAspect="1"/>
+          </p:cNvPicPr>
+          <p:nvPr/>
+        </p:nvPicPr>
+        <p:blipFill>
+          <a:blip r:embed="rId2"/>
+          <a:stretch>
+            <a:fillRect/>
+          </a:stretch>
+        </p:blipFill>
+        <p:spPr>
+          <a:xfrm>
+            <a:off x="5860613" y="2208195"/>
+            <a:ext cx="287983" cy="287983"/>
+          </a:xfrm>
+          <a:prstGeom prst="rect">
+            <a:avLst/>
+          </a:prstGeom>
+        </p:spPr>
+      </p:pic>
+      <p:pic>
+        <p:nvPicPr>
+          <p:cNvPr id="94" name="図 93" descr="カラーコーン・ロードコーンのイラスト">
+            <a:extLst>
+              <a:ext uri="{FF2B5EF4-FFF2-40B4-BE49-F238E27FC236}">
+                <a16:creationId xmlns:a16="http://schemas.microsoft.com/office/drawing/2014/main" id="{ADC16C50-2FE8-A05A-60A0-625008291518}"/>
+              </a:ext>
+            </a:extLst>
+          </p:cNvPr>
+          <p:cNvPicPr>
+            <a:picLocks noChangeAspect="1"/>
+          </p:cNvPicPr>
+          <p:nvPr/>
+        </p:nvPicPr>
+        <p:blipFill>
+          <a:blip r:embed="rId2"/>
+          <a:stretch>
+            <a:fillRect/>
+          </a:stretch>
+        </p:blipFill>
+        <p:spPr>
+          <a:xfrm>
+            <a:off x="5860613" y="3621989"/>
+            <a:ext cx="287983" cy="287983"/>
+          </a:xfrm>
+          <a:prstGeom prst="rect">
+            <a:avLst/>
+          </a:prstGeom>
+        </p:spPr>
+      </p:pic>
+      <p:pic>
+        <p:nvPicPr>
+          <p:cNvPr id="95" name="図 94" descr="カラーコーン・ロードコーンのイラスト">
+            <a:extLst>
+              <a:ext uri="{FF2B5EF4-FFF2-40B4-BE49-F238E27FC236}">
+                <a16:creationId xmlns:a16="http://schemas.microsoft.com/office/drawing/2014/main" id="{F513D4E4-4633-367B-A39B-B2FEF9036261}"/>
+              </a:ext>
+            </a:extLst>
+          </p:cNvPr>
+          <p:cNvPicPr>
+            <a:picLocks noChangeAspect="1"/>
+          </p:cNvPicPr>
+          <p:nvPr/>
+        </p:nvPicPr>
+        <p:blipFill>
+          <a:blip r:embed="rId2"/>
+          <a:stretch>
+            <a:fillRect/>
+          </a:stretch>
+        </p:blipFill>
+        <p:spPr>
+          <a:xfrm>
+            <a:off x="5126446" y="4372046"/>
+            <a:ext cx="287983" cy="287983"/>
+          </a:xfrm>
+          <a:prstGeom prst="rect">
+            <a:avLst/>
+          </a:prstGeom>
+        </p:spPr>
+      </p:pic>
+      <p:pic>
+        <p:nvPicPr>
+          <p:cNvPr id="96" name="図 95" descr="カラーコーン・ロードコーンのイラスト">
+            <a:extLst>
+              <a:ext uri="{FF2B5EF4-FFF2-40B4-BE49-F238E27FC236}">
+                <a16:creationId xmlns:a16="http://schemas.microsoft.com/office/drawing/2014/main" id="{74211E33-419D-23D6-051F-5BC97B8BC8A8}"/>
+              </a:ext>
+            </a:extLst>
+          </p:cNvPr>
+          <p:cNvPicPr>
+            <a:picLocks noChangeAspect="1"/>
+          </p:cNvPicPr>
+          <p:nvPr/>
+        </p:nvPicPr>
+        <p:blipFill>
+          <a:blip r:embed="rId2"/>
+          <a:stretch>
+            <a:fillRect/>
+          </a:stretch>
+        </p:blipFill>
+        <p:spPr>
+          <a:xfrm>
+            <a:off x="5875770" y="5073595"/>
+            <a:ext cx="287983" cy="287983"/>
+          </a:xfrm>
+          <a:prstGeom prst="rect">
+            <a:avLst/>
+          </a:prstGeom>
+        </p:spPr>
+      </p:pic>
+      <p:pic>
+        <p:nvPicPr>
+          <p:cNvPr id="97" name="図 96">
+            <a:extLst>
+              <a:ext uri="{FF2B5EF4-FFF2-40B4-BE49-F238E27FC236}">
+                <a16:creationId xmlns:a16="http://schemas.microsoft.com/office/drawing/2014/main" id="{FD58163D-6BE5-E8DC-D052-DDC2C1981D19}"/>
               </a:ext>
             </a:extLst>
           </p:cNvPr>
@@ -4150,9 +4571,9 @@
           </a:stretch>
         </p:blipFill>
         <p:spPr>
-          <a:xfrm>
-            <a:off x="3723760" y="1475701"/>
-            <a:ext cx="287983" cy="287983"/>
+          <a:xfrm flipH="1">
+            <a:off x="1423258" y="3197998"/>
+            <a:ext cx="818863" cy="549548"/>
           </a:xfrm>
           <a:prstGeom prst="rect">
             <a:avLst/>
@@ -4161,430 +4582,10 @@
       </p:pic>
       <p:pic>
         <p:nvPicPr>
-          <p:cNvPr id="83" name="図 82" descr="カラーコーン・ロードコーンのイラスト">
-            <a:extLst>
-              <a:ext uri="{FF2B5EF4-FFF2-40B4-BE49-F238E27FC236}">
-                <a16:creationId xmlns:a16="http://schemas.microsoft.com/office/drawing/2014/main" id="{BC9C7963-915D-5A86-EE26-6E931C567618}"/>
-              </a:ext>
-            </a:extLst>
-          </p:cNvPr>
-          <p:cNvPicPr>
-            <a:picLocks noChangeAspect="1"/>
-          </p:cNvPicPr>
-          <p:nvPr/>
-        </p:nvPicPr>
-        <p:blipFill>
-          <a:blip r:embed="rId3"/>
-          <a:stretch>
-            <a:fillRect/>
-          </a:stretch>
-        </p:blipFill>
-        <p:spPr>
-          <a:xfrm>
-            <a:off x="3331319" y="2549836"/>
-            <a:ext cx="287983" cy="287983"/>
-          </a:xfrm>
-          <a:prstGeom prst="rect">
-            <a:avLst/>
-          </a:prstGeom>
-        </p:spPr>
-      </p:pic>
-      <p:pic>
-        <p:nvPicPr>
-          <p:cNvPr id="84" name="図 83" descr="カラーコーン・ロードコーンのイラスト">
-            <a:extLst>
-              <a:ext uri="{FF2B5EF4-FFF2-40B4-BE49-F238E27FC236}">
-                <a16:creationId xmlns:a16="http://schemas.microsoft.com/office/drawing/2014/main" id="{C6C59764-9B3B-13B0-CAB2-5D94452A48BC}"/>
-              </a:ext>
-            </a:extLst>
-          </p:cNvPr>
-          <p:cNvPicPr>
-            <a:picLocks noChangeAspect="1"/>
-          </p:cNvPicPr>
-          <p:nvPr/>
-        </p:nvPicPr>
-        <p:blipFill>
-          <a:blip r:embed="rId3"/>
-          <a:stretch>
-            <a:fillRect/>
-          </a:stretch>
-        </p:blipFill>
-        <p:spPr>
-          <a:xfrm>
-            <a:off x="3331319" y="3265152"/>
-            <a:ext cx="287983" cy="287983"/>
-          </a:xfrm>
-          <a:prstGeom prst="rect">
-            <a:avLst/>
-          </a:prstGeom>
-        </p:spPr>
-      </p:pic>
-      <p:pic>
-        <p:nvPicPr>
-          <p:cNvPr id="85" name="図 84" descr="カラーコーン・ロードコーンのイラスト">
-            <a:extLst>
-              <a:ext uri="{FF2B5EF4-FFF2-40B4-BE49-F238E27FC236}">
-                <a16:creationId xmlns:a16="http://schemas.microsoft.com/office/drawing/2014/main" id="{A950ADC4-EB35-4F0C-20E4-D672070AC8D6}"/>
-              </a:ext>
-            </a:extLst>
-          </p:cNvPr>
-          <p:cNvPicPr>
-            <a:picLocks noChangeAspect="1"/>
-          </p:cNvPicPr>
-          <p:nvPr/>
-        </p:nvPicPr>
-        <p:blipFill>
-          <a:blip r:embed="rId3"/>
-          <a:stretch>
-            <a:fillRect/>
-          </a:stretch>
-        </p:blipFill>
-        <p:spPr>
-          <a:xfrm>
-            <a:off x="4784264" y="3956101"/>
-            <a:ext cx="287983" cy="287983"/>
-          </a:xfrm>
-          <a:prstGeom prst="rect">
-            <a:avLst/>
-          </a:prstGeom>
-        </p:spPr>
-      </p:pic>
-      <p:pic>
-        <p:nvPicPr>
-          <p:cNvPr id="86" name="図 85" descr="カラーコーン・ロードコーンのイラスト">
-            <a:extLst>
-              <a:ext uri="{FF2B5EF4-FFF2-40B4-BE49-F238E27FC236}">
-                <a16:creationId xmlns:a16="http://schemas.microsoft.com/office/drawing/2014/main" id="{30D52B45-68C6-2FCC-68B3-A74D5CFEE165}"/>
-              </a:ext>
-            </a:extLst>
-          </p:cNvPr>
-          <p:cNvPicPr>
-            <a:picLocks noChangeAspect="1"/>
-          </p:cNvPicPr>
-          <p:nvPr/>
-        </p:nvPicPr>
-        <p:blipFill>
-          <a:blip r:embed="rId3"/>
-          <a:stretch>
-            <a:fillRect/>
-          </a:stretch>
-        </p:blipFill>
-        <p:spPr>
-          <a:xfrm>
-            <a:off x="2624546" y="3984968"/>
-            <a:ext cx="287983" cy="287983"/>
-          </a:xfrm>
-          <a:prstGeom prst="rect">
-            <a:avLst/>
-          </a:prstGeom>
-        </p:spPr>
-      </p:pic>
-      <p:pic>
-        <p:nvPicPr>
-          <p:cNvPr id="87" name="図 86" descr="カラーコーン・ロードコーンのイラスト">
-            <a:extLst>
-              <a:ext uri="{FF2B5EF4-FFF2-40B4-BE49-F238E27FC236}">
-                <a16:creationId xmlns:a16="http://schemas.microsoft.com/office/drawing/2014/main" id="{043536ED-2792-80B0-15BD-C03546799ECB}"/>
-              </a:ext>
-            </a:extLst>
-          </p:cNvPr>
-          <p:cNvPicPr>
-            <a:picLocks noChangeAspect="1"/>
-          </p:cNvPicPr>
-          <p:nvPr/>
-        </p:nvPicPr>
-        <p:blipFill>
-          <a:blip r:embed="rId3"/>
-          <a:stretch>
-            <a:fillRect/>
-          </a:stretch>
-        </p:blipFill>
-        <p:spPr>
-          <a:xfrm>
-            <a:off x="4064162" y="3261656"/>
-            <a:ext cx="287983" cy="287983"/>
-          </a:xfrm>
-          <a:prstGeom prst="rect">
-            <a:avLst/>
-          </a:prstGeom>
-        </p:spPr>
-      </p:pic>
-      <p:pic>
-        <p:nvPicPr>
-          <p:cNvPr id="88" name="図 87" descr="カラーコーン・ロードコーンのイラスト">
-            <a:extLst>
-              <a:ext uri="{FF2B5EF4-FFF2-40B4-BE49-F238E27FC236}">
-                <a16:creationId xmlns:a16="http://schemas.microsoft.com/office/drawing/2014/main" id="{A4F791D0-FB30-2A7E-1DA2-CB3459FA4841}"/>
-              </a:ext>
-            </a:extLst>
-          </p:cNvPr>
-          <p:cNvPicPr>
-            <a:picLocks noChangeAspect="1"/>
-          </p:cNvPicPr>
-          <p:nvPr/>
-        </p:nvPicPr>
-        <p:blipFill>
-          <a:blip r:embed="rId3"/>
-          <a:stretch>
-            <a:fillRect/>
-          </a:stretch>
-        </p:blipFill>
-        <p:spPr>
-          <a:xfrm>
-            <a:off x="4067961" y="4716213"/>
-            <a:ext cx="287983" cy="287983"/>
-          </a:xfrm>
-          <a:prstGeom prst="rect">
-            <a:avLst/>
-          </a:prstGeom>
-        </p:spPr>
-      </p:pic>
-      <p:pic>
-        <p:nvPicPr>
-          <p:cNvPr id="89" name="図 88" descr="カラーコーン・ロードコーンのイラスト">
-            <a:extLst>
-              <a:ext uri="{FF2B5EF4-FFF2-40B4-BE49-F238E27FC236}">
-                <a16:creationId xmlns:a16="http://schemas.microsoft.com/office/drawing/2014/main" id="{B6C50B44-942D-A14E-40D2-1BBC515E3D4E}"/>
-              </a:ext>
-            </a:extLst>
-          </p:cNvPr>
-          <p:cNvPicPr>
-            <a:picLocks noChangeAspect="1"/>
-          </p:cNvPicPr>
-          <p:nvPr/>
-        </p:nvPicPr>
-        <p:blipFill>
-          <a:blip r:embed="rId3"/>
-          <a:stretch>
-            <a:fillRect/>
-          </a:stretch>
-        </p:blipFill>
-        <p:spPr>
-          <a:xfrm>
-            <a:off x="2987035" y="5081938"/>
-            <a:ext cx="287983" cy="287983"/>
-          </a:xfrm>
-          <a:prstGeom prst="rect">
-            <a:avLst/>
-          </a:prstGeom>
-        </p:spPr>
-      </p:pic>
-      <p:pic>
-        <p:nvPicPr>
-          <p:cNvPr id="90" name="図 89" descr="カラーコーン・ロードコーンのイラスト">
-            <a:extLst>
-              <a:ext uri="{FF2B5EF4-FFF2-40B4-BE49-F238E27FC236}">
-                <a16:creationId xmlns:a16="http://schemas.microsoft.com/office/drawing/2014/main" id="{F15120C7-6702-4815-73EA-20566F4A3986}"/>
-              </a:ext>
-            </a:extLst>
-          </p:cNvPr>
-          <p:cNvPicPr>
-            <a:picLocks noChangeAspect="1"/>
-          </p:cNvPicPr>
-          <p:nvPr/>
-        </p:nvPicPr>
-        <p:blipFill>
-          <a:blip r:embed="rId3"/>
-          <a:stretch>
-            <a:fillRect/>
-          </a:stretch>
-        </p:blipFill>
-        <p:spPr>
-          <a:xfrm>
-            <a:off x="5148132" y="2901899"/>
-            <a:ext cx="287983" cy="287983"/>
-          </a:xfrm>
-          <a:prstGeom prst="rect">
-            <a:avLst/>
-          </a:prstGeom>
-        </p:spPr>
-      </p:pic>
-      <p:pic>
-        <p:nvPicPr>
-          <p:cNvPr id="91" name="図 90" descr="カラーコーン・ロードコーンのイラスト">
-            <a:extLst>
-              <a:ext uri="{FF2B5EF4-FFF2-40B4-BE49-F238E27FC236}">
-                <a16:creationId xmlns:a16="http://schemas.microsoft.com/office/drawing/2014/main" id="{30BD84CE-4869-39A5-0665-C8891D511E96}"/>
-              </a:ext>
-            </a:extLst>
-          </p:cNvPr>
-          <p:cNvPicPr>
-            <a:picLocks noChangeAspect="1"/>
-          </p:cNvPicPr>
-          <p:nvPr/>
-        </p:nvPicPr>
-        <p:blipFill>
-          <a:blip r:embed="rId3"/>
-          <a:stretch>
-            <a:fillRect/>
-          </a:stretch>
-        </p:blipFill>
-        <p:spPr>
-          <a:xfrm>
-            <a:off x="5165968" y="1448802"/>
-            <a:ext cx="287983" cy="287983"/>
-          </a:xfrm>
-          <a:prstGeom prst="rect">
-            <a:avLst/>
-          </a:prstGeom>
-        </p:spPr>
-      </p:pic>
-      <p:pic>
-        <p:nvPicPr>
-          <p:cNvPr id="92" name="図 91" descr="カラーコーン・ロードコーンのイラスト">
-            <a:extLst>
-              <a:ext uri="{FF2B5EF4-FFF2-40B4-BE49-F238E27FC236}">
-                <a16:creationId xmlns:a16="http://schemas.microsoft.com/office/drawing/2014/main" id="{266E6AF0-EECD-CC68-7AE5-F3D2E1128A7F}"/>
-              </a:ext>
-            </a:extLst>
-          </p:cNvPr>
-          <p:cNvPicPr>
-            <a:picLocks noChangeAspect="1"/>
-          </p:cNvPicPr>
-          <p:nvPr/>
-        </p:nvPicPr>
-        <p:blipFill>
-          <a:blip r:embed="rId3"/>
-          <a:stretch>
-            <a:fillRect/>
-          </a:stretch>
-        </p:blipFill>
-        <p:spPr>
-          <a:xfrm>
-            <a:off x="4418028" y="2168892"/>
-            <a:ext cx="287983" cy="287983"/>
-          </a:xfrm>
-          <a:prstGeom prst="rect">
-            <a:avLst/>
-          </a:prstGeom>
-        </p:spPr>
-      </p:pic>
-      <p:pic>
-        <p:nvPicPr>
-          <p:cNvPr id="93" name="図 92" descr="カラーコーン・ロードコーンのイラスト">
-            <a:extLst>
-              <a:ext uri="{FF2B5EF4-FFF2-40B4-BE49-F238E27FC236}">
-                <a16:creationId xmlns:a16="http://schemas.microsoft.com/office/drawing/2014/main" id="{BA6CA832-D81E-4386-0379-A55B6F3283DA}"/>
-              </a:ext>
-            </a:extLst>
-          </p:cNvPr>
-          <p:cNvPicPr>
-            <a:picLocks noChangeAspect="1"/>
-          </p:cNvPicPr>
-          <p:nvPr/>
-        </p:nvPicPr>
-        <p:blipFill>
-          <a:blip r:embed="rId3"/>
-          <a:stretch>
-            <a:fillRect/>
-          </a:stretch>
-        </p:blipFill>
-        <p:spPr>
-          <a:xfrm>
-            <a:off x="5860613" y="2208195"/>
-            <a:ext cx="287983" cy="287983"/>
-          </a:xfrm>
-          <a:prstGeom prst="rect">
-            <a:avLst/>
-          </a:prstGeom>
-        </p:spPr>
-      </p:pic>
-      <p:pic>
-        <p:nvPicPr>
-          <p:cNvPr id="94" name="図 93" descr="カラーコーン・ロードコーンのイラスト">
-            <a:extLst>
-              <a:ext uri="{FF2B5EF4-FFF2-40B4-BE49-F238E27FC236}">
-                <a16:creationId xmlns:a16="http://schemas.microsoft.com/office/drawing/2014/main" id="{ADC16C50-2FE8-A05A-60A0-625008291518}"/>
-              </a:ext>
-            </a:extLst>
-          </p:cNvPr>
-          <p:cNvPicPr>
-            <a:picLocks noChangeAspect="1"/>
-          </p:cNvPicPr>
-          <p:nvPr/>
-        </p:nvPicPr>
-        <p:blipFill>
-          <a:blip r:embed="rId3"/>
-          <a:stretch>
-            <a:fillRect/>
-          </a:stretch>
-        </p:blipFill>
-        <p:spPr>
-          <a:xfrm>
-            <a:off x="5860613" y="3621989"/>
-            <a:ext cx="287983" cy="287983"/>
-          </a:xfrm>
-          <a:prstGeom prst="rect">
-            <a:avLst/>
-          </a:prstGeom>
-        </p:spPr>
-      </p:pic>
-      <p:pic>
-        <p:nvPicPr>
-          <p:cNvPr id="95" name="図 94" descr="カラーコーン・ロードコーンのイラスト">
-            <a:extLst>
-              <a:ext uri="{FF2B5EF4-FFF2-40B4-BE49-F238E27FC236}">
-                <a16:creationId xmlns:a16="http://schemas.microsoft.com/office/drawing/2014/main" id="{F513D4E4-4633-367B-A39B-B2FEF9036261}"/>
-              </a:ext>
-            </a:extLst>
-          </p:cNvPr>
-          <p:cNvPicPr>
-            <a:picLocks noChangeAspect="1"/>
-          </p:cNvPicPr>
-          <p:nvPr/>
-        </p:nvPicPr>
-        <p:blipFill>
-          <a:blip r:embed="rId3"/>
-          <a:stretch>
-            <a:fillRect/>
-          </a:stretch>
-        </p:blipFill>
-        <p:spPr>
-          <a:xfrm>
-            <a:off x="5126446" y="4372046"/>
-            <a:ext cx="287983" cy="287983"/>
-          </a:xfrm>
-          <a:prstGeom prst="rect">
-            <a:avLst/>
-          </a:prstGeom>
-        </p:spPr>
-      </p:pic>
-      <p:pic>
-        <p:nvPicPr>
-          <p:cNvPr id="96" name="図 95" descr="カラーコーン・ロードコーンのイラスト">
-            <a:extLst>
-              <a:ext uri="{FF2B5EF4-FFF2-40B4-BE49-F238E27FC236}">
-                <a16:creationId xmlns:a16="http://schemas.microsoft.com/office/drawing/2014/main" id="{74211E33-419D-23D6-051F-5BC97B8BC8A8}"/>
-              </a:ext>
-            </a:extLst>
-          </p:cNvPr>
-          <p:cNvPicPr>
-            <a:picLocks noChangeAspect="1"/>
-          </p:cNvPicPr>
-          <p:nvPr/>
-        </p:nvPicPr>
-        <p:blipFill>
-          <a:blip r:embed="rId3"/>
-          <a:stretch>
-            <a:fillRect/>
-          </a:stretch>
-        </p:blipFill>
-        <p:spPr>
-          <a:xfrm>
-            <a:off x="5875770" y="5073595"/>
-            <a:ext cx="287983" cy="287983"/>
-          </a:xfrm>
-          <a:prstGeom prst="rect">
-            <a:avLst/>
-          </a:prstGeom>
-        </p:spPr>
-      </p:pic>
-      <p:pic>
-        <p:nvPicPr>
-          <p:cNvPr id="97" name="図 96">
-            <a:extLst>
-              <a:ext uri="{FF2B5EF4-FFF2-40B4-BE49-F238E27FC236}">
-                <a16:creationId xmlns:a16="http://schemas.microsoft.com/office/drawing/2014/main" id="{FD58163D-6BE5-E8DC-D052-DDC2C1981D19}"/>
+          <p:cNvPr id="98" name="図 97">
+            <a:extLst>
+              <a:ext uri="{FF2B5EF4-FFF2-40B4-BE49-F238E27FC236}">
+                <a16:creationId xmlns:a16="http://schemas.microsoft.com/office/drawing/2014/main" id="{4BBA31CC-AC7D-D87E-5E04-E982E1F688EB}"/>
               </a:ext>
             </a:extLst>
           </p:cNvPr>
@@ -4600,36 +4601,6 @@
           </a:stretch>
         </p:blipFill>
         <p:spPr>
-          <a:xfrm flipH="1">
-            <a:off x="1423258" y="3197998"/>
-            <a:ext cx="818863" cy="549548"/>
-          </a:xfrm>
-          <a:prstGeom prst="rect">
-            <a:avLst/>
-          </a:prstGeom>
-        </p:spPr>
-      </p:pic>
-      <p:pic>
-        <p:nvPicPr>
-          <p:cNvPr id="98" name="図 97">
-            <a:extLst>
-              <a:ext uri="{FF2B5EF4-FFF2-40B4-BE49-F238E27FC236}">
-                <a16:creationId xmlns:a16="http://schemas.microsoft.com/office/drawing/2014/main" id="{4BBA31CC-AC7D-D87E-5E04-E982E1F688EB}"/>
-              </a:ext>
-            </a:extLst>
-          </p:cNvPr>
-          <p:cNvPicPr>
-            <a:picLocks noChangeAspect="1"/>
-          </p:cNvPicPr>
-          <p:nvPr/>
-        </p:nvPicPr>
-        <p:blipFill>
-          <a:blip r:embed="rId5"/>
-          <a:stretch>
-            <a:fillRect/>
-          </a:stretch>
-        </p:blipFill>
-        <p:spPr>
           <a:xfrm>
             <a:off x="6882899" y="3204624"/>
             <a:ext cx="864096" cy="630790"/>
@@ -4643,6 +4614,3649 @@
     <p:extLst>
       <p:ext uri="{BB962C8B-B14F-4D97-AF65-F5344CB8AC3E}">
         <p14:creationId xmlns:p14="http://schemas.microsoft.com/office/powerpoint/2010/main" val="3224864589"/>
+      </p:ext>
+    </p:extLst>
+  </p:cSld>
+  <p:clrMapOvr>
+    <a:masterClrMapping/>
+  </p:clrMapOvr>
+</p:sld>
+</file>
+
+<file path=ppt/slides/slide3.xml><?xml version="1.0" encoding="utf-8"?>
+<p:sld xmlns:a="http://schemas.openxmlformats.org/drawingml/2006/main" xmlns:r="http://schemas.openxmlformats.org/officeDocument/2006/relationships" xmlns:p="http://schemas.openxmlformats.org/presentationml/2006/main">
+  <p:cSld>
+    <p:spTree>
+      <p:nvGrpSpPr>
+        <p:cNvPr id="1" name=""/>
+        <p:cNvGrpSpPr/>
+        <p:nvPr/>
+      </p:nvGrpSpPr>
+      <p:grpSpPr>
+        <a:xfrm>
+          <a:off x="0" y="0"/>
+          <a:ext cx="0" cy="0"/>
+          <a:chOff x="0" y="0"/>
+          <a:chExt cx="0" cy="0"/>
+        </a:xfrm>
+      </p:grpSpPr>
+      <p:sp>
+        <p:nvSpPr>
+          <p:cNvPr id="2" name="正方形/長方形 1">
+            <a:extLst>
+              <a:ext uri="{FF2B5EF4-FFF2-40B4-BE49-F238E27FC236}">
+                <a16:creationId xmlns:a16="http://schemas.microsoft.com/office/drawing/2014/main" id="{2CB7EC86-D8B0-3BC1-257F-E9E19D184765}"/>
+              </a:ext>
+            </a:extLst>
+          </p:cNvPr>
+          <p:cNvSpPr/>
+          <p:nvPr/>
+        </p:nvSpPr>
+        <p:spPr>
+          <a:xfrm>
+            <a:off x="1573779" y="371098"/>
+            <a:ext cx="287981" cy="1647194"/>
+          </a:xfrm>
+          <a:prstGeom prst="rect">
+            <a:avLst/>
+          </a:prstGeom>
+          <a:solidFill>
+            <a:schemeClr val="bg2">
+              <a:lumMod val="90000"/>
+            </a:schemeClr>
+          </a:solidFill>
+          <a:ln>
+            <a:noFill/>
+          </a:ln>
+        </p:spPr>
+        <p:style>
+          <a:lnRef idx="2">
+            <a:schemeClr val="accent1">
+              <a:shade val="15000"/>
+            </a:schemeClr>
+          </a:lnRef>
+          <a:fillRef idx="1">
+            <a:schemeClr val="accent1"/>
+          </a:fillRef>
+          <a:effectRef idx="0">
+            <a:schemeClr val="accent1"/>
+          </a:effectRef>
+          <a:fontRef idx="minor">
+            <a:schemeClr val="lt1"/>
+          </a:fontRef>
+        </p:style>
+        <p:txBody>
+          <a:bodyPr rtlCol="0" anchor="ctr"/>
+          <a:lstStyle/>
+          <a:p>
+            <a:pPr algn="ctr"/>
+            <a:endParaRPr kumimoji="1" lang="ja-JP" altLang="en-US"/>
+          </a:p>
+        </p:txBody>
+      </p:sp>
+      <p:sp>
+        <p:nvSpPr>
+          <p:cNvPr id="3" name="正方形/長方形 2">
+            <a:extLst>
+              <a:ext uri="{FF2B5EF4-FFF2-40B4-BE49-F238E27FC236}">
+                <a16:creationId xmlns:a16="http://schemas.microsoft.com/office/drawing/2014/main" id="{410F34FB-B821-C43B-09F2-230804F30D3B}"/>
+              </a:ext>
+            </a:extLst>
+          </p:cNvPr>
+          <p:cNvSpPr/>
+          <p:nvPr/>
+        </p:nvSpPr>
+        <p:spPr>
+          <a:xfrm>
+            <a:off x="2293870" y="371098"/>
+            <a:ext cx="287981" cy="1647194"/>
+          </a:xfrm>
+          <a:prstGeom prst="rect">
+            <a:avLst/>
+          </a:prstGeom>
+          <a:solidFill>
+            <a:schemeClr val="bg2">
+              <a:lumMod val="90000"/>
+            </a:schemeClr>
+          </a:solidFill>
+          <a:ln>
+            <a:noFill/>
+          </a:ln>
+        </p:spPr>
+        <p:style>
+          <a:lnRef idx="2">
+            <a:schemeClr val="accent1">
+              <a:shade val="15000"/>
+            </a:schemeClr>
+          </a:lnRef>
+          <a:fillRef idx="1">
+            <a:schemeClr val="accent1"/>
+          </a:fillRef>
+          <a:effectRef idx="0">
+            <a:schemeClr val="accent1"/>
+          </a:effectRef>
+          <a:fontRef idx="minor">
+            <a:schemeClr val="lt1"/>
+          </a:fontRef>
+        </p:style>
+        <p:txBody>
+          <a:bodyPr rtlCol="0" anchor="ctr"/>
+          <a:lstStyle/>
+          <a:p>
+            <a:pPr algn="ctr"/>
+            <a:endParaRPr kumimoji="1" lang="ja-JP" altLang="en-US"/>
+          </a:p>
+        </p:txBody>
+      </p:sp>
+      <p:sp>
+        <p:nvSpPr>
+          <p:cNvPr id="4" name="正方形/長方形 3">
+            <a:extLst>
+              <a:ext uri="{FF2B5EF4-FFF2-40B4-BE49-F238E27FC236}">
+                <a16:creationId xmlns:a16="http://schemas.microsoft.com/office/drawing/2014/main" id="{CE4A3871-AD67-E1DB-AE28-7949C90D88F3}"/>
+              </a:ext>
+            </a:extLst>
+          </p:cNvPr>
+          <p:cNvSpPr/>
+          <p:nvPr/>
+        </p:nvSpPr>
+        <p:spPr>
+          <a:xfrm>
+            <a:off x="3013961" y="371098"/>
+            <a:ext cx="287981" cy="1647194"/>
+          </a:xfrm>
+          <a:prstGeom prst="rect">
+            <a:avLst/>
+          </a:prstGeom>
+          <a:solidFill>
+            <a:schemeClr val="bg2">
+              <a:lumMod val="90000"/>
+            </a:schemeClr>
+          </a:solidFill>
+          <a:ln>
+            <a:noFill/>
+          </a:ln>
+        </p:spPr>
+        <p:style>
+          <a:lnRef idx="2">
+            <a:schemeClr val="accent1">
+              <a:shade val="15000"/>
+            </a:schemeClr>
+          </a:lnRef>
+          <a:fillRef idx="1">
+            <a:schemeClr val="accent1"/>
+          </a:fillRef>
+          <a:effectRef idx="0">
+            <a:schemeClr val="accent1"/>
+          </a:effectRef>
+          <a:fontRef idx="minor">
+            <a:schemeClr val="lt1"/>
+          </a:fontRef>
+        </p:style>
+        <p:txBody>
+          <a:bodyPr rtlCol="0" anchor="ctr"/>
+          <a:lstStyle/>
+          <a:p>
+            <a:pPr algn="ctr"/>
+            <a:endParaRPr kumimoji="1" lang="ja-JP" altLang="en-US"/>
+          </a:p>
+        </p:txBody>
+      </p:sp>
+      <p:sp>
+        <p:nvSpPr>
+          <p:cNvPr id="5" name="正方形/長方形 4">
+            <a:extLst>
+              <a:ext uri="{FF2B5EF4-FFF2-40B4-BE49-F238E27FC236}">
+                <a16:creationId xmlns:a16="http://schemas.microsoft.com/office/drawing/2014/main" id="{3702FF71-1F71-18E4-0BAF-DCE67FB233EF}"/>
+              </a:ext>
+            </a:extLst>
+          </p:cNvPr>
+          <p:cNvSpPr/>
+          <p:nvPr/>
+        </p:nvSpPr>
+        <p:spPr>
+          <a:xfrm>
+            <a:off x="3734052" y="371098"/>
+            <a:ext cx="287981" cy="1647194"/>
+          </a:xfrm>
+          <a:prstGeom prst="rect">
+            <a:avLst/>
+          </a:prstGeom>
+          <a:solidFill>
+            <a:schemeClr val="bg2">
+              <a:lumMod val="90000"/>
+            </a:schemeClr>
+          </a:solidFill>
+          <a:ln>
+            <a:noFill/>
+          </a:ln>
+        </p:spPr>
+        <p:style>
+          <a:lnRef idx="2">
+            <a:schemeClr val="accent1">
+              <a:shade val="15000"/>
+            </a:schemeClr>
+          </a:lnRef>
+          <a:fillRef idx="1">
+            <a:schemeClr val="accent1"/>
+          </a:fillRef>
+          <a:effectRef idx="0">
+            <a:schemeClr val="accent1"/>
+          </a:effectRef>
+          <a:fontRef idx="minor">
+            <a:schemeClr val="lt1"/>
+          </a:fontRef>
+        </p:style>
+        <p:txBody>
+          <a:bodyPr rtlCol="0" anchor="ctr"/>
+          <a:lstStyle/>
+          <a:p>
+            <a:pPr algn="ctr"/>
+            <a:endParaRPr kumimoji="1" lang="ja-JP" altLang="en-US"/>
+          </a:p>
+        </p:txBody>
+      </p:sp>
+      <p:sp>
+        <p:nvSpPr>
+          <p:cNvPr id="8" name="正方形/長方形 7">
+            <a:extLst>
+              <a:ext uri="{FF2B5EF4-FFF2-40B4-BE49-F238E27FC236}">
+                <a16:creationId xmlns:a16="http://schemas.microsoft.com/office/drawing/2014/main" id="{26771DF3-3940-7194-C5A3-9B54D40A1032}"/>
+              </a:ext>
+            </a:extLst>
+          </p:cNvPr>
+          <p:cNvSpPr/>
+          <p:nvPr/>
+        </p:nvSpPr>
+        <p:spPr>
+          <a:xfrm rot="16200000">
+            <a:off x="2617969" y="-673093"/>
+            <a:ext cx="287981" cy="2808408"/>
+          </a:xfrm>
+          <a:prstGeom prst="rect">
+            <a:avLst/>
+          </a:prstGeom>
+          <a:solidFill>
+            <a:schemeClr val="bg2">
+              <a:lumMod val="90000"/>
+            </a:schemeClr>
+          </a:solidFill>
+          <a:ln>
+            <a:noFill/>
+          </a:ln>
+        </p:spPr>
+        <p:style>
+          <a:lnRef idx="2">
+            <a:schemeClr val="accent1">
+              <a:shade val="15000"/>
+            </a:schemeClr>
+          </a:lnRef>
+          <a:fillRef idx="1">
+            <a:schemeClr val="accent1"/>
+          </a:fillRef>
+          <a:effectRef idx="0">
+            <a:schemeClr val="accent1"/>
+          </a:effectRef>
+          <a:fontRef idx="minor">
+            <a:schemeClr val="lt1"/>
+          </a:fontRef>
+        </p:style>
+        <p:txBody>
+          <a:bodyPr rtlCol="0" anchor="ctr"/>
+          <a:lstStyle/>
+          <a:p>
+            <a:pPr algn="ctr"/>
+            <a:endParaRPr kumimoji="1" lang="ja-JP" altLang="en-US"/>
+          </a:p>
+        </p:txBody>
+      </p:sp>
+      <p:sp>
+        <p:nvSpPr>
+          <p:cNvPr id="9" name="正方形/長方形 8">
+            <a:extLst>
+              <a:ext uri="{FF2B5EF4-FFF2-40B4-BE49-F238E27FC236}">
+                <a16:creationId xmlns:a16="http://schemas.microsoft.com/office/drawing/2014/main" id="{8B8C4398-4053-977B-F687-397EDD53FD57}"/>
+              </a:ext>
+            </a:extLst>
+          </p:cNvPr>
+          <p:cNvSpPr/>
+          <p:nvPr/>
+        </p:nvSpPr>
+        <p:spPr>
+          <a:xfrm rot="16200000">
+            <a:off x="2618080" y="46884"/>
+            <a:ext cx="287751" cy="2808402"/>
+          </a:xfrm>
+          <a:prstGeom prst="rect">
+            <a:avLst/>
+          </a:prstGeom>
+          <a:solidFill>
+            <a:schemeClr val="bg2">
+              <a:lumMod val="90000"/>
+            </a:schemeClr>
+          </a:solidFill>
+          <a:ln>
+            <a:noFill/>
+          </a:ln>
+        </p:spPr>
+        <p:style>
+          <a:lnRef idx="2">
+            <a:schemeClr val="accent1">
+              <a:shade val="15000"/>
+            </a:schemeClr>
+          </a:lnRef>
+          <a:fillRef idx="1">
+            <a:schemeClr val="accent1"/>
+          </a:fillRef>
+          <a:effectRef idx="0">
+            <a:schemeClr val="accent1"/>
+          </a:effectRef>
+          <a:fontRef idx="minor">
+            <a:schemeClr val="lt1"/>
+          </a:fontRef>
+        </p:style>
+        <p:txBody>
+          <a:bodyPr rtlCol="0" anchor="ctr"/>
+          <a:lstStyle/>
+          <a:p>
+            <a:pPr algn="ctr"/>
+            <a:endParaRPr kumimoji="1" lang="ja-JP" altLang="en-US"/>
+          </a:p>
+        </p:txBody>
+      </p:sp>
+      <p:cxnSp>
+        <p:nvCxnSpPr>
+          <p:cNvPr id="14" name="直線コネクタ 13">
+            <a:extLst>
+              <a:ext uri="{FF2B5EF4-FFF2-40B4-BE49-F238E27FC236}">
+                <a16:creationId xmlns:a16="http://schemas.microsoft.com/office/drawing/2014/main" id="{6578C5F5-4ED9-0D79-517F-6724DCF1DBFD}"/>
+              </a:ext>
+            </a:extLst>
+          </p:cNvPr>
+          <p:cNvCxnSpPr>
+            <a:cxnSpLocks/>
+            <a:stCxn id="2" idx="0"/>
+            <a:endCxn id="2" idx="2"/>
+          </p:cNvCxnSpPr>
+          <p:nvPr/>
+        </p:nvCxnSpPr>
+        <p:spPr>
+          <a:xfrm>
+            <a:off x="1717770" y="371098"/>
+            <a:ext cx="0" cy="1647194"/>
+          </a:xfrm>
+          <a:prstGeom prst="line">
+            <a:avLst/>
+          </a:prstGeom>
+          <a:ln w="19050">
+            <a:solidFill>
+              <a:schemeClr val="bg1"/>
+            </a:solidFill>
+            <a:prstDash val="dash"/>
+          </a:ln>
+        </p:spPr>
+        <p:style>
+          <a:lnRef idx="2">
+            <a:schemeClr val="accent1"/>
+          </a:lnRef>
+          <a:fillRef idx="0">
+            <a:schemeClr val="accent1"/>
+          </a:fillRef>
+          <a:effectRef idx="1">
+            <a:schemeClr val="accent1"/>
+          </a:effectRef>
+          <a:fontRef idx="minor">
+            <a:schemeClr val="tx1"/>
+          </a:fontRef>
+        </p:style>
+      </p:cxnSp>
+      <p:cxnSp>
+        <p:nvCxnSpPr>
+          <p:cNvPr id="15" name="直線コネクタ 14">
+            <a:extLst>
+              <a:ext uri="{FF2B5EF4-FFF2-40B4-BE49-F238E27FC236}">
+                <a16:creationId xmlns:a16="http://schemas.microsoft.com/office/drawing/2014/main" id="{8CDB0417-B0F9-3E67-547F-129DC861D4AC}"/>
+              </a:ext>
+            </a:extLst>
+          </p:cNvPr>
+          <p:cNvCxnSpPr>
+            <a:cxnSpLocks/>
+            <a:endCxn id="3" idx="2"/>
+          </p:cNvCxnSpPr>
+          <p:nvPr/>
+        </p:nvCxnSpPr>
+        <p:spPr>
+          <a:xfrm flipH="1">
+            <a:off x="2437861" y="380099"/>
+            <a:ext cx="2444" cy="1638193"/>
+          </a:xfrm>
+          <a:prstGeom prst="line">
+            <a:avLst/>
+          </a:prstGeom>
+          <a:ln w="19050">
+            <a:solidFill>
+              <a:schemeClr val="bg1"/>
+            </a:solidFill>
+            <a:prstDash val="dash"/>
+          </a:ln>
+        </p:spPr>
+        <p:style>
+          <a:lnRef idx="2">
+            <a:schemeClr val="accent1"/>
+          </a:lnRef>
+          <a:fillRef idx="0">
+            <a:schemeClr val="accent1"/>
+          </a:fillRef>
+          <a:effectRef idx="1">
+            <a:schemeClr val="accent1"/>
+          </a:effectRef>
+          <a:fontRef idx="minor">
+            <a:schemeClr val="tx1"/>
+          </a:fontRef>
+        </p:style>
+      </p:cxnSp>
+      <p:cxnSp>
+        <p:nvCxnSpPr>
+          <p:cNvPr id="16" name="直線コネクタ 15">
+            <a:extLst>
+              <a:ext uri="{FF2B5EF4-FFF2-40B4-BE49-F238E27FC236}">
+                <a16:creationId xmlns:a16="http://schemas.microsoft.com/office/drawing/2014/main" id="{FB3D01B1-846F-5EBE-1151-02EE7A06AB72}"/>
+              </a:ext>
+            </a:extLst>
+          </p:cNvPr>
+          <p:cNvCxnSpPr>
+            <a:cxnSpLocks/>
+            <a:endCxn id="4" idx="2"/>
+          </p:cNvCxnSpPr>
+          <p:nvPr/>
+        </p:nvCxnSpPr>
+        <p:spPr>
+          <a:xfrm>
+            <a:off x="3154463" y="371097"/>
+            <a:ext cx="3489" cy="1647195"/>
+          </a:xfrm>
+          <a:prstGeom prst="line">
+            <a:avLst/>
+          </a:prstGeom>
+          <a:ln w="19050">
+            <a:solidFill>
+              <a:schemeClr val="bg1"/>
+            </a:solidFill>
+            <a:prstDash val="dash"/>
+          </a:ln>
+        </p:spPr>
+        <p:style>
+          <a:lnRef idx="2">
+            <a:schemeClr val="accent1"/>
+          </a:lnRef>
+          <a:fillRef idx="0">
+            <a:schemeClr val="accent1"/>
+          </a:fillRef>
+          <a:effectRef idx="1">
+            <a:schemeClr val="accent1"/>
+          </a:effectRef>
+          <a:fontRef idx="minor">
+            <a:schemeClr val="tx1"/>
+          </a:fontRef>
+        </p:style>
+      </p:cxnSp>
+      <p:cxnSp>
+        <p:nvCxnSpPr>
+          <p:cNvPr id="17" name="直線コネクタ 16">
+            <a:extLst>
+              <a:ext uri="{FF2B5EF4-FFF2-40B4-BE49-F238E27FC236}">
+                <a16:creationId xmlns:a16="http://schemas.microsoft.com/office/drawing/2014/main" id="{B2773CEB-D581-A085-BAEE-3546F8901FE2}"/>
+              </a:ext>
+            </a:extLst>
+          </p:cNvPr>
+          <p:cNvCxnSpPr>
+            <a:cxnSpLocks/>
+          </p:cNvCxnSpPr>
+          <p:nvPr/>
+        </p:nvCxnSpPr>
+        <p:spPr>
+          <a:xfrm flipH="1">
+            <a:off x="6045702" y="611138"/>
+            <a:ext cx="1" cy="4630854"/>
+          </a:xfrm>
+          <a:prstGeom prst="line">
+            <a:avLst/>
+          </a:prstGeom>
+          <a:ln w="19050">
+            <a:solidFill>
+              <a:schemeClr val="bg1"/>
+            </a:solidFill>
+            <a:prstDash val="dash"/>
+          </a:ln>
+        </p:spPr>
+        <p:style>
+          <a:lnRef idx="2">
+            <a:schemeClr val="accent1"/>
+          </a:lnRef>
+          <a:fillRef idx="0">
+            <a:schemeClr val="accent1"/>
+          </a:fillRef>
+          <a:effectRef idx="1">
+            <a:schemeClr val="accent1"/>
+          </a:effectRef>
+          <a:fontRef idx="minor">
+            <a:schemeClr val="tx1"/>
+          </a:fontRef>
+        </p:style>
+      </p:cxnSp>
+      <p:cxnSp>
+        <p:nvCxnSpPr>
+          <p:cNvPr id="20" name="直線コネクタ 19">
+            <a:extLst>
+              <a:ext uri="{FF2B5EF4-FFF2-40B4-BE49-F238E27FC236}">
+                <a16:creationId xmlns:a16="http://schemas.microsoft.com/office/drawing/2014/main" id="{BDA59849-C3A9-F72F-9C32-8D5B6D863E1B}"/>
+              </a:ext>
+            </a:extLst>
+          </p:cNvPr>
+          <p:cNvCxnSpPr>
+            <a:cxnSpLocks/>
+            <a:stCxn id="8" idx="0"/>
+          </p:cNvCxnSpPr>
+          <p:nvPr/>
+        </p:nvCxnSpPr>
+        <p:spPr>
+          <a:xfrm>
+            <a:off x="1357756" y="731111"/>
+            <a:ext cx="2808405" cy="0"/>
+          </a:xfrm>
+          <a:prstGeom prst="line">
+            <a:avLst/>
+          </a:prstGeom>
+          <a:ln w="19050">
+            <a:solidFill>
+              <a:schemeClr val="bg1"/>
+            </a:solidFill>
+            <a:prstDash val="dash"/>
+          </a:ln>
+        </p:spPr>
+        <p:style>
+          <a:lnRef idx="2">
+            <a:schemeClr val="accent1"/>
+          </a:lnRef>
+          <a:fillRef idx="0">
+            <a:schemeClr val="accent1"/>
+          </a:fillRef>
+          <a:effectRef idx="1">
+            <a:schemeClr val="accent1"/>
+          </a:effectRef>
+          <a:fontRef idx="minor">
+            <a:schemeClr val="tx1"/>
+          </a:fontRef>
+        </p:style>
+      </p:cxnSp>
+      <p:cxnSp>
+        <p:nvCxnSpPr>
+          <p:cNvPr id="21" name="直線コネクタ 20">
+            <a:extLst>
+              <a:ext uri="{FF2B5EF4-FFF2-40B4-BE49-F238E27FC236}">
+                <a16:creationId xmlns:a16="http://schemas.microsoft.com/office/drawing/2014/main" id="{2088A648-7FA6-B908-F355-507AE6BAE751}"/>
+              </a:ext>
+            </a:extLst>
+          </p:cNvPr>
+          <p:cNvCxnSpPr>
+            <a:cxnSpLocks/>
+            <a:endCxn id="9" idx="2"/>
+          </p:cNvCxnSpPr>
+          <p:nvPr/>
+        </p:nvCxnSpPr>
+        <p:spPr>
+          <a:xfrm flipV="1">
+            <a:off x="1357754" y="1451084"/>
+            <a:ext cx="2808403" cy="117"/>
+          </a:xfrm>
+          <a:prstGeom prst="line">
+            <a:avLst/>
+          </a:prstGeom>
+          <a:ln w="19050">
+            <a:solidFill>
+              <a:schemeClr val="bg1"/>
+            </a:solidFill>
+            <a:prstDash val="dash"/>
+          </a:ln>
+        </p:spPr>
+        <p:style>
+          <a:lnRef idx="2">
+            <a:schemeClr val="accent1"/>
+          </a:lnRef>
+          <a:fillRef idx="0">
+            <a:schemeClr val="accent1"/>
+          </a:fillRef>
+          <a:effectRef idx="1">
+            <a:schemeClr val="accent1"/>
+          </a:effectRef>
+          <a:fontRef idx="minor">
+            <a:schemeClr val="tx1"/>
+          </a:fontRef>
+        </p:style>
+      </p:cxnSp>
+      <p:sp>
+        <p:nvSpPr>
+          <p:cNvPr id="26" name="正方形/長方形 25">
+            <a:extLst>
+              <a:ext uri="{FF2B5EF4-FFF2-40B4-BE49-F238E27FC236}">
+                <a16:creationId xmlns:a16="http://schemas.microsoft.com/office/drawing/2014/main" id="{73DCD3DE-4A7E-FAF2-1625-C41824EB1029}"/>
+              </a:ext>
+            </a:extLst>
+          </p:cNvPr>
+          <p:cNvSpPr/>
+          <p:nvPr/>
+        </p:nvSpPr>
+        <p:spPr>
+          <a:xfrm>
+            <a:off x="1573779" y="587116"/>
+            <a:ext cx="280404" cy="287983"/>
+          </a:xfrm>
+          <a:prstGeom prst="rect">
+            <a:avLst/>
+          </a:prstGeom>
+          <a:solidFill>
+            <a:schemeClr val="bg2">
+              <a:lumMod val="90000"/>
+            </a:schemeClr>
+          </a:solidFill>
+          <a:ln>
+            <a:noFill/>
+          </a:ln>
+        </p:spPr>
+        <p:style>
+          <a:lnRef idx="2">
+            <a:schemeClr val="accent1">
+              <a:shade val="15000"/>
+            </a:schemeClr>
+          </a:lnRef>
+          <a:fillRef idx="1">
+            <a:schemeClr val="accent1"/>
+          </a:fillRef>
+          <a:effectRef idx="0">
+            <a:schemeClr val="accent1"/>
+          </a:effectRef>
+          <a:fontRef idx="minor">
+            <a:schemeClr val="lt1"/>
+          </a:fontRef>
+        </p:style>
+        <p:txBody>
+          <a:bodyPr rtlCol="0" anchor="ctr"/>
+          <a:lstStyle/>
+          <a:p>
+            <a:pPr algn="ctr"/>
+            <a:endParaRPr kumimoji="1" lang="ja-JP" altLang="en-US"/>
+          </a:p>
+        </p:txBody>
+      </p:sp>
+      <p:sp>
+        <p:nvSpPr>
+          <p:cNvPr id="27" name="正方形/長方形 26">
+            <a:extLst>
+              <a:ext uri="{FF2B5EF4-FFF2-40B4-BE49-F238E27FC236}">
+                <a16:creationId xmlns:a16="http://schemas.microsoft.com/office/drawing/2014/main" id="{9CCD3166-9236-B455-FA1E-2A712D40A8D4}"/>
+              </a:ext>
+            </a:extLst>
+          </p:cNvPr>
+          <p:cNvSpPr/>
+          <p:nvPr/>
+        </p:nvSpPr>
+        <p:spPr>
+          <a:xfrm>
+            <a:off x="2293867" y="587116"/>
+            <a:ext cx="280404" cy="287983"/>
+          </a:xfrm>
+          <a:prstGeom prst="rect">
+            <a:avLst/>
+          </a:prstGeom>
+          <a:solidFill>
+            <a:schemeClr val="bg2">
+              <a:lumMod val="90000"/>
+            </a:schemeClr>
+          </a:solidFill>
+          <a:ln>
+            <a:noFill/>
+          </a:ln>
+        </p:spPr>
+        <p:style>
+          <a:lnRef idx="2">
+            <a:schemeClr val="accent1">
+              <a:shade val="15000"/>
+            </a:schemeClr>
+          </a:lnRef>
+          <a:fillRef idx="1">
+            <a:schemeClr val="accent1"/>
+          </a:fillRef>
+          <a:effectRef idx="0">
+            <a:schemeClr val="accent1"/>
+          </a:effectRef>
+          <a:fontRef idx="minor">
+            <a:schemeClr val="lt1"/>
+          </a:fontRef>
+        </p:style>
+        <p:txBody>
+          <a:bodyPr rtlCol="0" anchor="ctr"/>
+          <a:lstStyle/>
+          <a:p>
+            <a:pPr algn="ctr"/>
+            <a:endParaRPr kumimoji="1" lang="ja-JP" altLang="en-US"/>
+          </a:p>
+        </p:txBody>
+      </p:sp>
+      <p:sp>
+        <p:nvSpPr>
+          <p:cNvPr id="28" name="正方形/長方形 27">
+            <a:extLst>
+              <a:ext uri="{FF2B5EF4-FFF2-40B4-BE49-F238E27FC236}">
+                <a16:creationId xmlns:a16="http://schemas.microsoft.com/office/drawing/2014/main" id="{22B302B7-D2A1-CF6D-3C4C-773938C6F06D}"/>
+              </a:ext>
+            </a:extLst>
+          </p:cNvPr>
+          <p:cNvSpPr/>
+          <p:nvPr/>
+        </p:nvSpPr>
+        <p:spPr>
+          <a:xfrm>
+            <a:off x="3017754" y="587116"/>
+            <a:ext cx="280404" cy="287983"/>
+          </a:xfrm>
+          <a:prstGeom prst="rect">
+            <a:avLst/>
+          </a:prstGeom>
+          <a:solidFill>
+            <a:schemeClr val="bg2">
+              <a:lumMod val="90000"/>
+            </a:schemeClr>
+          </a:solidFill>
+          <a:ln>
+            <a:noFill/>
+          </a:ln>
+        </p:spPr>
+        <p:style>
+          <a:lnRef idx="2">
+            <a:schemeClr val="accent1">
+              <a:shade val="15000"/>
+            </a:schemeClr>
+          </a:lnRef>
+          <a:fillRef idx="1">
+            <a:schemeClr val="accent1"/>
+          </a:fillRef>
+          <a:effectRef idx="0">
+            <a:schemeClr val="accent1"/>
+          </a:effectRef>
+          <a:fontRef idx="minor">
+            <a:schemeClr val="lt1"/>
+          </a:fontRef>
+        </p:style>
+        <p:txBody>
+          <a:bodyPr rtlCol="0" anchor="ctr"/>
+          <a:lstStyle/>
+          <a:p>
+            <a:pPr algn="ctr"/>
+            <a:endParaRPr kumimoji="1" lang="ja-JP" altLang="en-US"/>
+          </a:p>
+        </p:txBody>
+      </p:sp>
+      <p:sp>
+        <p:nvSpPr>
+          <p:cNvPr id="32" name="正方形/長方形 31">
+            <a:extLst>
+              <a:ext uri="{FF2B5EF4-FFF2-40B4-BE49-F238E27FC236}">
+                <a16:creationId xmlns:a16="http://schemas.microsoft.com/office/drawing/2014/main" id="{613CAD7B-1499-8A08-10F9-7AC27BE338FA}"/>
+              </a:ext>
+            </a:extLst>
+          </p:cNvPr>
+          <p:cNvSpPr/>
+          <p:nvPr/>
+        </p:nvSpPr>
+        <p:spPr>
+          <a:xfrm>
+            <a:off x="1573779" y="1298262"/>
+            <a:ext cx="280404" cy="287983"/>
+          </a:xfrm>
+          <a:prstGeom prst="rect">
+            <a:avLst/>
+          </a:prstGeom>
+          <a:solidFill>
+            <a:schemeClr val="bg2">
+              <a:lumMod val="90000"/>
+            </a:schemeClr>
+          </a:solidFill>
+          <a:ln>
+            <a:noFill/>
+          </a:ln>
+        </p:spPr>
+        <p:style>
+          <a:lnRef idx="2">
+            <a:schemeClr val="accent1">
+              <a:shade val="15000"/>
+            </a:schemeClr>
+          </a:lnRef>
+          <a:fillRef idx="1">
+            <a:schemeClr val="accent1"/>
+          </a:fillRef>
+          <a:effectRef idx="0">
+            <a:schemeClr val="accent1"/>
+          </a:effectRef>
+          <a:fontRef idx="minor">
+            <a:schemeClr val="lt1"/>
+          </a:fontRef>
+        </p:style>
+        <p:txBody>
+          <a:bodyPr rtlCol="0" anchor="ctr"/>
+          <a:lstStyle/>
+          <a:p>
+            <a:pPr algn="ctr"/>
+            <a:endParaRPr kumimoji="1" lang="ja-JP" altLang="en-US"/>
+          </a:p>
+        </p:txBody>
+      </p:sp>
+      <p:sp>
+        <p:nvSpPr>
+          <p:cNvPr id="33" name="正方形/長方形 32">
+            <a:extLst>
+              <a:ext uri="{FF2B5EF4-FFF2-40B4-BE49-F238E27FC236}">
+                <a16:creationId xmlns:a16="http://schemas.microsoft.com/office/drawing/2014/main" id="{006E6400-0648-ECAB-C27C-7826E520B9DB}"/>
+              </a:ext>
+            </a:extLst>
+          </p:cNvPr>
+          <p:cNvSpPr/>
+          <p:nvPr/>
+        </p:nvSpPr>
+        <p:spPr>
+          <a:xfrm>
+            <a:off x="2293867" y="1298262"/>
+            <a:ext cx="280404" cy="287983"/>
+          </a:xfrm>
+          <a:prstGeom prst="rect">
+            <a:avLst/>
+          </a:prstGeom>
+          <a:solidFill>
+            <a:schemeClr val="bg2">
+              <a:lumMod val="90000"/>
+            </a:schemeClr>
+          </a:solidFill>
+          <a:ln>
+            <a:noFill/>
+          </a:ln>
+        </p:spPr>
+        <p:style>
+          <a:lnRef idx="2">
+            <a:schemeClr val="accent1">
+              <a:shade val="15000"/>
+            </a:schemeClr>
+          </a:lnRef>
+          <a:fillRef idx="1">
+            <a:schemeClr val="accent1"/>
+          </a:fillRef>
+          <a:effectRef idx="0">
+            <a:schemeClr val="accent1"/>
+          </a:effectRef>
+          <a:fontRef idx="minor">
+            <a:schemeClr val="lt1"/>
+          </a:fontRef>
+        </p:style>
+        <p:txBody>
+          <a:bodyPr rtlCol="0" anchor="ctr"/>
+          <a:lstStyle/>
+          <a:p>
+            <a:pPr algn="ctr"/>
+            <a:endParaRPr kumimoji="1" lang="ja-JP" altLang="en-US"/>
+          </a:p>
+        </p:txBody>
+      </p:sp>
+      <p:sp>
+        <p:nvSpPr>
+          <p:cNvPr id="34" name="正方形/長方形 33">
+            <a:extLst>
+              <a:ext uri="{FF2B5EF4-FFF2-40B4-BE49-F238E27FC236}">
+                <a16:creationId xmlns:a16="http://schemas.microsoft.com/office/drawing/2014/main" id="{90284C56-4843-3C8D-C69C-9068CF87D8AE}"/>
+              </a:ext>
+            </a:extLst>
+          </p:cNvPr>
+          <p:cNvSpPr/>
+          <p:nvPr/>
+        </p:nvSpPr>
+        <p:spPr>
+          <a:xfrm>
+            <a:off x="3017754" y="1298262"/>
+            <a:ext cx="280404" cy="287983"/>
+          </a:xfrm>
+          <a:prstGeom prst="rect">
+            <a:avLst/>
+          </a:prstGeom>
+          <a:solidFill>
+            <a:schemeClr val="bg2">
+              <a:lumMod val="90000"/>
+            </a:schemeClr>
+          </a:solidFill>
+          <a:ln>
+            <a:noFill/>
+          </a:ln>
+        </p:spPr>
+        <p:style>
+          <a:lnRef idx="2">
+            <a:schemeClr val="accent1">
+              <a:shade val="15000"/>
+            </a:schemeClr>
+          </a:lnRef>
+          <a:fillRef idx="1">
+            <a:schemeClr val="accent1"/>
+          </a:fillRef>
+          <a:effectRef idx="0">
+            <a:schemeClr val="accent1"/>
+          </a:effectRef>
+          <a:fontRef idx="minor">
+            <a:schemeClr val="lt1"/>
+          </a:fontRef>
+        </p:style>
+        <p:txBody>
+          <a:bodyPr rtlCol="0" anchor="ctr"/>
+          <a:lstStyle/>
+          <a:p>
+            <a:pPr algn="ctr"/>
+            <a:endParaRPr kumimoji="1" lang="ja-JP" altLang="en-US"/>
+          </a:p>
+        </p:txBody>
+      </p:sp>
+      <p:pic>
+        <p:nvPicPr>
+          <p:cNvPr id="62" name="図 61" descr="カラーコーン・ロードコーンのイラスト">
+            <a:extLst>
+              <a:ext uri="{FF2B5EF4-FFF2-40B4-BE49-F238E27FC236}">
+                <a16:creationId xmlns:a16="http://schemas.microsoft.com/office/drawing/2014/main" id="{8B5BA92D-6E44-952A-6E9B-46C9011F5578}"/>
+              </a:ext>
+            </a:extLst>
+          </p:cNvPr>
+          <p:cNvPicPr>
+            <a:picLocks noChangeAspect="1"/>
+          </p:cNvPicPr>
+          <p:nvPr/>
+        </p:nvPicPr>
+        <p:blipFill>
+          <a:blip r:embed="rId2"/>
+          <a:stretch>
+            <a:fillRect/>
+          </a:stretch>
+        </p:blipFill>
+        <p:spPr>
+          <a:xfrm>
+            <a:off x="1563764" y="884184"/>
+            <a:ext cx="287983" cy="287983"/>
+          </a:xfrm>
+          <a:prstGeom prst="rect">
+            <a:avLst/>
+          </a:prstGeom>
+        </p:spPr>
+      </p:pic>
+      <p:pic>
+        <p:nvPicPr>
+          <p:cNvPr id="63" name="図 62" descr="カラーコーン・ロードコーンのイラスト">
+            <a:extLst>
+              <a:ext uri="{FF2B5EF4-FFF2-40B4-BE49-F238E27FC236}">
+                <a16:creationId xmlns:a16="http://schemas.microsoft.com/office/drawing/2014/main" id="{C3D79681-4FE3-088C-F663-C376072C5A8A}"/>
+              </a:ext>
+            </a:extLst>
+          </p:cNvPr>
+          <p:cNvPicPr>
+            <a:picLocks noChangeAspect="1"/>
+          </p:cNvPicPr>
+          <p:nvPr/>
+        </p:nvPicPr>
+        <p:blipFill>
+          <a:blip r:embed="rId2"/>
+          <a:stretch>
+            <a:fillRect/>
+          </a:stretch>
+        </p:blipFill>
+        <p:spPr>
+          <a:xfrm>
+            <a:off x="2669755" y="578038"/>
+            <a:ext cx="287983" cy="287983"/>
+          </a:xfrm>
+          <a:prstGeom prst="rect">
+            <a:avLst/>
+          </a:prstGeom>
+        </p:spPr>
+      </p:pic>
+      <p:pic>
+        <p:nvPicPr>
+          <p:cNvPr id="64" name="図 63" descr="カラーコーン・ロードコーンのイラスト">
+            <a:extLst>
+              <a:ext uri="{FF2B5EF4-FFF2-40B4-BE49-F238E27FC236}">
+                <a16:creationId xmlns:a16="http://schemas.microsoft.com/office/drawing/2014/main" id="{25340FA2-01B1-4DE0-EDDA-F2E22FA07B25}"/>
+              </a:ext>
+            </a:extLst>
+          </p:cNvPr>
+          <p:cNvPicPr>
+            <a:picLocks noChangeAspect="1"/>
+          </p:cNvPicPr>
+          <p:nvPr/>
+        </p:nvPicPr>
+        <p:blipFill>
+          <a:blip r:embed="rId2"/>
+          <a:stretch>
+            <a:fillRect/>
+          </a:stretch>
+        </p:blipFill>
+        <p:spPr>
+          <a:xfrm>
+            <a:off x="2277314" y="1652173"/>
+            <a:ext cx="287983" cy="287983"/>
+          </a:xfrm>
+          <a:prstGeom prst="rect">
+            <a:avLst/>
+          </a:prstGeom>
+        </p:spPr>
+      </p:pic>
+      <p:pic>
+        <p:nvPicPr>
+          <p:cNvPr id="68" name="図 67" descr="カラーコーン・ロードコーンのイラスト">
+            <a:extLst>
+              <a:ext uri="{FF2B5EF4-FFF2-40B4-BE49-F238E27FC236}">
+                <a16:creationId xmlns:a16="http://schemas.microsoft.com/office/drawing/2014/main" id="{9FA7B7E0-CF9A-B2B7-6BBD-1A31E0C05917}"/>
+              </a:ext>
+            </a:extLst>
+          </p:cNvPr>
+          <p:cNvPicPr>
+            <a:picLocks noChangeAspect="1"/>
+          </p:cNvPicPr>
+          <p:nvPr/>
+        </p:nvPicPr>
+        <p:blipFill>
+          <a:blip r:embed="rId2"/>
+          <a:stretch>
+            <a:fillRect/>
+          </a:stretch>
+        </p:blipFill>
+        <p:spPr>
+          <a:xfrm>
+            <a:off x="3012734" y="1642036"/>
+            <a:ext cx="287983" cy="287983"/>
+          </a:xfrm>
+          <a:prstGeom prst="rect">
+            <a:avLst/>
+          </a:prstGeom>
+        </p:spPr>
+      </p:pic>
+      <p:pic>
+        <p:nvPicPr>
+          <p:cNvPr id="73" name="図 72" descr="カラーコーン・ロードコーンのイラスト">
+            <a:extLst>
+              <a:ext uri="{FF2B5EF4-FFF2-40B4-BE49-F238E27FC236}">
+                <a16:creationId xmlns:a16="http://schemas.microsoft.com/office/drawing/2014/main" id="{8374B121-2874-78BD-272F-3ECFBAFDA481}"/>
+              </a:ext>
+            </a:extLst>
+          </p:cNvPr>
+          <p:cNvPicPr>
+            <a:picLocks noChangeAspect="1"/>
+          </p:cNvPicPr>
+          <p:nvPr/>
+        </p:nvPicPr>
+        <p:blipFill>
+          <a:blip r:embed="rId2"/>
+          <a:stretch>
+            <a:fillRect/>
+          </a:stretch>
+        </p:blipFill>
+        <p:spPr>
+          <a:xfrm>
+            <a:off x="3364023" y="1271229"/>
+            <a:ext cx="287983" cy="287983"/>
+          </a:xfrm>
+          <a:prstGeom prst="rect">
+            <a:avLst/>
+          </a:prstGeom>
+        </p:spPr>
+      </p:pic>
+      <p:pic>
+        <p:nvPicPr>
+          <p:cNvPr id="79" name="図 78" descr="カラーコーン・ロードコーンのイラスト">
+            <a:extLst>
+              <a:ext uri="{FF2B5EF4-FFF2-40B4-BE49-F238E27FC236}">
+                <a16:creationId xmlns:a16="http://schemas.microsoft.com/office/drawing/2014/main" id="{6292C4CD-7C5A-B21F-C6C3-C94DD9F1723A}"/>
+              </a:ext>
+            </a:extLst>
+          </p:cNvPr>
+          <p:cNvPicPr>
+            <a:picLocks noChangeAspect="1"/>
+          </p:cNvPicPr>
+          <p:nvPr/>
+        </p:nvPicPr>
+        <p:blipFill>
+          <a:blip r:embed="rId2"/>
+          <a:stretch>
+            <a:fillRect/>
+          </a:stretch>
+        </p:blipFill>
+        <p:spPr>
+          <a:xfrm>
+            <a:off x="2650678" y="1304339"/>
+            <a:ext cx="287983" cy="287983"/>
+          </a:xfrm>
+          <a:prstGeom prst="rect">
+            <a:avLst/>
+          </a:prstGeom>
+        </p:spPr>
+      </p:pic>
+      <p:pic>
+        <p:nvPicPr>
+          <p:cNvPr id="80" name="図 79" descr="カラーコーン・ロードコーンのイラスト">
+            <a:extLst>
+              <a:ext uri="{FF2B5EF4-FFF2-40B4-BE49-F238E27FC236}">
+                <a16:creationId xmlns:a16="http://schemas.microsoft.com/office/drawing/2014/main" id="{4EC9028E-60EB-07A0-A159-2422AFCFF1F0}"/>
+              </a:ext>
+            </a:extLst>
+          </p:cNvPr>
+          <p:cNvPicPr>
+            <a:picLocks noChangeAspect="1"/>
+          </p:cNvPicPr>
+          <p:nvPr/>
+        </p:nvPicPr>
+        <p:blipFill>
+          <a:blip r:embed="rId2"/>
+          <a:stretch>
+            <a:fillRect/>
+          </a:stretch>
+        </p:blipFill>
+        <p:spPr>
+          <a:xfrm>
+            <a:off x="1563763" y="1639278"/>
+            <a:ext cx="287983" cy="287983"/>
+          </a:xfrm>
+          <a:prstGeom prst="rect">
+            <a:avLst/>
+          </a:prstGeom>
+        </p:spPr>
+      </p:pic>
+      <p:cxnSp>
+        <p:nvCxnSpPr>
+          <p:cNvPr id="82" name="直線コネクタ 81">
+            <a:extLst>
+              <a:ext uri="{FF2B5EF4-FFF2-40B4-BE49-F238E27FC236}">
+                <a16:creationId xmlns:a16="http://schemas.microsoft.com/office/drawing/2014/main" id="{87235F4D-720E-6280-BF0E-2FDE3932391D}"/>
+              </a:ext>
+            </a:extLst>
+          </p:cNvPr>
+          <p:cNvCxnSpPr/>
+          <p:nvPr/>
+        </p:nvCxnSpPr>
+        <p:spPr>
+          <a:xfrm>
+            <a:off x="1501822" y="551139"/>
+            <a:ext cx="1148856" cy="0"/>
+          </a:xfrm>
+          <a:prstGeom prst="line">
+            <a:avLst/>
+          </a:prstGeom>
+          <a:ln>
+            <a:solidFill>
+              <a:schemeClr val="tx1"/>
+            </a:solidFill>
+          </a:ln>
+        </p:spPr>
+        <p:style>
+          <a:lnRef idx="2">
+            <a:schemeClr val="accent1"/>
+          </a:lnRef>
+          <a:fillRef idx="0">
+            <a:schemeClr val="accent1"/>
+          </a:fillRef>
+          <a:effectRef idx="1">
+            <a:schemeClr val="accent1"/>
+          </a:effectRef>
+          <a:fontRef idx="minor">
+            <a:schemeClr val="tx1"/>
+          </a:fontRef>
+        </p:style>
+      </p:cxnSp>
+      <p:cxnSp>
+        <p:nvCxnSpPr>
+          <p:cNvPr id="83" name="直線コネクタ 82">
+            <a:extLst>
+              <a:ext uri="{FF2B5EF4-FFF2-40B4-BE49-F238E27FC236}">
+                <a16:creationId xmlns:a16="http://schemas.microsoft.com/office/drawing/2014/main" id="{2C78AF00-4322-6781-7981-633D64448881}"/>
+              </a:ext>
+            </a:extLst>
+          </p:cNvPr>
+          <p:cNvCxnSpPr>
+            <a:cxnSpLocks/>
+          </p:cNvCxnSpPr>
+          <p:nvPr/>
+        </p:nvCxnSpPr>
+        <p:spPr>
+          <a:xfrm>
+            <a:off x="2650678" y="551139"/>
+            <a:ext cx="0" cy="1095604"/>
+          </a:xfrm>
+          <a:prstGeom prst="line">
+            <a:avLst/>
+          </a:prstGeom>
+          <a:ln>
+            <a:solidFill>
+              <a:schemeClr val="tx1"/>
+            </a:solidFill>
+          </a:ln>
+        </p:spPr>
+        <p:style>
+          <a:lnRef idx="2">
+            <a:schemeClr val="accent1"/>
+          </a:lnRef>
+          <a:fillRef idx="0">
+            <a:schemeClr val="accent1"/>
+          </a:fillRef>
+          <a:effectRef idx="1">
+            <a:schemeClr val="accent1"/>
+          </a:effectRef>
+          <a:fontRef idx="minor">
+            <a:schemeClr val="tx1"/>
+          </a:fontRef>
+        </p:style>
+      </p:cxnSp>
+      <p:cxnSp>
+        <p:nvCxnSpPr>
+          <p:cNvPr id="86" name="直線コネクタ 85">
+            <a:extLst>
+              <a:ext uri="{FF2B5EF4-FFF2-40B4-BE49-F238E27FC236}">
+                <a16:creationId xmlns:a16="http://schemas.microsoft.com/office/drawing/2014/main" id="{9624F539-3862-CD63-7A0C-86983C76B639}"/>
+              </a:ext>
+            </a:extLst>
+          </p:cNvPr>
+          <p:cNvCxnSpPr>
+            <a:cxnSpLocks/>
+          </p:cNvCxnSpPr>
+          <p:nvPr/>
+        </p:nvCxnSpPr>
+        <p:spPr>
+          <a:xfrm>
+            <a:off x="1501822" y="1644529"/>
+            <a:ext cx="1148856" cy="0"/>
+          </a:xfrm>
+          <a:prstGeom prst="line">
+            <a:avLst/>
+          </a:prstGeom>
+          <a:ln>
+            <a:solidFill>
+              <a:schemeClr val="tx1"/>
+            </a:solidFill>
+          </a:ln>
+        </p:spPr>
+        <p:style>
+          <a:lnRef idx="2">
+            <a:schemeClr val="accent1"/>
+          </a:lnRef>
+          <a:fillRef idx="0">
+            <a:schemeClr val="accent1"/>
+          </a:fillRef>
+          <a:effectRef idx="1">
+            <a:schemeClr val="accent1"/>
+          </a:effectRef>
+          <a:fontRef idx="minor">
+            <a:schemeClr val="tx1"/>
+          </a:fontRef>
+        </p:style>
+      </p:cxnSp>
+      <p:cxnSp>
+        <p:nvCxnSpPr>
+          <p:cNvPr id="90" name="直線コネクタ 89">
+            <a:extLst>
+              <a:ext uri="{FF2B5EF4-FFF2-40B4-BE49-F238E27FC236}">
+                <a16:creationId xmlns:a16="http://schemas.microsoft.com/office/drawing/2014/main" id="{DC2537EC-4DB0-7B27-C5C0-6A8192D00E37}"/>
+              </a:ext>
+            </a:extLst>
+          </p:cNvPr>
+          <p:cNvCxnSpPr>
+            <a:cxnSpLocks/>
+          </p:cNvCxnSpPr>
+          <p:nvPr/>
+        </p:nvCxnSpPr>
+        <p:spPr>
+          <a:xfrm>
+            <a:off x="1501822" y="1271229"/>
+            <a:ext cx="0" cy="380944"/>
+          </a:xfrm>
+          <a:prstGeom prst="line">
+            <a:avLst/>
+          </a:prstGeom>
+          <a:ln>
+            <a:solidFill>
+              <a:schemeClr val="tx1"/>
+            </a:solidFill>
+          </a:ln>
+        </p:spPr>
+        <p:style>
+          <a:lnRef idx="2">
+            <a:schemeClr val="accent1"/>
+          </a:lnRef>
+          <a:fillRef idx="0">
+            <a:schemeClr val="accent1"/>
+          </a:fillRef>
+          <a:effectRef idx="1">
+            <a:schemeClr val="accent1"/>
+          </a:effectRef>
+          <a:fontRef idx="minor">
+            <a:schemeClr val="tx1"/>
+          </a:fontRef>
+        </p:style>
+      </p:cxnSp>
+      <p:cxnSp>
+        <p:nvCxnSpPr>
+          <p:cNvPr id="92" name="直線コネクタ 91">
+            <a:extLst>
+              <a:ext uri="{FF2B5EF4-FFF2-40B4-BE49-F238E27FC236}">
+                <a16:creationId xmlns:a16="http://schemas.microsoft.com/office/drawing/2014/main" id="{61307CD7-935E-FB30-207A-3110147F9767}"/>
+              </a:ext>
+            </a:extLst>
+          </p:cNvPr>
+          <p:cNvCxnSpPr>
+            <a:cxnSpLocks/>
+          </p:cNvCxnSpPr>
+          <p:nvPr/>
+        </p:nvCxnSpPr>
+        <p:spPr>
+          <a:xfrm>
+            <a:off x="1501822" y="1271229"/>
+            <a:ext cx="775492" cy="0"/>
+          </a:xfrm>
+          <a:prstGeom prst="line">
+            <a:avLst/>
+          </a:prstGeom>
+          <a:ln>
+            <a:solidFill>
+              <a:schemeClr val="tx1"/>
+            </a:solidFill>
+          </a:ln>
+        </p:spPr>
+        <p:style>
+          <a:lnRef idx="2">
+            <a:schemeClr val="accent1"/>
+          </a:lnRef>
+          <a:fillRef idx="0">
+            <a:schemeClr val="accent1"/>
+          </a:fillRef>
+          <a:effectRef idx="1">
+            <a:schemeClr val="accent1"/>
+          </a:effectRef>
+          <a:fontRef idx="minor">
+            <a:schemeClr val="tx1"/>
+          </a:fontRef>
+        </p:style>
+      </p:cxnSp>
+      <p:cxnSp>
+        <p:nvCxnSpPr>
+          <p:cNvPr id="94" name="直線コネクタ 93">
+            <a:extLst>
+              <a:ext uri="{FF2B5EF4-FFF2-40B4-BE49-F238E27FC236}">
+                <a16:creationId xmlns:a16="http://schemas.microsoft.com/office/drawing/2014/main" id="{764C3D14-55B3-B137-2623-56F2A418B591}"/>
+              </a:ext>
+            </a:extLst>
+          </p:cNvPr>
+          <p:cNvCxnSpPr>
+            <a:cxnSpLocks/>
+          </p:cNvCxnSpPr>
+          <p:nvPr/>
+        </p:nvCxnSpPr>
+        <p:spPr>
+          <a:xfrm>
+            <a:off x="1493278" y="902702"/>
+            <a:ext cx="775492" cy="0"/>
+          </a:xfrm>
+          <a:prstGeom prst="line">
+            <a:avLst/>
+          </a:prstGeom>
+          <a:ln>
+            <a:solidFill>
+              <a:schemeClr val="tx1"/>
+            </a:solidFill>
+          </a:ln>
+        </p:spPr>
+        <p:style>
+          <a:lnRef idx="2">
+            <a:schemeClr val="accent1"/>
+          </a:lnRef>
+          <a:fillRef idx="0">
+            <a:schemeClr val="accent1"/>
+          </a:fillRef>
+          <a:effectRef idx="1">
+            <a:schemeClr val="accent1"/>
+          </a:effectRef>
+          <a:fontRef idx="minor">
+            <a:schemeClr val="tx1"/>
+          </a:fontRef>
+        </p:style>
+      </p:cxnSp>
+      <p:cxnSp>
+        <p:nvCxnSpPr>
+          <p:cNvPr id="95" name="直線コネクタ 94">
+            <a:extLst>
+              <a:ext uri="{FF2B5EF4-FFF2-40B4-BE49-F238E27FC236}">
+                <a16:creationId xmlns:a16="http://schemas.microsoft.com/office/drawing/2014/main" id="{11E16573-1C00-9F19-31DD-EDCF31E25028}"/>
+              </a:ext>
+            </a:extLst>
+          </p:cNvPr>
+          <p:cNvCxnSpPr>
+            <a:cxnSpLocks/>
+          </p:cNvCxnSpPr>
+          <p:nvPr/>
+        </p:nvCxnSpPr>
+        <p:spPr>
+          <a:xfrm>
+            <a:off x="1501822" y="551139"/>
+            <a:ext cx="0" cy="361362"/>
+          </a:xfrm>
+          <a:prstGeom prst="line">
+            <a:avLst/>
+          </a:prstGeom>
+          <a:ln>
+            <a:solidFill>
+              <a:schemeClr val="tx1"/>
+            </a:solidFill>
+          </a:ln>
+        </p:spPr>
+        <p:style>
+          <a:lnRef idx="2">
+            <a:schemeClr val="accent1"/>
+          </a:lnRef>
+          <a:fillRef idx="0">
+            <a:schemeClr val="accent1"/>
+          </a:fillRef>
+          <a:effectRef idx="1">
+            <a:schemeClr val="accent1"/>
+          </a:effectRef>
+          <a:fontRef idx="minor">
+            <a:schemeClr val="tx1"/>
+          </a:fontRef>
+        </p:style>
+      </p:cxnSp>
+      <p:cxnSp>
+        <p:nvCxnSpPr>
+          <p:cNvPr id="96" name="直線コネクタ 95">
+            <a:extLst>
+              <a:ext uri="{FF2B5EF4-FFF2-40B4-BE49-F238E27FC236}">
+                <a16:creationId xmlns:a16="http://schemas.microsoft.com/office/drawing/2014/main" id="{E5ED80E3-DC4C-41ED-DD52-DD9FFFCD3BB2}"/>
+              </a:ext>
+            </a:extLst>
+          </p:cNvPr>
+          <p:cNvCxnSpPr>
+            <a:cxnSpLocks/>
+          </p:cNvCxnSpPr>
+          <p:nvPr/>
+        </p:nvCxnSpPr>
+        <p:spPr>
+          <a:xfrm>
+            <a:off x="2277314" y="890285"/>
+            <a:ext cx="0" cy="380944"/>
+          </a:xfrm>
+          <a:prstGeom prst="line">
+            <a:avLst/>
+          </a:prstGeom>
+          <a:ln>
+            <a:solidFill>
+              <a:schemeClr val="tx1"/>
+            </a:solidFill>
+          </a:ln>
+        </p:spPr>
+        <p:style>
+          <a:lnRef idx="2">
+            <a:schemeClr val="accent1"/>
+          </a:lnRef>
+          <a:fillRef idx="0">
+            <a:schemeClr val="accent1"/>
+          </a:fillRef>
+          <a:effectRef idx="1">
+            <a:schemeClr val="accent1"/>
+          </a:effectRef>
+          <a:fontRef idx="minor">
+            <a:schemeClr val="tx1"/>
+          </a:fontRef>
+        </p:style>
+      </p:cxnSp>
+      <p:pic>
+        <p:nvPicPr>
+          <p:cNvPr id="97" name="図 96" descr="カラーコーン・ロードコーンのイラスト">
+            <a:extLst>
+              <a:ext uri="{FF2B5EF4-FFF2-40B4-BE49-F238E27FC236}">
+                <a16:creationId xmlns:a16="http://schemas.microsoft.com/office/drawing/2014/main" id="{12733260-7BD3-EDFD-1655-6F22C8F8D7E0}"/>
+              </a:ext>
+            </a:extLst>
+          </p:cNvPr>
+          <p:cNvPicPr>
+            <a:picLocks noChangeAspect="1"/>
+          </p:cNvPicPr>
+          <p:nvPr/>
+        </p:nvPicPr>
+        <p:blipFill>
+          <a:blip r:embed="rId2"/>
+          <a:stretch>
+            <a:fillRect/>
+          </a:stretch>
+        </p:blipFill>
+        <p:spPr>
+          <a:xfrm>
+            <a:off x="3730726" y="942647"/>
+            <a:ext cx="287983" cy="287983"/>
+          </a:xfrm>
+          <a:prstGeom prst="rect">
+            <a:avLst/>
+          </a:prstGeom>
+        </p:spPr>
+      </p:pic>
+      <p:cxnSp>
+        <p:nvCxnSpPr>
+          <p:cNvPr id="100" name="直線コネクタ 99">
+            <a:extLst>
+              <a:ext uri="{FF2B5EF4-FFF2-40B4-BE49-F238E27FC236}">
+                <a16:creationId xmlns:a16="http://schemas.microsoft.com/office/drawing/2014/main" id="{12C33589-A7BD-FB40-34DB-518F3387EF45}"/>
+              </a:ext>
+            </a:extLst>
+          </p:cNvPr>
+          <p:cNvCxnSpPr>
+            <a:cxnSpLocks/>
+          </p:cNvCxnSpPr>
+          <p:nvPr/>
+        </p:nvCxnSpPr>
+        <p:spPr>
+          <a:xfrm>
+            <a:off x="4072441" y="541348"/>
+            <a:ext cx="0" cy="361362"/>
+          </a:xfrm>
+          <a:prstGeom prst="line">
+            <a:avLst/>
+          </a:prstGeom>
+          <a:ln>
+            <a:solidFill>
+              <a:schemeClr val="tx1"/>
+            </a:solidFill>
+          </a:ln>
+        </p:spPr>
+        <p:style>
+          <a:lnRef idx="2">
+            <a:schemeClr val="accent1"/>
+          </a:lnRef>
+          <a:fillRef idx="0">
+            <a:schemeClr val="accent1"/>
+          </a:fillRef>
+          <a:effectRef idx="1">
+            <a:schemeClr val="accent1"/>
+          </a:effectRef>
+          <a:fontRef idx="minor">
+            <a:schemeClr val="tx1"/>
+          </a:fontRef>
+        </p:style>
+      </p:cxnSp>
+      <p:cxnSp>
+        <p:nvCxnSpPr>
+          <p:cNvPr id="102" name="直線コネクタ 101">
+            <a:extLst>
+              <a:ext uri="{FF2B5EF4-FFF2-40B4-BE49-F238E27FC236}">
+                <a16:creationId xmlns:a16="http://schemas.microsoft.com/office/drawing/2014/main" id="{939B0C0B-3B06-59C3-B338-388946F616CE}"/>
+              </a:ext>
+            </a:extLst>
+          </p:cNvPr>
+          <p:cNvCxnSpPr>
+            <a:cxnSpLocks/>
+          </p:cNvCxnSpPr>
+          <p:nvPr/>
+        </p:nvCxnSpPr>
+        <p:spPr>
+          <a:xfrm>
+            <a:off x="3305735" y="884184"/>
+            <a:ext cx="0" cy="748487"/>
+          </a:xfrm>
+          <a:prstGeom prst="line">
+            <a:avLst/>
+          </a:prstGeom>
+          <a:ln>
+            <a:solidFill>
+              <a:schemeClr val="tx1"/>
+            </a:solidFill>
+          </a:ln>
+        </p:spPr>
+        <p:style>
+          <a:lnRef idx="2">
+            <a:schemeClr val="accent1"/>
+          </a:lnRef>
+          <a:fillRef idx="0">
+            <a:schemeClr val="accent1"/>
+          </a:fillRef>
+          <a:effectRef idx="1">
+            <a:schemeClr val="accent1"/>
+          </a:effectRef>
+          <a:fontRef idx="minor">
+            <a:schemeClr val="tx1"/>
+          </a:fontRef>
+        </p:style>
+      </p:cxnSp>
+      <p:cxnSp>
+        <p:nvCxnSpPr>
+          <p:cNvPr id="105" name="直線コネクタ 104">
+            <a:extLst>
+              <a:ext uri="{FF2B5EF4-FFF2-40B4-BE49-F238E27FC236}">
+                <a16:creationId xmlns:a16="http://schemas.microsoft.com/office/drawing/2014/main" id="{6B9428EF-FCD6-9F70-5670-1D0E84F293E8}"/>
+              </a:ext>
+            </a:extLst>
+          </p:cNvPr>
+          <p:cNvCxnSpPr>
+            <a:cxnSpLocks/>
+          </p:cNvCxnSpPr>
+          <p:nvPr/>
+        </p:nvCxnSpPr>
+        <p:spPr>
+          <a:xfrm>
+            <a:off x="2986122" y="551139"/>
+            <a:ext cx="0" cy="1095604"/>
+          </a:xfrm>
+          <a:prstGeom prst="line">
+            <a:avLst/>
+          </a:prstGeom>
+          <a:ln>
+            <a:solidFill>
+              <a:schemeClr val="tx1"/>
+            </a:solidFill>
+          </a:ln>
+        </p:spPr>
+        <p:style>
+          <a:lnRef idx="2">
+            <a:schemeClr val="accent1"/>
+          </a:lnRef>
+          <a:fillRef idx="0">
+            <a:schemeClr val="accent1"/>
+          </a:fillRef>
+          <a:effectRef idx="1">
+            <a:schemeClr val="accent1"/>
+          </a:effectRef>
+          <a:fontRef idx="minor">
+            <a:schemeClr val="tx1"/>
+          </a:fontRef>
+        </p:style>
+      </p:cxnSp>
+      <p:cxnSp>
+        <p:nvCxnSpPr>
+          <p:cNvPr id="116" name="直線コネクタ 115">
+            <a:extLst>
+              <a:ext uri="{FF2B5EF4-FFF2-40B4-BE49-F238E27FC236}">
+                <a16:creationId xmlns:a16="http://schemas.microsoft.com/office/drawing/2014/main" id="{65A20B9A-FAEA-4B0A-0916-685799512B83}"/>
+              </a:ext>
+            </a:extLst>
+          </p:cNvPr>
+          <p:cNvCxnSpPr>
+            <a:cxnSpLocks/>
+          </p:cNvCxnSpPr>
+          <p:nvPr/>
+        </p:nvCxnSpPr>
+        <p:spPr>
+          <a:xfrm>
+            <a:off x="2984151" y="1640674"/>
+            <a:ext cx="321584" cy="0"/>
+          </a:xfrm>
+          <a:prstGeom prst="line">
+            <a:avLst/>
+          </a:prstGeom>
+          <a:ln>
+            <a:solidFill>
+              <a:schemeClr val="tx1"/>
+            </a:solidFill>
+          </a:ln>
+        </p:spPr>
+        <p:style>
+          <a:lnRef idx="2">
+            <a:schemeClr val="accent1"/>
+          </a:lnRef>
+          <a:fillRef idx="0">
+            <a:schemeClr val="accent1"/>
+          </a:fillRef>
+          <a:effectRef idx="1">
+            <a:schemeClr val="accent1"/>
+          </a:effectRef>
+          <a:fontRef idx="minor">
+            <a:schemeClr val="tx1"/>
+          </a:fontRef>
+        </p:style>
+      </p:cxnSp>
+      <p:pic>
+        <p:nvPicPr>
+          <p:cNvPr id="118" name="図 117" descr="カラーコーン・ロードコーンのイラスト">
+            <a:extLst>
+              <a:ext uri="{FF2B5EF4-FFF2-40B4-BE49-F238E27FC236}">
+                <a16:creationId xmlns:a16="http://schemas.microsoft.com/office/drawing/2014/main" id="{B8D5554F-C1D1-99B8-5A01-FE26F31E35A6}"/>
+              </a:ext>
+            </a:extLst>
+          </p:cNvPr>
+          <p:cNvPicPr>
+            <a:picLocks noChangeAspect="1"/>
+          </p:cNvPicPr>
+          <p:nvPr/>
+        </p:nvPicPr>
+        <p:blipFill>
+          <a:blip r:embed="rId2"/>
+          <a:stretch>
+            <a:fillRect/>
+          </a:stretch>
+        </p:blipFill>
+        <p:spPr>
+          <a:xfrm>
+            <a:off x="3722212" y="1659901"/>
+            <a:ext cx="287983" cy="287983"/>
+          </a:xfrm>
+          <a:prstGeom prst="rect">
+            <a:avLst/>
+          </a:prstGeom>
+        </p:spPr>
+      </p:pic>
+      <p:sp>
+        <p:nvSpPr>
+          <p:cNvPr id="120" name="正方形/長方形 119">
+            <a:extLst>
+              <a:ext uri="{FF2B5EF4-FFF2-40B4-BE49-F238E27FC236}">
+                <a16:creationId xmlns:a16="http://schemas.microsoft.com/office/drawing/2014/main" id="{8383D71A-4375-2D0F-B352-A17D6635B473}"/>
+              </a:ext>
+            </a:extLst>
+          </p:cNvPr>
+          <p:cNvSpPr/>
+          <p:nvPr/>
+        </p:nvSpPr>
+        <p:spPr>
+          <a:xfrm>
+            <a:off x="3685313" y="1279441"/>
+            <a:ext cx="387128" cy="372731"/>
+          </a:xfrm>
+          <a:prstGeom prst="rect">
+            <a:avLst/>
+          </a:prstGeom>
+          <a:noFill/>
+        </p:spPr>
+        <p:style>
+          <a:lnRef idx="2">
+            <a:schemeClr val="accent1">
+              <a:shade val="15000"/>
+            </a:schemeClr>
+          </a:lnRef>
+          <a:fillRef idx="1">
+            <a:schemeClr val="accent1"/>
+          </a:fillRef>
+          <a:effectRef idx="0">
+            <a:schemeClr val="accent1"/>
+          </a:effectRef>
+          <a:fontRef idx="minor">
+            <a:schemeClr val="lt1"/>
+          </a:fontRef>
+        </p:style>
+        <p:txBody>
+          <a:bodyPr rtlCol="0" anchor="ctr"/>
+          <a:lstStyle/>
+          <a:p>
+            <a:pPr algn="ctr"/>
+            <a:endParaRPr kumimoji="1" lang="ja-JP" altLang="en-US"/>
+          </a:p>
+        </p:txBody>
+      </p:sp>
+      <p:cxnSp>
+        <p:nvCxnSpPr>
+          <p:cNvPr id="131" name="直線コネクタ 130">
+            <a:extLst>
+              <a:ext uri="{FF2B5EF4-FFF2-40B4-BE49-F238E27FC236}">
+                <a16:creationId xmlns:a16="http://schemas.microsoft.com/office/drawing/2014/main" id="{D6B670A8-50E4-8B89-6E04-ACA9CA8D2A77}"/>
+              </a:ext>
+            </a:extLst>
+          </p:cNvPr>
+          <p:cNvCxnSpPr>
+            <a:cxnSpLocks/>
+          </p:cNvCxnSpPr>
+          <p:nvPr/>
+        </p:nvCxnSpPr>
+        <p:spPr>
+          <a:xfrm>
+            <a:off x="3419205" y="319117"/>
+            <a:ext cx="3489" cy="1647195"/>
+          </a:xfrm>
+          <a:prstGeom prst="line">
+            <a:avLst/>
+          </a:prstGeom>
+          <a:ln w="19050">
+            <a:solidFill>
+              <a:schemeClr val="bg1"/>
+            </a:solidFill>
+            <a:prstDash val="dash"/>
+          </a:ln>
+        </p:spPr>
+        <p:style>
+          <a:lnRef idx="2">
+            <a:schemeClr val="accent1"/>
+          </a:lnRef>
+          <a:fillRef idx="0">
+            <a:schemeClr val="accent1"/>
+          </a:fillRef>
+          <a:effectRef idx="1">
+            <a:schemeClr val="accent1"/>
+          </a:effectRef>
+          <a:fontRef idx="minor">
+            <a:schemeClr val="tx1"/>
+          </a:fontRef>
+        </p:style>
+      </p:cxnSp>
+      <p:cxnSp>
+        <p:nvCxnSpPr>
+          <p:cNvPr id="98" name="直線コネクタ 97">
+            <a:extLst>
+              <a:ext uri="{FF2B5EF4-FFF2-40B4-BE49-F238E27FC236}">
+                <a16:creationId xmlns:a16="http://schemas.microsoft.com/office/drawing/2014/main" id="{96419A28-4EA3-568B-BA6D-5175EC905311}"/>
+              </a:ext>
+            </a:extLst>
+          </p:cNvPr>
+          <p:cNvCxnSpPr>
+            <a:cxnSpLocks/>
+          </p:cNvCxnSpPr>
+          <p:nvPr/>
+        </p:nvCxnSpPr>
+        <p:spPr>
+          <a:xfrm>
+            <a:off x="2981409" y="549032"/>
+            <a:ext cx="1091032" cy="0"/>
+          </a:xfrm>
+          <a:prstGeom prst="line">
+            <a:avLst/>
+          </a:prstGeom>
+          <a:ln>
+            <a:solidFill>
+              <a:schemeClr val="tx1"/>
+            </a:solidFill>
+          </a:ln>
+        </p:spPr>
+        <p:style>
+          <a:lnRef idx="2">
+            <a:schemeClr val="accent1"/>
+          </a:lnRef>
+          <a:fillRef idx="0">
+            <a:schemeClr val="accent1"/>
+          </a:fillRef>
+          <a:effectRef idx="1">
+            <a:schemeClr val="accent1"/>
+          </a:effectRef>
+          <a:fontRef idx="minor">
+            <a:schemeClr val="tx1"/>
+          </a:fontRef>
+        </p:style>
+      </p:cxnSp>
+      <p:cxnSp>
+        <p:nvCxnSpPr>
+          <p:cNvPr id="101" name="直線コネクタ 100">
+            <a:extLst>
+              <a:ext uri="{FF2B5EF4-FFF2-40B4-BE49-F238E27FC236}">
+                <a16:creationId xmlns:a16="http://schemas.microsoft.com/office/drawing/2014/main" id="{5711798A-1446-26A9-188F-69BB58DF6BCC}"/>
+              </a:ext>
+            </a:extLst>
+          </p:cNvPr>
+          <p:cNvCxnSpPr>
+            <a:cxnSpLocks/>
+          </p:cNvCxnSpPr>
+          <p:nvPr/>
+        </p:nvCxnSpPr>
+        <p:spPr>
+          <a:xfrm>
+            <a:off x="3298156" y="893834"/>
+            <a:ext cx="774285" cy="0"/>
+          </a:xfrm>
+          <a:prstGeom prst="line">
+            <a:avLst/>
+          </a:prstGeom>
+          <a:ln>
+            <a:solidFill>
+              <a:schemeClr val="tx1"/>
+            </a:solidFill>
+          </a:ln>
+        </p:spPr>
+        <p:style>
+          <a:lnRef idx="2">
+            <a:schemeClr val="accent1"/>
+          </a:lnRef>
+          <a:fillRef idx="0">
+            <a:schemeClr val="accent1"/>
+          </a:fillRef>
+          <a:effectRef idx="1">
+            <a:schemeClr val="accent1"/>
+          </a:effectRef>
+          <a:fontRef idx="minor">
+            <a:schemeClr val="tx1"/>
+          </a:fontRef>
+        </p:style>
+      </p:cxnSp>
+      <p:sp>
+        <p:nvSpPr>
+          <p:cNvPr id="29" name="正方形/長方形 28">
+            <a:extLst>
+              <a:ext uri="{FF2B5EF4-FFF2-40B4-BE49-F238E27FC236}">
+                <a16:creationId xmlns:a16="http://schemas.microsoft.com/office/drawing/2014/main" id="{6E1267B6-E441-3CAE-1444-11A1A0B1E46D}"/>
+              </a:ext>
+            </a:extLst>
+          </p:cNvPr>
+          <p:cNvSpPr/>
+          <p:nvPr/>
+        </p:nvSpPr>
+        <p:spPr>
+          <a:xfrm>
+            <a:off x="3737842" y="587116"/>
+            <a:ext cx="280404" cy="287983"/>
+          </a:xfrm>
+          <a:prstGeom prst="rect">
+            <a:avLst/>
+          </a:prstGeom>
+          <a:solidFill>
+            <a:schemeClr val="bg2">
+              <a:lumMod val="90000"/>
+            </a:schemeClr>
+          </a:solidFill>
+          <a:ln>
+            <a:noFill/>
+          </a:ln>
+        </p:spPr>
+        <p:style>
+          <a:lnRef idx="2">
+            <a:schemeClr val="accent1">
+              <a:shade val="15000"/>
+            </a:schemeClr>
+          </a:lnRef>
+          <a:fillRef idx="1">
+            <a:schemeClr val="accent1"/>
+          </a:fillRef>
+          <a:effectRef idx="0">
+            <a:schemeClr val="accent1"/>
+          </a:effectRef>
+          <a:fontRef idx="minor">
+            <a:schemeClr val="lt1"/>
+          </a:fontRef>
+        </p:style>
+        <p:txBody>
+          <a:bodyPr rtlCol="0" anchor="ctr"/>
+          <a:lstStyle/>
+          <a:p>
+            <a:pPr algn="ctr"/>
+            <a:endParaRPr kumimoji="1" lang="ja-JP" altLang="en-US"/>
+          </a:p>
+        </p:txBody>
+      </p:sp>
+      <p:sp>
+        <p:nvSpPr>
+          <p:cNvPr id="35" name="正方形/長方形 34">
+            <a:extLst>
+              <a:ext uri="{FF2B5EF4-FFF2-40B4-BE49-F238E27FC236}">
+                <a16:creationId xmlns:a16="http://schemas.microsoft.com/office/drawing/2014/main" id="{AAD5B070-B4A4-429E-1DDB-849A4A5C6E31}"/>
+              </a:ext>
+            </a:extLst>
+          </p:cNvPr>
+          <p:cNvSpPr/>
+          <p:nvPr/>
+        </p:nvSpPr>
+        <p:spPr>
+          <a:xfrm>
+            <a:off x="3737842" y="1298262"/>
+            <a:ext cx="280404" cy="287983"/>
+          </a:xfrm>
+          <a:prstGeom prst="rect">
+            <a:avLst/>
+          </a:prstGeom>
+          <a:solidFill>
+            <a:schemeClr val="bg2">
+              <a:lumMod val="90000"/>
+            </a:schemeClr>
+          </a:solidFill>
+          <a:ln>
+            <a:noFill/>
+          </a:ln>
+        </p:spPr>
+        <p:style>
+          <a:lnRef idx="2">
+            <a:schemeClr val="accent1">
+              <a:shade val="15000"/>
+            </a:schemeClr>
+          </a:lnRef>
+          <a:fillRef idx="1">
+            <a:schemeClr val="accent1"/>
+          </a:fillRef>
+          <a:effectRef idx="0">
+            <a:schemeClr val="accent1"/>
+          </a:effectRef>
+          <a:fontRef idx="minor">
+            <a:schemeClr val="lt1"/>
+          </a:fontRef>
+        </p:style>
+        <p:txBody>
+          <a:bodyPr rtlCol="0" anchor="ctr"/>
+          <a:lstStyle/>
+          <a:p>
+            <a:pPr algn="ctr"/>
+            <a:endParaRPr kumimoji="1" lang="ja-JP" altLang="en-US"/>
+          </a:p>
+        </p:txBody>
+      </p:sp>
+      <p:sp>
+        <p:nvSpPr>
+          <p:cNvPr id="162" name="テキスト ボックス 161">
+            <a:extLst>
+              <a:ext uri="{FF2B5EF4-FFF2-40B4-BE49-F238E27FC236}">
+                <a16:creationId xmlns:a16="http://schemas.microsoft.com/office/drawing/2014/main" id="{91E9719D-C751-9A6A-F3D4-79A945AFFD6E}"/>
+              </a:ext>
+            </a:extLst>
+          </p:cNvPr>
+          <p:cNvSpPr txBox="1"/>
+          <p:nvPr/>
+        </p:nvSpPr>
+        <p:spPr>
+          <a:xfrm>
+            <a:off x="273835" y="44624"/>
+            <a:ext cx="442172" cy="369332"/>
+          </a:xfrm>
+          <a:prstGeom prst="rect">
+            <a:avLst/>
+          </a:prstGeom>
+          <a:noFill/>
+        </p:spPr>
+        <p:txBody>
+          <a:bodyPr wrap="none" rtlCol="0">
+            <a:spAutoFit/>
+          </a:bodyPr>
+          <a:lstStyle/>
+          <a:p>
+            <a:r>
+              <a:rPr kumimoji="1" lang="en-US" altLang="ja-JP" dirty="0"/>
+              <a:t>(a)</a:t>
+            </a:r>
+            <a:endParaRPr kumimoji="1" lang="ja-JP" altLang="en-US"/>
+          </a:p>
+        </p:txBody>
+      </p:sp>
+      <p:sp>
+        <p:nvSpPr>
+          <p:cNvPr id="186" name="テキスト ボックス 185">
+            <a:extLst>
+              <a:ext uri="{FF2B5EF4-FFF2-40B4-BE49-F238E27FC236}">
+                <a16:creationId xmlns:a16="http://schemas.microsoft.com/office/drawing/2014/main" id="{1611D2A6-022C-114A-89AB-4E5A08F65F83}"/>
+              </a:ext>
+            </a:extLst>
+          </p:cNvPr>
+          <p:cNvSpPr txBox="1"/>
+          <p:nvPr/>
+        </p:nvSpPr>
+        <p:spPr>
+          <a:xfrm>
+            <a:off x="349212" y="2127326"/>
+            <a:ext cx="449162" cy="369332"/>
+          </a:xfrm>
+          <a:prstGeom prst="rect">
+            <a:avLst/>
+          </a:prstGeom>
+          <a:noFill/>
+        </p:spPr>
+        <p:txBody>
+          <a:bodyPr wrap="none" rtlCol="0">
+            <a:spAutoFit/>
+          </a:bodyPr>
+          <a:lstStyle/>
+          <a:p>
+            <a:r>
+              <a:rPr kumimoji="1" lang="en-US" altLang="ja-JP" dirty="0"/>
+              <a:t>(b)</a:t>
+            </a:r>
+            <a:endParaRPr kumimoji="1" lang="ja-JP" altLang="en-US"/>
+          </a:p>
+        </p:txBody>
+      </p:sp>
+      <p:cxnSp>
+        <p:nvCxnSpPr>
+          <p:cNvPr id="163" name="直線コネクタ 162">
+            <a:extLst>
+              <a:ext uri="{FF2B5EF4-FFF2-40B4-BE49-F238E27FC236}">
+                <a16:creationId xmlns:a16="http://schemas.microsoft.com/office/drawing/2014/main" id="{26479962-2145-CEE9-A2CB-1A329259AE24}"/>
+              </a:ext>
+            </a:extLst>
+          </p:cNvPr>
+          <p:cNvCxnSpPr>
+            <a:cxnSpLocks/>
+          </p:cNvCxnSpPr>
+          <p:nvPr/>
+        </p:nvCxnSpPr>
+        <p:spPr>
+          <a:xfrm>
+            <a:off x="1573610" y="2971147"/>
+            <a:ext cx="2885445" cy="0"/>
+          </a:xfrm>
+          <a:prstGeom prst="line">
+            <a:avLst/>
+          </a:prstGeom>
+          <a:ln>
+            <a:solidFill>
+              <a:schemeClr val="tx1"/>
+            </a:solidFill>
+            <a:headEnd type="none" w="med" len="med"/>
+            <a:tailEnd type="none" w="med" len="med"/>
+          </a:ln>
+        </p:spPr>
+        <p:style>
+          <a:lnRef idx="1">
+            <a:schemeClr val="accent1"/>
+          </a:lnRef>
+          <a:fillRef idx="0">
+            <a:schemeClr val="accent1"/>
+          </a:fillRef>
+          <a:effectRef idx="0">
+            <a:schemeClr val="accent1"/>
+          </a:effectRef>
+          <a:fontRef idx="minor">
+            <a:schemeClr val="tx1"/>
+          </a:fontRef>
+        </p:style>
+      </p:cxnSp>
+      <p:sp>
+        <p:nvSpPr>
+          <p:cNvPr id="164" name="楕円 7">
+            <a:extLst>
+              <a:ext uri="{FF2B5EF4-FFF2-40B4-BE49-F238E27FC236}">
+                <a16:creationId xmlns:a16="http://schemas.microsoft.com/office/drawing/2014/main" id="{A2D1C3A4-3B2F-DEF8-9ECA-560C1DA84C52}"/>
+              </a:ext>
+            </a:extLst>
+          </p:cNvPr>
+          <p:cNvSpPr/>
+          <p:nvPr/>
+        </p:nvSpPr>
+        <p:spPr>
+          <a:xfrm>
+            <a:off x="1437424" y="2827131"/>
+            <a:ext cx="288032" cy="288032"/>
+          </a:xfrm>
+          <a:prstGeom prst="ellipse">
+            <a:avLst/>
+          </a:prstGeom>
+          <a:solidFill>
+            <a:srgbClr val="011893"/>
+          </a:solidFill>
+          <a:ln>
+            <a:noFill/>
+          </a:ln>
+        </p:spPr>
+        <p:style>
+          <a:lnRef idx="2">
+            <a:schemeClr val="accent1">
+              <a:shade val="50000"/>
+            </a:schemeClr>
+          </a:lnRef>
+          <a:fillRef idx="1">
+            <a:schemeClr val="accent1"/>
+          </a:fillRef>
+          <a:effectRef idx="0">
+            <a:schemeClr val="accent1"/>
+          </a:effectRef>
+          <a:fontRef idx="minor">
+            <a:schemeClr val="lt1"/>
+          </a:fontRef>
+        </p:style>
+        <p:txBody>
+          <a:bodyPr rtlCol="0" anchor="ctr"/>
+          <a:lstStyle/>
+          <a:p>
+            <a:pPr algn="ctr"/>
+            <a:endParaRPr kumimoji="1" lang="ja-JP" altLang="en-US"/>
+          </a:p>
+        </p:txBody>
+      </p:sp>
+      <p:sp>
+        <p:nvSpPr>
+          <p:cNvPr id="165" name="楕円 8">
+            <a:extLst>
+              <a:ext uri="{FF2B5EF4-FFF2-40B4-BE49-F238E27FC236}">
+                <a16:creationId xmlns:a16="http://schemas.microsoft.com/office/drawing/2014/main" id="{396D3CEC-6BC4-CC4E-946B-C87DD544D4F1}"/>
+              </a:ext>
+            </a:extLst>
+          </p:cNvPr>
+          <p:cNvSpPr/>
+          <p:nvPr/>
+        </p:nvSpPr>
+        <p:spPr>
+          <a:xfrm>
+            <a:off x="2150550" y="2827131"/>
+            <a:ext cx="288032" cy="288032"/>
+          </a:xfrm>
+          <a:prstGeom prst="ellipse">
+            <a:avLst/>
+          </a:prstGeom>
+          <a:solidFill>
+            <a:srgbClr val="011893"/>
+          </a:solidFill>
+          <a:ln>
+            <a:noFill/>
+          </a:ln>
+        </p:spPr>
+        <p:style>
+          <a:lnRef idx="2">
+            <a:schemeClr val="accent1">
+              <a:shade val="50000"/>
+            </a:schemeClr>
+          </a:lnRef>
+          <a:fillRef idx="1">
+            <a:schemeClr val="accent1"/>
+          </a:fillRef>
+          <a:effectRef idx="0">
+            <a:schemeClr val="accent1"/>
+          </a:effectRef>
+          <a:fontRef idx="minor">
+            <a:schemeClr val="lt1"/>
+          </a:fontRef>
+        </p:style>
+        <p:txBody>
+          <a:bodyPr rtlCol="0" anchor="ctr"/>
+          <a:lstStyle/>
+          <a:p>
+            <a:pPr algn="ctr"/>
+            <a:endParaRPr kumimoji="1" lang="ja-JP" altLang="en-US"/>
+          </a:p>
+        </p:txBody>
+      </p:sp>
+      <p:sp>
+        <p:nvSpPr>
+          <p:cNvPr id="166" name="楕円 9">
+            <a:extLst>
+              <a:ext uri="{FF2B5EF4-FFF2-40B4-BE49-F238E27FC236}">
+                <a16:creationId xmlns:a16="http://schemas.microsoft.com/office/drawing/2014/main" id="{95EF77EA-C50D-6917-ACDB-FAF6FC4BA452}"/>
+              </a:ext>
+            </a:extLst>
+          </p:cNvPr>
+          <p:cNvSpPr/>
+          <p:nvPr/>
+        </p:nvSpPr>
+        <p:spPr>
+          <a:xfrm>
+            <a:off x="2866431" y="2827131"/>
+            <a:ext cx="288032" cy="288032"/>
+          </a:xfrm>
+          <a:prstGeom prst="ellipse">
+            <a:avLst/>
+          </a:prstGeom>
+          <a:solidFill>
+            <a:srgbClr val="011893"/>
+          </a:solidFill>
+          <a:ln>
+            <a:noFill/>
+          </a:ln>
+        </p:spPr>
+        <p:style>
+          <a:lnRef idx="2">
+            <a:schemeClr val="accent1">
+              <a:shade val="50000"/>
+            </a:schemeClr>
+          </a:lnRef>
+          <a:fillRef idx="1">
+            <a:schemeClr val="accent1"/>
+          </a:fillRef>
+          <a:effectRef idx="0">
+            <a:schemeClr val="accent1"/>
+          </a:effectRef>
+          <a:fontRef idx="minor">
+            <a:schemeClr val="lt1"/>
+          </a:fontRef>
+        </p:style>
+        <p:txBody>
+          <a:bodyPr rtlCol="0" anchor="ctr"/>
+          <a:lstStyle/>
+          <a:p>
+            <a:pPr algn="ctr"/>
+            <a:endParaRPr kumimoji="1" lang="ja-JP" altLang="en-US"/>
+          </a:p>
+        </p:txBody>
+      </p:sp>
+      <p:sp>
+        <p:nvSpPr>
+          <p:cNvPr id="167" name="楕円 10">
+            <a:extLst>
+              <a:ext uri="{FF2B5EF4-FFF2-40B4-BE49-F238E27FC236}">
+                <a16:creationId xmlns:a16="http://schemas.microsoft.com/office/drawing/2014/main" id="{3B13D841-3C8E-14A0-F34F-B1AA60F48FD7}"/>
+              </a:ext>
+            </a:extLst>
+          </p:cNvPr>
+          <p:cNvSpPr/>
+          <p:nvPr/>
+        </p:nvSpPr>
+        <p:spPr>
+          <a:xfrm>
+            <a:off x="3582312" y="2827131"/>
+            <a:ext cx="288032" cy="288032"/>
+          </a:xfrm>
+          <a:prstGeom prst="ellipse">
+            <a:avLst/>
+          </a:prstGeom>
+          <a:solidFill>
+            <a:srgbClr val="011893"/>
+          </a:solidFill>
+          <a:ln>
+            <a:noFill/>
+          </a:ln>
+        </p:spPr>
+        <p:style>
+          <a:lnRef idx="2">
+            <a:schemeClr val="accent1">
+              <a:shade val="50000"/>
+            </a:schemeClr>
+          </a:lnRef>
+          <a:fillRef idx="1">
+            <a:schemeClr val="accent1"/>
+          </a:fillRef>
+          <a:effectRef idx="0">
+            <a:schemeClr val="accent1"/>
+          </a:effectRef>
+          <a:fontRef idx="minor">
+            <a:schemeClr val="lt1"/>
+          </a:fontRef>
+        </p:style>
+        <p:txBody>
+          <a:bodyPr rtlCol="0" anchor="ctr"/>
+          <a:lstStyle/>
+          <a:p>
+            <a:pPr algn="ctr"/>
+            <a:endParaRPr kumimoji="1" lang="ja-JP" altLang="en-US"/>
+          </a:p>
+        </p:txBody>
+      </p:sp>
+      <p:sp>
+        <p:nvSpPr>
+          <p:cNvPr id="168" name="楕円 11">
+            <a:extLst>
+              <a:ext uri="{FF2B5EF4-FFF2-40B4-BE49-F238E27FC236}">
+                <a16:creationId xmlns:a16="http://schemas.microsoft.com/office/drawing/2014/main" id="{67F50F60-3EF8-9443-E048-9E3B15978023}"/>
+              </a:ext>
+            </a:extLst>
+          </p:cNvPr>
+          <p:cNvSpPr/>
+          <p:nvPr/>
+        </p:nvSpPr>
+        <p:spPr>
+          <a:xfrm>
+            <a:off x="4327935" y="2827131"/>
+            <a:ext cx="288032" cy="288032"/>
+          </a:xfrm>
+          <a:prstGeom prst="ellipse">
+            <a:avLst/>
+          </a:prstGeom>
+          <a:solidFill>
+            <a:srgbClr val="011893"/>
+          </a:solidFill>
+          <a:ln>
+            <a:noFill/>
+          </a:ln>
+        </p:spPr>
+        <p:style>
+          <a:lnRef idx="2">
+            <a:schemeClr val="accent1">
+              <a:shade val="50000"/>
+            </a:schemeClr>
+          </a:lnRef>
+          <a:fillRef idx="1">
+            <a:schemeClr val="accent1"/>
+          </a:fillRef>
+          <a:effectRef idx="0">
+            <a:schemeClr val="accent1"/>
+          </a:effectRef>
+          <a:fontRef idx="minor">
+            <a:schemeClr val="lt1"/>
+          </a:fontRef>
+        </p:style>
+        <p:txBody>
+          <a:bodyPr rtlCol="0" anchor="ctr"/>
+          <a:lstStyle/>
+          <a:p>
+            <a:pPr algn="ctr"/>
+            <a:endParaRPr kumimoji="1" lang="ja-JP" altLang="en-US"/>
+          </a:p>
+        </p:txBody>
+      </p:sp>
+      <mc:AlternateContent xmlns:mc="http://schemas.openxmlformats.org/markup-compatibility/2006">
+        <mc:Choice xmlns:a14="http://schemas.microsoft.com/office/drawing/2010/main" Requires="a14">
+          <p:sp>
+            <p:nvSpPr>
+              <p:cNvPr id="187" name="テキスト ボックス 186">
+                <a:extLst>
+                  <a:ext uri="{FF2B5EF4-FFF2-40B4-BE49-F238E27FC236}">
+                    <a16:creationId xmlns:a16="http://schemas.microsoft.com/office/drawing/2014/main" id="{00DF79FC-EC49-91B2-C726-63AC721BFCDA}"/>
+                  </a:ext>
+                </a:extLst>
+              </p:cNvPr>
+              <p:cNvSpPr txBox="1"/>
+              <p:nvPr/>
+            </p:nvSpPr>
+            <p:spPr>
+              <a:xfrm>
+                <a:off x="368663" y="2832648"/>
+                <a:ext cx="697948" cy="276999"/>
+              </a:xfrm>
+              <a:prstGeom prst="rect">
+                <a:avLst/>
+              </a:prstGeom>
+              <a:noFill/>
+            </p:spPr>
+            <p:txBody>
+              <a:bodyPr wrap="none" lIns="0" tIns="0" rIns="0" bIns="0" rtlCol="0">
+                <a:spAutoFit/>
+              </a:bodyPr>
+              <a:lstStyle/>
+              <a:p>
+                <a:pPr/>
+                <a14:m>
+                  <m:oMathPara xmlns:m="http://schemas.openxmlformats.org/officeDocument/2006/math">
+                    <m:oMathParaPr>
+                      <m:jc m:val="centerGroup"/>
+                    </m:oMathParaPr>
+                    <m:oMath xmlns:m="http://schemas.openxmlformats.org/officeDocument/2006/math">
+                      <m:r>
+                        <a:rPr kumimoji="1" lang="en-US" altLang="ja-JP" b="0" i="1" smtClean="0">
+                          <a:latin typeface="Cambria Math" panose="02040503050406030204" pitchFamily="18" charset="0"/>
+                        </a:rPr>
+                        <m:t>𝑝</m:t>
+                      </m:r>
+                      <m:r>
+                        <a:rPr kumimoji="1" lang="en-US" altLang="ja-JP" b="0" i="1" smtClean="0">
+                          <a:latin typeface="Cambria Math" panose="02040503050406030204" pitchFamily="18" charset="0"/>
+                        </a:rPr>
+                        <m:t>&lt;</m:t>
+                      </m:r>
+                      <m:sSub>
+                        <m:sSubPr>
+                          <m:ctrlPr>
+                            <a:rPr kumimoji="1" lang="en-US" altLang="ja-JP" b="0" i="1" smtClean="0">
+                              <a:latin typeface="Cambria Math" panose="02040503050406030204" pitchFamily="18" charset="0"/>
+                            </a:rPr>
+                          </m:ctrlPr>
+                        </m:sSubPr>
+                        <m:e>
+                          <m:r>
+                            <a:rPr kumimoji="1" lang="en-US" altLang="ja-JP" b="0" i="1" smtClean="0">
+                              <a:latin typeface="Cambria Math" panose="02040503050406030204" pitchFamily="18" charset="0"/>
+                            </a:rPr>
+                            <m:t>𝑝</m:t>
+                          </m:r>
+                        </m:e>
+                        <m:sub>
+                          <m:r>
+                            <a:rPr kumimoji="1" lang="en-US" altLang="ja-JP" b="0" i="1" smtClean="0">
+                              <a:latin typeface="Cambria Math" panose="02040503050406030204" pitchFamily="18" charset="0"/>
+                            </a:rPr>
+                            <m:t>𝑐</m:t>
+                          </m:r>
+                        </m:sub>
+                      </m:sSub>
+                    </m:oMath>
+                  </m:oMathPara>
+                </a14:m>
+                <a:endParaRPr kumimoji="1" lang="ja-JP" altLang="en-US"/>
+              </a:p>
+            </p:txBody>
+          </p:sp>
+        </mc:Choice>
+        <mc:Fallback>
+          <p:sp>
+            <p:nvSpPr>
+              <p:cNvPr id="187" name="テキスト ボックス 186">
+                <a:extLst>
+                  <a:ext uri="{FF2B5EF4-FFF2-40B4-BE49-F238E27FC236}">
+                    <a16:creationId xmlns:a16="http://schemas.microsoft.com/office/drawing/2014/main" id="{00DF79FC-EC49-91B2-C726-63AC721BFCDA}"/>
+                  </a:ext>
+                </a:extLst>
+              </p:cNvPr>
+              <p:cNvSpPr txBox="1">
+                <a:spLocks noRot="1" noChangeAspect="1" noMove="1" noResize="1" noEditPoints="1" noAdjustHandles="1" noChangeArrowheads="1" noChangeShapeType="1" noTextEdit="1"/>
+              </p:cNvSpPr>
+              <p:nvPr/>
+            </p:nvSpPr>
+            <p:spPr>
+              <a:xfrm>
+                <a:off x="368663" y="2832648"/>
+                <a:ext cx="697948" cy="276999"/>
+              </a:xfrm>
+              <a:prstGeom prst="rect">
+                <a:avLst/>
+              </a:prstGeom>
+              <a:blipFill>
+                <a:blip r:embed="rId3"/>
+                <a:stretch>
+                  <a:fillRect l="-7143" b="-27273"/>
+                </a:stretch>
+              </a:blipFill>
+            </p:spPr>
+            <p:txBody>
+              <a:bodyPr/>
+              <a:lstStyle/>
+              <a:p>
+                <a:r>
+                  <a:rPr lang="ja-JP" altLang="en-US">
+                    <a:noFill/>
+                  </a:rPr>
+                  <a:t> </a:t>
+                </a:r>
+              </a:p>
+            </p:txBody>
+          </p:sp>
+        </mc:Fallback>
+      </mc:AlternateContent>
+      <p:cxnSp>
+        <p:nvCxnSpPr>
+          <p:cNvPr id="171" name="直線コネクタ 170">
+            <a:extLst>
+              <a:ext uri="{FF2B5EF4-FFF2-40B4-BE49-F238E27FC236}">
+                <a16:creationId xmlns:a16="http://schemas.microsoft.com/office/drawing/2014/main" id="{9BF99485-DBB7-6AD8-919D-E5B4F678CAD8}"/>
+              </a:ext>
+            </a:extLst>
+          </p:cNvPr>
+          <p:cNvCxnSpPr>
+            <a:cxnSpLocks/>
+          </p:cNvCxnSpPr>
+          <p:nvPr/>
+        </p:nvCxnSpPr>
+        <p:spPr>
+          <a:xfrm>
+            <a:off x="1601116" y="3749222"/>
+            <a:ext cx="2885445" cy="0"/>
+          </a:xfrm>
+          <a:prstGeom prst="line">
+            <a:avLst/>
+          </a:prstGeom>
+          <a:ln>
+            <a:solidFill>
+              <a:schemeClr val="tx1"/>
+            </a:solidFill>
+            <a:headEnd type="none" w="med" len="med"/>
+            <a:tailEnd type="none" w="med" len="med"/>
+          </a:ln>
+        </p:spPr>
+        <p:style>
+          <a:lnRef idx="1">
+            <a:schemeClr val="accent1"/>
+          </a:lnRef>
+          <a:fillRef idx="0">
+            <a:schemeClr val="accent1"/>
+          </a:fillRef>
+          <a:effectRef idx="0">
+            <a:schemeClr val="accent1"/>
+          </a:effectRef>
+          <a:fontRef idx="minor">
+            <a:schemeClr val="tx1"/>
+          </a:fontRef>
+        </p:style>
+      </p:cxnSp>
+      <p:sp>
+        <p:nvSpPr>
+          <p:cNvPr id="170" name="楕円 7">
+            <a:extLst>
+              <a:ext uri="{FF2B5EF4-FFF2-40B4-BE49-F238E27FC236}">
+                <a16:creationId xmlns:a16="http://schemas.microsoft.com/office/drawing/2014/main" id="{F6CE1240-CD98-6EF4-B2FD-6ECFEACBD689}"/>
+              </a:ext>
+            </a:extLst>
+          </p:cNvPr>
+          <p:cNvSpPr/>
+          <p:nvPr/>
+        </p:nvSpPr>
+        <p:spPr>
+          <a:xfrm>
+            <a:off x="1215899" y="3383681"/>
+            <a:ext cx="731082" cy="731082"/>
+          </a:xfrm>
+          <a:prstGeom prst="ellipse">
+            <a:avLst/>
+          </a:prstGeom>
+          <a:solidFill>
+            <a:srgbClr val="011893"/>
+          </a:solidFill>
+          <a:ln>
+            <a:noFill/>
+          </a:ln>
+        </p:spPr>
+        <p:style>
+          <a:lnRef idx="2">
+            <a:schemeClr val="accent1">
+              <a:shade val="50000"/>
+            </a:schemeClr>
+          </a:lnRef>
+          <a:fillRef idx="1">
+            <a:schemeClr val="accent1"/>
+          </a:fillRef>
+          <a:effectRef idx="0">
+            <a:schemeClr val="accent1"/>
+          </a:effectRef>
+          <a:fontRef idx="minor">
+            <a:schemeClr val="lt1"/>
+          </a:fontRef>
+        </p:style>
+        <p:txBody>
+          <a:bodyPr rtlCol="0" anchor="ctr"/>
+          <a:lstStyle/>
+          <a:p>
+            <a:pPr algn="ctr"/>
+            <a:endParaRPr kumimoji="1" lang="ja-JP" altLang="en-US"/>
+          </a:p>
+        </p:txBody>
+      </p:sp>
+      <p:sp>
+        <p:nvSpPr>
+          <p:cNvPr id="172" name="楕円 7">
+            <a:extLst>
+              <a:ext uri="{FF2B5EF4-FFF2-40B4-BE49-F238E27FC236}">
+                <a16:creationId xmlns:a16="http://schemas.microsoft.com/office/drawing/2014/main" id="{C0B0CE24-A975-9E7E-E23D-8BD0C34F92F1}"/>
+              </a:ext>
+            </a:extLst>
+          </p:cNvPr>
+          <p:cNvSpPr/>
+          <p:nvPr/>
+        </p:nvSpPr>
+        <p:spPr>
+          <a:xfrm>
+            <a:off x="1928148" y="3383681"/>
+            <a:ext cx="731082" cy="731082"/>
+          </a:xfrm>
+          <a:prstGeom prst="ellipse">
+            <a:avLst/>
+          </a:prstGeom>
+          <a:solidFill>
+            <a:srgbClr val="011893"/>
+          </a:solidFill>
+          <a:ln>
+            <a:noFill/>
+          </a:ln>
+        </p:spPr>
+        <p:style>
+          <a:lnRef idx="2">
+            <a:schemeClr val="accent1">
+              <a:shade val="50000"/>
+            </a:schemeClr>
+          </a:lnRef>
+          <a:fillRef idx="1">
+            <a:schemeClr val="accent1"/>
+          </a:fillRef>
+          <a:effectRef idx="0">
+            <a:schemeClr val="accent1"/>
+          </a:effectRef>
+          <a:fontRef idx="minor">
+            <a:schemeClr val="lt1"/>
+          </a:fontRef>
+        </p:style>
+        <p:txBody>
+          <a:bodyPr rtlCol="0" anchor="ctr"/>
+          <a:lstStyle/>
+          <a:p>
+            <a:pPr algn="ctr"/>
+            <a:endParaRPr kumimoji="1" lang="ja-JP" altLang="en-US"/>
+          </a:p>
+        </p:txBody>
+      </p:sp>
+      <p:sp>
+        <p:nvSpPr>
+          <p:cNvPr id="173" name="楕円 7">
+            <a:extLst>
+              <a:ext uri="{FF2B5EF4-FFF2-40B4-BE49-F238E27FC236}">
+                <a16:creationId xmlns:a16="http://schemas.microsoft.com/office/drawing/2014/main" id="{4AED36D9-392A-0E42-E59D-C1321680F0B6}"/>
+              </a:ext>
+            </a:extLst>
+          </p:cNvPr>
+          <p:cNvSpPr/>
+          <p:nvPr/>
+        </p:nvSpPr>
+        <p:spPr>
+          <a:xfrm>
+            <a:off x="2666580" y="3383681"/>
+            <a:ext cx="731082" cy="731082"/>
+          </a:xfrm>
+          <a:prstGeom prst="ellipse">
+            <a:avLst/>
+          </a:prstGeom>
+          <a:solidFill>
+            <a:srgbClr val="011893"/>
+          </a:solidFill>
+          <a:ln>
+            <a:noFill/>
+          </a:ln>
+        </p:spPr>
+        <p:style>
+          <a:lnRef idx="2">
+            <a:schemeClr val="accent1">
+              <a:shade val="50000"/>
+            </a:schemeClr>
+          </a:lnRef>
+          <a:fillRef idx="1">
+            <a:schemeClr val="accent1"/>
+          </a:fillRef>
+          <a:effectRef idx="0">
+            <a:schemeClr val="accent1"/>
+          </a:effectRef>
+          <a:fontRef idx="minor">
+            <a:schemeClr val="lt1"/>
+          </a:fontRef>
+        </p:style>
+        <p:txBody>
+          <a:bodyPr rtlCol="0" anchor="ctr"/>
+          <a:lstStyle/>
+          <a:p>
+            <a:pPr algn="ctr"/>
+            <a:endParaRPr kumimoji="1" lang="ja-JP" altLang="en-US"/>
+          </a:p>
+        </p:txBody>
+      </p:sp>
+      <p:sp>
+        <p:nvSpPr>
+          <p:cNvPr id="174" name="楕円 7">
+            <a:extLst>
+              <a:ext uri="{FF2B5EF4-FFF2-40B4-BE49-F238E27FC236}">
+                <a16:creationId xmlns:a16="http://schemas.microsoft.com/office/drawing/2014/main" id="{0F1C8E9F-A840-073C-255C-419179AD7073}"/>
+              </a:ext>
+            </a:extLst>
+          </p:cNvPr>
+          <p:cNvSpPr/>
+          <p:nvPr/>
+        </p:nvSpPr>
+        <p:spPr>
+          <a:xfrm>
+            <a:off x="3406398" y="3383681"/>
+            <a:ext cx="731082" cy="731082"/>
+          </a:xfrm>
+          <a:prstGeom prst="ellipse">
+            <a:avLst/>
+          </a:prstGeom>
+          <a:solidFill>
+            <a:srgbClr val="011893"/>
+          </a:solidFill>
+          <a:ln>
+            <a:noFill/>
+          </a:ln>
+        </p:spPr>
+        <p:style>
+          <a:lnRef idx="2">
+            <a:schemeClr val="accent1">
+              <a:shade val="50000"/>
+            </a:schemeClr>
+          </a:lnRef>
+          <a:fillRef idx="1">
+            <a:schemeClr val="accent1"/>
+          </a:fillRef>
+          <a:effectRef idx="0">
+            <a:schemeClr val="accent1"/>
+          </a:effectRef>
+          <a:fontRef idx="minor">
+            <a:schemeClr val="lt1"/>
+          </a:fontRef>
+        </p:style>
+        <p:txBody>
+          <a:bodyPr rtlCol="0" anchor="ctr"/>
+          <a:lstStyle/>
+          <a:p>
+            <a:pPr algn="ctr"/>
+            <a:endParaRPr kumimoji="1" lang="ja-JP" altLang="en-US"/>
+          </a:p>
+        </p:txBody>
+      </p:sp>
+      <p:sp>
+        <p:nvSpPr>
+          <p:cNvPr id="175" name="楕円 7">
+            <a:extLst>
+              <a:ext uri="{FF2B5EF4-FFF2-40B4-BE49-F238E27FC236}">
+                <a16:creationId xmlns:a16="http://schemas.microsoft.com/office/drawing/2014/main" id="{75B494B7-863C-8364-B515-87447C07A1AA}"/>
+              </a:ext>
+            </a:extLst>
+          </p:cNvPr>
+          <p:cNvSpPr/>
+          <p:nvPr/>
+        </p:nvSpPr>
+        <p:spPr>
+          <a:xfrm>
+            <a:off x="4106410" y="3383681"/>
+            <a:ext cx="731082" cy="731082"/>
+          </a:xfrm>
+          <a:prstGeom prst="ellipse">
+            <a:avLst/>
+          </a:prstGeom>
+          <a:solidFill>
+            <a:srgbClr val="011893"/>
+          </a:solidFill>
+          <a:ln>
+            <a:noFill/>
+          </a:ln>
+        </p:spPr>
+        <p:style>
+          <a:lnRef idx="2">
+            <a:schemeClr val="accent1">
+              <a:shade val="50000"/>
+            </a:schemeClr>
+          </a:lnRef>
+          <a:fillRef idx="1">
+            <a:schemeClr val="accent1"/>
+          </a:fillRef>
+          <a:effectRef idx="0">
+            <a:schemeClr val="accent1"/>
+          </a:effectRef>
+          <a:fontRef idx="minor">
+            <a:schemeClr val="lt1"/>
+          </a:fontRef>
+        </p:style>
+        <p:txBody>
+          <a:bodyPr rtlCol="0" anchor="ctr"/>
+          <a:lstStyle/>
+          <a:p>
+            <a:pPr algn="ctr"/>
+            <a:endParaRPr kumimoji="1" lang="ja-JP" altLang="en-US"/>
+          </a:p>
+        </p:txBody>
+      </p:sp>
+      <mc:AlternateContent xmlns:mc="http://schemas.openxmlformats.org/markup-compatibility/2006">
+        <mc:Choice xmlns:a14="http://schemas.microsoft.com/office/drawing/2010/main" Requires="a14">
+          <p:sp>
+            <p:nvSpPr>
+              <p:cNvPr id="188" name="テキスト ボックス 187">
+                <a:extLst>
+                  <a:ext uri="{FF2B5EF4-FFF2-40B4-BE49-F238E27FC236}">
+                    <a16:creationId xmlns:a16="http://schemas.microsoft.com/office/drawing/2014/main" id="{AB05AE75-4368-7154-D663-2AEBFB2C6EDC}"/>
+                  </a:ext>
+                </a:extLst>
+              </p:cNvPr>
+              <p:cNvSpPr txBox="1"/>
+              <p:nvPr/>
+            </p:nvSpPr>
+            <p:spPr>
+              <a:xfrm>
+                <a:off x="368663" y="3610723"/>
+                <a:ext cx="697948" cy="276999"/>
+              </a:xfrm>
+              <a:prstGeom prst="rect">
+                <a:avLst/>
+              </a:prstGeom>
+              <a:noFill/>
+            </p:spPr>
+            <p:txBody>
+              <a:bodyPr wrap="square" lIns="0" tIns="0" rIns="0" bIns="0" rtlCol="0">
+                <a:spAutoFit/>
+              </a:bodyPr>
+              <a:lstStyle/>
+              <a:p>
+                <a:pPr/>
+                <a14:m>
+                  <m:oMathPara xmlns:m="http://schemas.openxmlformats.org/officeDocument/2006/math">
+                    <m:oMathParaPr>
+                      <m:jc m:val="centerGroup"/>
+                    </m:oMathParaPr>
+                    <m:oMath xmlns:m="http://schemas.openxmlformats.org/officeDocument/2006/math">
+                      <m:r>
+                        <a:rPr kumimoji="1" lang="en-US" altLang="ja-JP" b="0" i="1" smtClean="0">
+                          <a:latin typeface="Cambria Math" panose="02040503050406030204" pitchFamily="18" charset="0"/>
+                        </a:rPr>
+                        <m:t>𝑝</m:t>
+                      </m:r>
+                      <m:r>
+                        <a:rPr kumimoji="1" lang="en-US" altLang="ja-JP" b="0" i="1" smtClean="0">
+                          <a:latin typeface="Cambria Math" panose="02040503050406030204" pitchFamily="18" charset="0"/>
+                        </a:rPr>
+                        <m:t>=</m:t>
+                      </m:r>
+                      <m:sSub>
+                        <m:sSubPr>
+                          <m:ctrlPr>
+                            <a:rPr kumimoji="1" lang="en-US" altLang="ja-JP" b="0" i="1" smtClean="0">
+                              <a:latin typeface="Cambria Math" panose="02040503050406030204" pitchFamily="18" charset="0"/>
+                            </a:rPr>
+                          </m:ctrlPr>
+                        </m:sSubPr>
+                        <m:e>
+                          <m:r>
+                            <a:rPr kumimoji="1" lang="en-US" altLang="ja-JP" b="0" i="1" smtClean="0">
+                              <a:latin typeface="Cambria Math" panose="02040503050406030204" pitchFamily="18" charset="0"/>
+                            </a:rPr>
+                            <m:t>𝑝</m:t>
+                          </m:r>
+                        </m:e>
+                        <m:sub>
+                          <m:r>
+                            <a:rPr kumimoji="1" lang="en-US" altLang="ja-JP" b="0" i="1" smtClean="0">
+                              <a:latin typeface="Cambria Math" panose="02040503050406030204" pitchFamily="18" charset="0"/>
+                            </a:rPr>
+                            <m:t>𝑐</m:t>
+                          </m:r>
+                        </m:sub>
+                      </m:sSub>
+                    </m:oMath>
+                  </m:oMathPara>
+                </a14:m>
+                <a:endParaRPr kumimoji="1" lang="ja-JP" altLang="en-US"/>
+              </a:p>
+            </p:txBody>
+          </p:sp>
+        </mc:Choice>
+        <mc:Fallback>
+          <p:sp>
+            <p:nvSpPr>
+              <p:cNvPr id="188" name="テキスト ボックス 187">
+                <a:extLst>
+                  <a:ext uri="{FF2B5EF4-FFF2-40B4-BE49-F238E27FC236}">
+                    <a16:creationId xmlns:a16="http://schemas.microsoft.com/office/drawing/2014/main" id="{AB05AE75-4368-7154-D663-2AEBFB2C6EDC}"/>
+                  </a:ext>
+                </a:extLst>
+              </p:cNvPr>
+              <p:cNvSpPr txBox="1">
+                <a:spLocks noRot="1" noChangeAspect="1" noMove="1" noResize="1" noEditPoints="1" noAdjustHandles="1" noChangeArrowheads="1" noChangeShapeType="1" noTextEdit="1"/>
+              </p:cNvSpPr>
+              <p:nvPr/>
+            </p:nvSpPr>
+            <p:spPr>
+              <a:xfrm>
+                <a:off x="368663" y="3610723"/>
+                <a:ext cx="697948" cy="276999"/>
+              </a:xfrm>
+              <a:prstGeom prst="rect">
+                <a:avLst/>
+              </a:prstGeom>
+              <a:blipFill>
+                <a:blip r:embed="rId4"/>
+                <a:stretch>
+                  <a:fillRect l="-7143" b="-21739"/>
+                </a:stretch>
+              </a:blipFill>
+            </p:spPr>
+            <p:txBody>
+              <a:bodyPr/>
+              <a:lstStyle/>
+              <a:p>
+                <a:r>
+                  <a:rPr lang="ja-JP" altLang="en-US">
+                    <a:noFill/>
+                  </a:rPr>
+                  <a:t> </a:t>
+                </a:r>
+              </a:p>
+            </p:txBody>
+          </p:sp>
+        </mc:Fallback>
+      </mc:AlternateContent>
+      <p:cxnSp>
+        <p:nvCxnSpPr>
+          <p:cNvPr id="176" name="直線コネクタ 175">
+            <a:extLst>
+              <a:ext uri="{FF2B5EF4-FFF2-40B4-BE49-F238E27FC236}">
+                <a16:creationId xmlns:a16="http://schemas.microsoft.com/office/drawing/2014/main" id="{C94B755F-DD89-737D-316E-D23A7ED051A6}"/>
+              </a:ext>
+            </a:extLst>
+          </p:cNvPr>
+          <p:cNvCxnSpPr>
+            <a:cxnSpLocks/>
+          </p:cNvCxnSpPr>
+          <p:nvPr/>
+        </p:nvCxnSpPr>
+        <p:spPr>
+          <a:xfrm>
+            <a:off x="1601116" y="4787289"/>
+            <a:ext cx="2885445" cy="0"/>
+          </a:xfrm>
+          <a:prstGeom prst="line">
+            <a:avLst/>
+          </a:prstGeom>
+          <a:ln>
+            <a:solidFill>
+              <a:schemeClr val="tx1"/>
+            </a:solidFill>
+            <a:headEnd type="none" w="med" len="med"/>
+            <a:tailEnd type="none" w="med" len="med"/>
+          </a:ln>
+        </p:spPr>
+        <p:style>
+          <a:lnRef idx="1">
+            <a:schemeClr val="accent1"/>
+          </a:lnRef>
+          <a:fillRef idx="0">
+            <a:schemeClr val="accent1"/>
+          </a:fillRef>
+          <a:effectRef idx="0">
+            <a:schemeClr val="accent1"/>
+          </a:effectRef>
+          <a:fontRef idx="minor">
+            <a:schemeClr val="tx1"/>
+          </a:fontRef>
+        </p:style>
+      </p:cxnSp>
+      <p:sp>
+        <p:nvSpPr>
+          <p:cNvPr id="177" name="楕円 7">
+            <a:extLst>
+              <a:ext uri="{FF2B5EF4-FFF2-40B4-BE49-F238E27FC236}">
+                <a16:creationId xmlns:a16="http://schemas.microsoft.com/office/drawing/2014/main" id="{37C597DC-1D16-BEAC-69D8-FB391107FD67}"/>
+              </a:ext>
+            </a:extLst>
+          </p:cNvPr>
+          <p:cNvSpPr/>
+          <p:nvPr/>
+        </p:nvSpPr>
+        <p:spPr>
+          <a:xfrm>
+            <a:off x="1177433" y="4383282"/>
+            <a:ext cx="808014" cy="808014"/>
+          </a:xfrm>
+          <a:prstGeom prst="ellipse">
+            <a:avLst/>
+          </a:prstGeom>
+          <a:solidFill>
+            <a:srgbClr val="011893"/>
+          </a:solidFill>
+          <a:ln>
+            <a:noFill/>
+          </a:ln>
+        </p:spPr>
+        <p:style>
+          <a:lnRef idx="2">
+            <a:schemeClr val="accent1">
+              <a:shade val="50000"/>
+            </a:schemeClr>
+          </a:lnRef>
+          <a:fillRef idx="1">
+            <a:schemeClr val="accent1"/>
+          </a:fillRef>
+          <a:effectRef idx="0">
+            <a:schemeClr val="accent1"/>
+          </a:effectRef>
+          <a:fontRef idx="minor">
+            <a:schemeClr val="lt1"/>
+          </a:fontRef>
+        </p:style>
+        <p:txBody>
+          <a:bodyPr rtlCol="0" anchor="ctr"/>
+          <a:lstStyle/>
+          <a:p>
+            <a:pPr algn="ctr"/>
+            <a:endParaRPr kumimoji="1" lang="ja-JP" altLang="en-US"/>
+          </a:p>
+        </p:txBody>
+      </p:sp>
+      <p:sp>
+        <p:nvSpPr>
+          <p:cNvPr id="182" name="楕円 7">
+            <a:extLst>
+              <a:ext uri="{FF2B5EF4-FFF2-40B4-BE49-F238E27FC236}">
+                <a16:creationId xmlns:a16="http://schemas.microsoft.com/office/drawing/2014/main" id="{F4448C90-D10E-EA92-B2B5-93BEEDB87A3A}"/>
+              </a:ext>
+            </a:extLst>
+          </p:cNvPr>
+          <p:cNvSpPr/>
+          <p:nvPr/>
+        </p:nvSpPr>
+        <p:spPr>
+          <a:xfrm>
+            <a:off x="1900061" y="4383282"/>
+            <a:ext cx="808014" cy="808014"/>
+          </a:xfrm>
+          <a:prstGeom prst="ellipse">
+            <a:avLst/>
+          </a:prstGeom>
+          <a:solidFill>
+            <a:srgbClr val="011893"/>
+          </a:solidFill>
+          <a:ln>
+            <a:noFill/>
+          </a:ln>
+        </p:spPr>
+        <p:style>
+          <a:lnRef idx="2">
+            <a:schemeClr val="accent1">
+              <a:shade val="50000"/>
+            </a:schemeClr>
+          </a:lnRef>
+          <a:fillRef idx="1">
+            <a:schemeClr val="accent1"/>
+          </a:fillRef>
+          <a:effectRef idx="0">
+            <a:schemeClr val="accent1"/>
+          </a:effectRef>
+          <a:fontRef idx="minor">
+            <a:schemeClr val="lt1"/>
+          </a:fontRef>
+        </p:style>
+        <p:txBody>
+          <a:bodyPr rtlCol="0" anchor="ctr"/>
+          <a:lstStyle/>
+          <a:p>
+            <a:pPr algn="ctr"/>
+            <a:endParaRPr kumimoji="1" lang="ja-JP" altLang="en-US"/>
+          </a:p>
+        </p:txBody>
+      </p:sp>
+      <p:sp>
+        <p:nvSpPr>
+          <p:cNvPr id="183" name="楕円 7">
+            <a:extLst>
+              <a:ext uri="{FF2B5EF4-FFF2-40B4-BE49-F238E27FC236}">
+                <a16:creationId xmlns:a16="http://schemas.microsoft.com/office/drawing/2014/main" id="{1B35BE67-7F75-2E07-A19B-560B82B3F935}"/>
+              </a:ext>
+            </a:extLst>
+          </p:cNvPr>
+          <p:cNvSpPr/>
+          <p:nvPr/>
+        </p:nvSpPr>
+        <p:spPr>
+          <a:xfrm>
+            <a:off x="2622689" y="4383282"/>
+            <a:ext cx="808014" cy="808014"/>
+          </a:xfrm>
+          <a:prstGeom prst="ellipse">
+            <a:avLst/>
+          </a:prstGeom>
+          <a:solidFill>
+            <a:srgbClr val="011893"/>
+          </a:solidFill>
+          <a:ln>
+            <a:noFill/>
+          </a:ln>
+        </p:spPr>
+        <p:style>
+          <a:lnRef idx="2">
+            <a:schemeClr val="accent1">
+              <a:shade val="50000"/>
+            </a:schemeClr>
+          </a:lnRef>
+          <a:fillRef idx="1">
+            <a:schemeClr val="accent1"/>
+          </a:fillRef>
+          <a:effectRef idx="0">
+            <a:schemeClr val="accent1"/>
+          </a:effectRef>
+          <a:fontRef idx="minor">
+            <a:schemeClr val="lt1"/>
+          </a:fontRef>
+        </p:style>
+        <p:txBody>
+          <a:bodyPr rtlCol="0" anchor="ctr"/>
+          <a:lstStyle/>
+          <a:p>
+            <a:pPr algn="ctr"/>
+            <a:endParaRPr kumimoji="1" lang="ja-JP" altLang="en-US"/>
+          </a:p>
+        </p:txBody>
+      </p:sp>
+      <p:sp>
+        <p:nvSpPr>
+          <p:cNvPr id="184" name="楕円 7">
+            <a:extLst>
+              <a:ext uri="{FF2B5EF4-FFF2-40B4-BE49-F238E27FC236}">
+                <a16:creationId xmlns:a16="http://schemas.microsoft.com/office/drawing/2014/main" id="{DD9B8D07-0E88-4116-B283-CAE546235E98}"/>
+              </a:ext>
+            </a:extLst>
+          </p:cNvPr>
+          <p:cNvSpPr/>
+          <p:nvPr/>
+        </p:nvSpPr>
+        <p:spPr>
+          <a:xfrm>
+            <a:off x="3345317" y="4383282"/>
+            <a:ext cx="808014" cy="808014"/>
+          </a:xfrm>
+          <a:prstGeom prst="ellipse">
+            <a:avLst/>
+          </a:prstGeom>
+          <a:solidFill>
+            <a:srgbClr val="011893"/>
+          </a:solidFill>
+          <a:ln>
+            <a:noFill/>
+          </a:ln>
+        </p:spPr>
+        <p:style>
+          <a:lnRef idx="2">
+            <a:schemeClr val="accent1">
+              <a:shade val="50000"/>
+            </a:schemeClr>
+          </a:lnRef>
+          <a:fillRef idx="1">
+            <a:schemeClr val="accent1"/>
+          </a:fillRef>
+          <a:effectRef idx="0">
+            <a:schemeClr val="accent1"/>
+          </a:effectRef>
+          <a:fontRef idx="minor">
+            <a:schemeClr val="lt1"/>
+          </a:fontRef>
+        </p:style>
+        <p:txBody>
+          <a:bodyPr rtlCol="0" anchor="ctr"/>
+          <a:lstStyle/>
+          <a:p>
+            <a:pPr algn="ctr"/>
+            <a:endParaRPr kumimoji="1" lang="ja-JP" altLang="en-US"/>
+          </a:p>
+        </p:txBody>
+      </p:sp>
+      <p:sp>
+        <p:nvSpPr>
+          <p:cNvPr id="185" name="楕円 7">
+            <a:extLst>
+              <a:ext uri="{FF2B5EF4-FFF2-40B4-BE49-F238E27FC236}">
+                <a16:creationId xmlns:a16="http://schemas.microsoft.com/office/drawing/2014/main" id="{67F23434-769E-C830-C88B-7143A1EA00E8}"/>
+              </a:ext>
+            </a:extLst>
+          </p:cNvPr>
+          <p:cNvSpPr/>
+          <p:nvPr/>
+        </p:nvSpPr>
+        <p:spPr>
+          <a:xfrm>
+            <a:off x="4067944" y="4383282"/>
+            <a:ext cx="808014" cy="808014"/>
+          </a:xfrm>
+          <a:prstGeom prst="ellipse">
+            <a:avLst/>
+          </a:prstGeom>
+          <a:solidFill>
+            <a:srgbClr val="011893"/>
+          </a:solidFill>
+          <a:ln>
+            <a:noFill/>
+          </a:ln>
+        </p:spPr>
+        <p:style>
+          <a:lnRef idx="2">
+            <a:schemeClr val="accent1">
+              <a:shade val="50000"/>
+            </a:schemeClr>
+          </a:lnRef>
+          <a:fillRef idx="1">
+            <a:schemeClr val="accent1"/>
+          </a:fillRef>
+          <a:effectRef idx="0">
+            <a:schemeClr val="accent1"/>
+          </a:effectRef>
+          <a:fontRef idx="minor">
+            <a:schemeClr val="lt1"/>
+          </a:fontRef>
+        </p:style>
+        <p:txBody>
+          <a:bodyPr rtlCol="0" anchor="ctr"/>
+          <a:lstStyle/>
+          <a:p>
+            <a:pPr algn="ctr"/>
+            <a:endParaRPr kumimoji="1" lang="ja-JP" altLang="en-US"/>
+          </a:p>
+        </p:txBody>
+      </p:sp>
+      <mc:AlternateContent xmlns:mc="http://schemas.openxmlformats.org/markup-compatibility/2006">
+        <mc:Choice xmlns:a14="http://schemas.microsoft.com/office/drawing/2010/main" Requires="a14">
+          <p:sp>
+            <p:nvSpPr>
+              <p:cNvPr id="189" name="テキスト ボックス 188">
+                <a:extLst>
+                  <a:ext uri="{FF2B5EF4-FFF2-40B4-BE49-F238E27FC236}">
+                    <a16:creationId xmlns:a16="http://schemas.microsoft.com/office/drawing/2014/main" id="{A28BD30C-2DF6-F8E6-7767-B6D21E082D16}"/>
+                  </a:ext>
+                </a:extLst>
+              </p:cNvPr>
+              <p:cNvSpPr txBox="1"/>
+              <p:nvPr/>
+            </p:nvSpPr>
+            <p:spPr>
+              <a:xfrm>
+                <a:off x="368663" y="4648790"/>
+                <a:ext cx="697948" cy="276999"/>
+              </a:xfrm>
+              <a:prstGeom prst="rect">
+                <a:avLst/>
+              </a:prstGeom>
+              <a:noFill/>
+            </p:spPr>
+            <p:txBody>
+              <a:bodyPr wrap="none" lIns="0" tIns="0" rIns="0" bIns="0" rtlCol="0">
+                <a:spAutoFit/>
+              </a:bodyPr>
+              <a:lstStyle/>
+              <a:p>
+                <a:pPr/>
+                <a14:m>
+                  <m:oMathPara xmlns:m="http://schemas.openxmlformats.org/officeDocument/2006/math">
+                    <m:oMathParaPr>
+                      <m:jc m:val="centerGroup"/>
+                    </m:oMathParaPr>
+                    <m:oMath xmlns:m="http://schemas.openxmlformats.org/officeDocument/2006/math">
+                      <m:r>
+                        <a:rPr kumimoji="1" lang="en-US" altLang="ja-JP" b="0" i="1" smtClean="0">
+                          <a:latin typeface="Cambria Math" panose="02040503050406030204" pitchFamily="18" charset="0"/>
+                        </a:rPr>
+                        <m:t>𝑝</m:t>
+                      </m:r>
+                      <m:r>
+                        <a:rPr kumimoji="1" lang="en-US" altLang="ja-JP" b="0" i="1" smtClean="0">
+                          <a:latin typeface="Cambria Math" panose="02040503050406030204" pitchFamily="18" charset="0"/>
+                        </a:rPr>
+                        <m:t>&gt;</m:t>
+                      </m:r>
+                      <m:sSub>
+                        <m:sSubPr>
+                          <m:ctrlPr>
+                            <a:rPr kumimoji="1" lang="en-US" altLang="ja-JP" b="0" i="1" smtClean="0">
+                              <a:latin typeface="Cambria Math" panose="02040503050406030204" pitchFamily="18" charset="0"/>
+                            </a:rPr>
+                          </m:ctrlPr>
+                        </m:sSubPr>
+                        <m:e>
+                          <m:r>
+                            <a:rPr kumimoji="1" lang="en-US" altLang="ja-JP" b="0" i="1" smtClean="0">
+                              <a:latin typeface="Cambria Math" panose="02040503050406030204" pitchFamily="18" charset="0"/>
+                            </a:rPr>
+                            <m:t>𝑝</m:t>
+                          </m:r>
+                        </m:e>
+                        <m:sub>
+                          <m:r>
+                            <a:rPr kumimoji="1" lang="en-US" altLang="ja-JP" b="0" i="1" smtClean="0">
+                              <a:latin typeface="Cambria Math" panose="02040503050406030204" pitchFamily="18" charset="0"/>
+                            </a:rPr>
+                            <m:t>𝑐</m:t>
+                          </m:r>
+                        </m:sub>
+                      </m:sSub>
+                    </m:oMath>
+                  </m:oMathPara>
+                </a14:m>
+                <a:endParaRPr kumimoji="1" lang="ja-JP" altLang="en-US"/>
+              </a:p>
+            </p:txBody>
+          </p:sp>
+        </mc:Choice>
+        <mc:Fallback>
+          <p:sp>
+            <p:nvSpPr>
+              <p:cNvPr id="189" name="テキスト ボックス 188">
+                <a:extLst>
+                  <a:ext uri="{FF2B5EF4-FFF2-40B4-BE49-F238E27FC236}">
+                    <a16:creationId xmlns:a16="http://schemas.microsoft.com/office/drawing/2014/main" id="{A28BD30C-2DF6-F8E6-7767-B6D21E082D16}"/>
+                  </a:ext>
+                </a:extLst>
+              </p:cNvPr>
+              <p:cNvSpPr txBox="1">
+                <a:spLocks noRot="1" noChangeAspect="1" noMove="1" noResize="1" noEditPoints="1" noAdjustHandles="1" noChangeArrowheads="1" noChangeShapeType="1" noTextEdit="1"/>
+              </p:cNvSpPr>
+              <p:nvPr/>
+            </p:nvSpPr>
+            <p:spPr>
+              <a:xfrm>
+                <a:off x="368663" y="4648790"/>
+                <a:ext cx="697948" cy="276999"/>
+              </a:xfrm>
+              <a:prstGeom prst="rect">
+                <a:avLst/>
+              </a:prstGeom>
+              <a:blipFill>
+                <a:blip r:embed="rId5"/>
+                <a:stretch>
+                  <a:fillRect l="-7143" b="-27273"/>
+                </a:stretch>
+              </a:blipFill>
+            </p:spPr>
+            <p:txBody>
+              <a:bodyPr/>
+              <a:lstStyle/>
+              <a:p>
+                <a:r>
+                  <a:rPr lang="ja-JP" altLang="en-US">
+                    <a:noFill/>
+                  </a:rPr>
+                  <a:t> </a:t>
+                </a:r>
+              </a:p>
+            </p:txBody>
+          </p:sp>
+        </mc:Fallback>
+      </mc:AlternateContent>
+      <p:sp>
+        <p:nvSpPr>
+          <p:cNvPr id="190" name="テキスト ボックス 189">
+            <a:extLst>
+              <a:ext uri="{FF2B5EF4-FFF2-40B4-BE49-F238E27FC236}">
+                <a16:creationId xmlns:a16="http://schemas.microsoft.com/office/drawing/2014/main" id="{E4F581A5-F415-CC4A-169C-46AAF1562055}"/>
+              </a:ext>
+            </a:extLst>
+          </p:cNvPr>
+          <p:cNvSpPr txBox="1"/>
+          <p:nvPr/>
+        </p:nvSpPr>
+        <p:spPr>
+          <a:xfrm>
+            <a:off x="1327080" y="2220557"/>
+            <a:ext cx="3522118" cy="307777"/>
+          </a:xfrm>
+          <a:prstGeom prst="rect">
+            <a:avLst/>
+          </a:prstGeom>
+          <a:noFill/>
+        </p:spPr>
+        <p:txBody>
+          <a:bodyPr wrap="none" rtlCol="0">
+            <a:spAutoFit/>
+          </a:bodyPr>
+          <a:lstStyle/>
+          <a:p>
+            <a:r>
+              <a:rPr lang="ja-JP" altLang="en-US" sz="1400"/>
+              <a:t>火事や病気の影響が届く範囲</a:t>
+            </a:r>
+            <a:r>
+              <a:rPr lang="en-US" altLang="ja-JP" sz="1400" dirty="0"/>
+              <a:t>(</a:t>
+            </a:r>
+            <a:r>
+              <a:rPr lang="ja-JP" altLang="en-US" sz="1400"/>
+              <a:t>クラスター</a:t>
+            </a:r>
+            <a:r>
+              <a:rPr lang="en-US" altLang="ja-JP" sz="1400" dirty="0"/>
+              <a:t>)</a:t>
+            </a:r>
+          </a:p>
+        </p:txBody>
+      </p:sp>
+      <p:cxnSp>
+        <p:nvCxnSpPr>
+          <p:cNvPr id="192" name="直線矢印コネクタ 191">
+            <a:extLst>
+              <a:ext uri="{FF2B5EF4-FFF2-40B4-BE49-F238E27FC236}">
+                <a16:creationId xmlns:a16="http://schemas.microsoft.com/office/drawing/2014/main" id="{8F1F4895-42A0-5DE8-E0F2-DB6D027C6C76}"/>
+              </a:ext>
+            </a:extLst>
+          </p:cNvPr>
+          <p:cNvCxnSpPr>
+            <a:endCxn id="164" idx="0"/>
+          </p:cNvCxnSpPr>
+          <p:nvPr/>
+        </p:nvCxnSpPr>
+        <p:spPr>
+          <a:xfrm flipH="1">
+            <a:off x="1581440" y="2496658"/>
+            <a:ext cx="144016" cy="330473"/>
+          </a:xfrm>
+          <a:prstGeom prst="straightConnector1">
+            <a:avLst/>
+          </a:prstGeom>
+          <a:ln>
+            <a:tailEnd type="triangle"/>
+          </a:ln>
+        </p:spPr>
+        <p:style>
+          <a:lnRef idx="2">
+            <a:schemeClr val="accent1"/>
+          </a:lnRef>
+          <a:fillRef idx="0">
+            <a:schemeClr val="accent1"/>
+          </a:fillRef>
+          <a:effectRef idx="1">
+            <a:schemeClr val="accent1"/>
+          </a:effectRef>
+          <a:fontRef idx="minor">
+            <a:schemeClr val="tx1"/>
+          </a:fontRef>
+        </p:style>
+      </p:cxnSp>
+      <p:sp>
+        <p:nvSpPr>
+          <p:cNvPr id="193" name="テキスト ボックス 192">
+            <a:extLst>
+              <a:ext uri="{FF2B5EF4-FFF2-40B4-BE49-F238E27FC236}">
+                <a16:creationId xmlns:a16="http://schemas.microsoft.com/office/drawing/2014/main" id="{351BE90B-79F2-587F-C4FB-50956ED50A82}"/>
+              </a:ext>
+            </a:extLst>
+          </p:cNvPr>
+          <p:cNvSpPr txBox="1"/>
+          <p:nvPr/>
+        </p:nvSpPr>
+        <p:spPr>
+          <a:xfrm>
+            <a:off x="611618" y="5604431"/>
+            <a:ext cx="2492990" cy="276999"/>
+          </a:xfrm>
+          <a:prstGeom prst="rect">
+            <a:avLst/>
+          </a:prstGeom>
+          <a:noFill/>
+        </p:spPr>
+        <p:txBody>
+          <a:bodyPr wrap="none" rtlCol="0">
+            <a:spAutoFit/>
+          </a:bodyPr>
+          <a:lstStyle/>
+          <a:p>
+            <a:r>
+              <a:rPr lang="ja-JP" altLang="en-US" sz="1200"/>
+              <a:t>ここで発生したイベントの影響が</a:t>
+            </a:r>
+            <a:endParaRPr lang="en-US" altLang="ja-JP" sz="1200" dirty="0"/>
+          </a:p>
+        </p:txBody>
+      </p:sp>
+      <p:cxnSp>
+        <p:nvCxnSpPr>
+          <p:cNvPr id="194" name="コネクタ: カギ線 50">
+            <a:extLst>
+              <a:ext uri="{FF2B5EF4-FFF2-40B4-BE49-F238E27FC236}">
+                <a16:creationId xmlns:a16="http://schemas.microsoft.com/office/drawing/2014/main" id="{35F8258E-EF11-B6D0-E47C-AB33C1337D5A}"/>
+              </a:ext>
+            </a:extLst>
+          </p:cNvPr>
+          <p:cNvCxnSpPr>
+            <a:cxnSpLocks/>
+            <a:stCxn id="193" idx="0"/>
+            <a:endCxn id="177" idx="4"/>
+          </p:cNvCxnSpPr>
+          <p:nvPr/>
+        </p:nvCxnSpPr>
+        <p:spPr>
+          <a:xfrm rot="16200000" flipV="1">
+            <a:off x="1513210" y="5259527"/>
+            <a:ext cx="413135" cy="276673"/>
+          </a:xfrm>
+          <a:prstGeom prst="bentConnector3">
+            <a:avLst>
+              <a:gd name="adj1" fmla="val 50000"/>
+            </a:avLst>
+          </a:prstGeom>
+          <a:ln>
+            <a:solidFill>
+              <a:schemeClr val="tx1"/>
+            </a:solidFill>
+            <a:headEnd type="none" w="med" len="med"/>
+            <a:tailEnd type="triangle"/>
+          </a:ln>
+        </p:spPr>
+        <p:style>
+          <a:lnRef idx="1">
+            <a:schemeClr val="accent1"/>
+          </a:lnRef>
+          <a:fillRef idx="0">
+            <a:schemeClr val="accent1"/>
+          </a:fillRef>
+          <a:effectRef idx="0">
+            <a:schemeClr val="accent1"/>
+          </a:effectRef>
+          <a:fontRef idx="minor">
+            <a:schemeClr val="tx1"/>
+          </a:fontRef>
+        </p:style>
+      </p:cxnSp>
+      <p:sp>
+        <p:nvSpPr>
+          <p:cNvPr id="198" name="テキスト ボックス 197">
+            <a:extLst>
+              <a:ext uri="{FF2B5EF4-FFF2-40B4-BE49-F238E27FC236}">
+                <a16:creationId xmlns:a16="http://schemas.microsoft.com/office/drawing/2014/main" id="{28C5B065-D364-0D8F-FC2F-C63A617DB452}"/>
+              </a:ext>
+            </a:extLst>
+          </p:cNvPr>
+          <p:cNvSpPr txBox="1"/>
+          <p:nvPr/>
+        </p:nvSpPr>
+        <p:spPr>
+          <a:xfrm>
+            <a:off x="3756647" y="5602526"/>
+            <a:ext cx="1107996" cy="276999"/>
+          </a:xfrm>
+          <a:prstGeom prst="rect">
+            <a:avLst/>
+          </a:prstGeom>
+          <a:noFill/>
+        </p:spPr>
+        <p:txBody>
+          <a:bodyPr wrap="none" rtlCol="0">
+            <a:spAutoFit/>
+          </a:bodyPr>
+          <a:lstStyle/>
+          <a:p>
+            <a:r>
+              <a:rPr lang="ja-JP" altLang="en-US" sz="1200"/>
+              <a:t>ここまで届く</a:t>
+            </a:r>
+            <a:endParaRPr lang="en-US" altLang="ja-JP" sz="1200" dirty="0"/>
+          </a:p>
+        </p:txBody>
+      </p:sp>
+      <p:cxnSp>
+        <p:nvCxnSpPr>
+          <p:cNvPr id="199" name="コネクタ: カギ線 50">
+            <a:extLst>
+              <a:ext uri="{FF2B5EF4-FFF2-40B4-BE49-F238E27FC236}">
+                <a16:creationId xmlns:a16="http://schemas.microsoft.com/office/drawing/2014/main" id="{5C9DBF84-4571-ED7E-3FAE-BA7D2B7989D7}"/>
+              </a:ext>
+            </a:extLst>
+          </p:cNvPr>
+          <p:cNvCxnSpPr>
+            <a:cxnSpLocks/>
+            <a:stCxn id="198" idx="0"/>
+            <a:endCxn id="185" idx="4"/>
+          </p:cNvCxnSpPr>
+          <p:nvPr/>
+        </p:nvCxnSpPr>
+        <p:spPr>
+          <a:xfrm rot="5400000" flipH="1" flipV="1">
+            <a:off x="4185683" y="5316258"/>
+            <a:ext cx="411230" cy="161306"/>
+          </a:xfrm>
+          <a:prstGeom prst="bentConnector3">
+            <a:avLst>
+              <a:gd name="adj1" fmla="val 50000"/>
+            </a:avLst>
+          </a:prstGeom>
+          <a:ln>
+            <a:solidFill>
+              <a:schemeClr val="tx1"/>
+            </a:solidFill>
+            <a:headEnd type="none" w="med" len="med"/>
+            <a:tailEnd type="triangle"/>
+          </a:ln>
+        </p:spPr>
+        <p:style>
+          <a:lnRef idx="1">
+            <a:schemeClr val="accent1"/>
+          </a:lnRef>
+          <a:fillRef idx="0">
+            <a:schemeClr val="accent1"/>
+          </a:fillRef>
+          <a:effectRef idx="0">
+            <a:schemeClr val="accent1"/>
+          </a:effectRef>
+          <a:fontRef idx="minor">
+            <a:schemeClr val="tx1"/>
+          </a:fontRef>
+        </p:style>
+      </p:cxnSp>
+    </p:spTree>
+    <p:extLst>
+      <p:ext uri="{BB962C8B-B14F-4D97-AF65-F5344CB8AC3E}">
+        <p14:creationId xmlns:p14="http://schemas.microsoft.com/office/powerpoint/2010/main" val="2916558446"/>
       </p:ext>
     </p:extLst>
   </p:cSld>
